--- a/markdowns/05-deliverables/proposal-deck/Granite_Proposal_Defense.pptx
+++ b/markdowns/05-deliverables/proposal-deck/Granite_Proposal_Defense.pptx
@@ -1285,7 +1285,7 @@
           <a:p>
             <a:r>
               <a:rPr lang="en-US" dirty="0"/>
-              <a:t>Say unprompted: 'controlled, not deterministic' — the replay protocol is deterministic, LLM-step variance is measured over N replays, never assumed away (R25). Say unprompted: the Semantic Error Diagnostic abstains where no checkable constraint exists, and the abstention rate is reported as a metric.</a:t>
+              <a:t>Say unprompted: 'controlled, not deterministic' — the replay protocol is deterministic, LLM-step variance is measured over N replays, never assumed away (R25). Say unprompted: the Semantic Error Diagnostic abstains where no checkable constraint exists, and the abstention rate is reported as a metric. If asked for the full SRS/use-case/SSD/test-plan detail behind this diagram, point to the architecture atlas's new 'Requirements &amp; Design' tab and the underlying files in markdowns/01-planning-and-scope/.</a:t>
             </a:r>
             <a:endParaRPr lang="en-US" dirty="0"/>
           </a:p>
@@ -7352,6 +7352,48 @@
                         <a:cs typeface="Calibri" charset="0"/>
                       </a:endParaRPr>
                     </a:p>
+                    <a:p>
+                      <a:pPr algn="l" indent="0" marL="0">
+                        <a:buNone/>
+                      </a:pPr>
+                      <a:r>
+                        <a:rPr lang="en-US" sz="950" b="1" dirty="0">
+                          <a:solidFill>
+                            <a:srgbClr val="20232B"/>
+                          </a:solidFill>
+                          <a:latin typeface="Calibri" pitchFamily="34" charset="0"/>
+                          <a:ea typeface="Calibri" pitchFamily="34" charset="-122"/>
+                          <a:cs typeface="Calibri" pitchFamily="34" charset="-120"/>
+                        </a:rPr>
+                        <a:t>(S24-011-D-HDLM,</a:t>
+                      </a:r>
+                      <a:endParaRPr lang="en-US" sz="950" dirty="0">
+                        <a:latin typeface="Calibri" charset="0"/>
+                        <a:ea typeface="Calibri" charset="0"/>
+                        <a:cs typeface="Calibri" charset="0"/>
+                      </a:endParaRPr>
+                    </a:p>
+                    <a:p>
+                      <a:pPr algn="l" indent="0" marL="0">
+                        <a:buNone/>
+                      </a:pPr>
+                      <a:r>
+                        <a:rPr lang="en-US" sz="950" b="1" dirty="0">
+                          <a:solidFill>
+                            <a:srgbClr val="20232B"/>
+                          </a:solidFill>
+                          <a:latin typeface="Calibri" pitchFamily="34" charset="0"/>
+                          <a:ea typeface="Calibri" pitchFamily="34" charset="-122"/>
+                          <a:cs typeface="Calibri" pitchFamily="34" charset="-120"/>
+                        </a:rPr>
+                        <a:t>Spring 2024)</a:t>
+                      </a:r>
+                      <a:endParaRPr lang="en-US" sz="950" dirty="0">
+                        <a:latin typeface="Calibri" charset="0"/>
+                        <a:ea typeface="Calibri" charset="0"/>
+                        <a:cs typeface="Calibri" charset="0"/>
+                      </a:endParaRPr>
+                    </a:p>
                   </a:txBody>
                   <a:tcPr marL="91440" marR="91440" marT="45720" marB="45720" anchor="ctr">
                     <a:lnL w="6350" cap="flat" cmpd="sng" algn="ctr">
@@ -7412,7 +7454,28 @@
                           <a:ea typeface="Calibri" pitchFamily="34" charset="-122"/>
                           <a:cs typeface="Calibri" pitchFamily="34" charset="-120"/>
                         </a:rPr>
-                        <a:t>[TO BE PROVIDED]</a:t>
+                        <a:t>Hallucination detection</a:t>
+                      </a:r>
+                      <a:endParaRPr lang="en-US" sz="950" dirty="0">
+                        <a:latin typeface="Calibri" charset="0"/>
+                        <a:ea typeface="Calibri" charset="0"/>
+                        <a:cs typeface="Calibri" charset="0"/>
+                      </a:endParaRPr>
+                    </a:p>
+                    <a:p>
+                      <a:pPr algn="ctr" indent="0" marL="0">
+                        <a:buNone/>
+                      </a:pPr>
+                      <a:r>
+                        <a:rPr lang="en-US" sz="950" i="1" dirty="0">
+                          <a:solidFill>
+                            <a:srgbClr val="8A8FA0"/>
+                          </a:solidFill>
+                          <a:latin typeface="Calibri" pitchFamily="34" charset="0"/>
+                          <a:ea typeface="Calibri" pitchFamily="34" charset="-122"/>
+                          <a:cs typeface="Calibri" pitchFamily="34" charset="-120"/>
+                        </a:rPr>
+                        <a:t>in single-LLM text</a:t>
                       </a:r>
                       <a:endParaRPr lang="en-US" sz="950" dirty="0">
                         <a:latin typeface="Calibri" charset="0"/>
@@ -7488,6 +7551,27 @@
                         <a:cs typeface="Calibri" charset="0"/>
                       </a:endParaRPr>
                     </a:p>
+                    <a:p>
+                      <a:pPr algn="ctr" indent="0" marL="0">
+                        <a:buNone/>
+                      </a:pPr>
+                      <a:r>
+                        <a:rPr lang="en-US" sz="950" i="1" dirty="0">
+                          <a:solidFill>
+                            <a:srgbClr val="8A8FA0"/>
+                          </a:solidFill>
+                          <a:latin typeface="Calibri" pitchFamily="34" charset="0"/>
+                          <a:ea typeface="Calibri" pitchFamily="34" charset="-122"/>
+                          <a:cs typeface="Calibri" pitchFamily="34" charset="-120"/>
+                        </a:rPr>
+                        <a:t>no attribution at all</a:t>
+                      </a:r>
+                      <a:endParaRPr lang="en-US" sz="950" dirty="0">
+                        <a:latin typeface="Calibri" charset="0"/>
+                        <a:ea typeface="Calibri" charset="0"/>
+                        <a:cs typeface="Calibri" charset="0"/>
+                      </a:endParaRPr>
+                    </a:p>
                   </a:txBody>
                   <a:tcPr marL="91440" marR="91440" marT="45720" marB="45720" anchor="ctr">
                     <a:lnL w="6350" cap="flat" cmpd="sng" algn="ctr">
@@ -7548,7 +7632,28 @@
                           <a:ea typeface="Calibri" pitchFamily="34" charset="-122"/>
                           <a:cs typeface="Calibri" pitchFamily="34" charset="-120"/>
                         </a:rPr>
-                        <a:t>—</a:t>
+                        <a:t>partial — single-LLM</a:t>
+                      </a:r>
+                      <a:endParaRPr lang="en-US" sz="950" dirty="0">
+                        <a:latin typeface="Calibri" charset="0"/>
+                        <a:ea typeface="Calibri" charset="0"/>
+                        <a:cs typeface="Calibri" charset="0"/>
+                      </a:endParaRPr>
+                    </a:p>
+                    <a:p>
+                      <a:pPr algn="ctr" indent="0" marL="0">
+                        <a:buNone/>
+                      </a:pPr>
+                      <a:r>
+                        <a:rPr lang="en-US" sz="950" i="1" dirty="0">
+                          <a:solidFill>
+                            <a:srgbClr val="8A8FA0"/>
+                          </a:solidFill>
+                          <a:latin typeface="Calibri" pitchFamily="34" charset="0"/>
+                          <a:ea typeface="Calibri" pitchFamily="34" charset="-122"/>
+                          <a:cs typeface="Calibri" pitchFamily="34" charset="-120"/>
+                        </a:rPr>
+                        <a:t>text only, not agent traces</a:t>
                       </a:r>
                       <a:endParaRPr lang="en-US" sz="950" dirty="0">
                         <a:latin typeface="Calibri" charset="0"/>
@@ -7616,7 +7721,28 @@
                           <a:ea typeface="Calibri" pitchFamily="34" charset="-122"/>
                           <a:cs typeface="Calibri" pitchFamily="34" charset="-120"/>
                         </a:rPr>
-                        <a:t>—</a:t>
+                        <a:t>✘ no repair/</a:t>
+                      </a:r>
+                      <a:endParaRPr lang="en-US" sz="950" dirty="0">
+                        <a:latin typeface="Calibri" charset="0"/>
+                        <a:ea typeface="Calibri" charset="0"/>
+                        <a:cs typeface="Calibri" charset="0"/>
+                      </a:endParaRPr>
+                    </a:p>
+                    <a:p>
+                      <a:pPr algn="ctr" indent="0" marL="0">
+                        <a:buNone/>
+                      </a:pPr>
+                      <a:r>
+                        <a:rPr lang="en-US" sz="950" i="1" dirty="0">
+                          <a:solidFill>
+                            <a:srgbClr val="8A8FA0"/>
+                          </a:solidFill>
+                          <a:latin typeface="Calibri" pitchFamily="34" charset="0"/>
+                          <a:ea typeface="Calibri" pitchFamily="34" charset="-122"/>
+                          <a:cs typeface="Calibri" pitchFamily="34" charset="-120"/>
+                        </a:rPr>
+                        <a:t>replay step</a:t>
                       </a:r>
                       <a:endParaRPr lang="en-US" sz="950" dirty="0">
                         <a:latin typeface="Calibri" charset="0"/>
@@ -7684,7 +7810,28 @@
                           <a:ea typeface="Calibri" pitchFamily="34" charset="-122"/>
                           <a:cs typeface="Calibri" pitchFamily="34" charset="-120"/>
                         </a:rPr>
-                        <a:t>—</a:t>
+                        <a:t>N/A — not a</a:t>
+                      </a:r>
+                      <a:endParaRPr lang="en-US" sz="950" dirty="0">
+                        <a:latin typeface="Calibri" charset="0"/>
+                        <a:ea typeface="Calibri" charset="0"/>
+                        <a:cs typeface="Calibri" charset="0"/>
+                      </a:endParaRPr>
+                    </a:p>
+                    <a:p>
+                      <a:pPr algn="ctr" indent="0" marL="0">
+                        <a:buNone/>
+                      </a:pPr>
+                      <a:r>
+                        <a:rPr lang="en-US" sz="950" i="1" dirty="0">
+                          <a:solidFill>
+                            <a:srgbClr val="8A8FA0"/>
+                          </a:solidFill>
+                          <a:latin typeface="Calibri" pitchFamily="34" charset="0"/>
+                          <a:ea typeface="Calibri" pitchFamily="34" charset="-122"/>
+                          <a:cs typeface="Calibri" pitchFamily="34" charset="-120"/>
+                        </a:rPr>
+                        <a:t>multi-agent system</a:t>
                       </a:r>
                       <a:endParaRPr lang="en-US" sz="950" dirty="0">
                         <a:latin typeface="Calibri" charset="0"/>
@@ -12884,7 +13031,7 @@
         <p:spPr>
           <a:xfrm>
             <a:off x="2286000" y="5943600"/>
-            <a:ext cx="7498080" cy="274320"/>
+            <a:ext cx="7498080" cy="219456"/>
           </a:xfrm>
           <a:prstGeom prst="rect">
             <a:avLst/>
@@ -12911,6 +13058,45 @@
               <a:t>In scope: 10 committed mechanisms (Tier 1 + gated Tier 2)   ·   Out of scope: message queues, Kubernetes/multi-region, full RBAC, DR infra, multi-tenant billing</a:t>
             </a:r>
             <a:endParaRPr lang="en-US" sz="950" dirty="0"/>
+          </a:p>
+        </p:txBody>
+      </p:sp>
+      <p:sp>
+        <p:nvSpPr>
+          <p:cNvPr id="28" name="Text 26"/>
+          <p:cNvSpPr txBox="1"/>
+          <p:nvPr/>
+        </p:nvSpPr>
+        <p:spPr>
+          <a:xfrm>
+            <a:off x="2286000" y="6163056"/>
+            <a:ext cx="7498080" cy="219456"/>
+          </a:xfrm>
+          <a:prstGeom prst="rect">
+            <a:avLst/>
+          </a:prstGeom>
+          <a:noFill/>
+          <a:ln/>
+        </p:spPr>
+        <p:txBody>
+          <a:bodyPr wrap="square" lIns="0" tIns="0" rIns="0" bIns="0" rtlCol="0" anchor="ctr"/>
+          <a:lstStyle/>
+          <a:p>
+            <a:pPr indent="0" marL="0">
+              <a:buNone/>
+            </a:pPr>
+            <a:r>
+              <a:rPr lang="en-US" sz="830" i="1" dirty="0">
+                <a:solidFill>
+                  <a:srgbClr val="5B6270"/>
+                </a:solidFill>
+                <a:latin typeface="Calibri" pitchFamily="34" charset="0"/>
+                <a:ea typeface="Calibri" pitchFamily="34" charset="-122"/>
+                <a:cs typeface="Calibri" pitchFamily="34" charset="-120"/>
+              </a:rPr>
+              <a:t>Full traceable spec behind this diagram: Use Case Model + diagram, 3 System Sequence Diagrams, SRS, Test Plan, Software Development Plan, wireframes — architecture atlas, tab “Requirements &amp; Design”</a:t>
+            </a:r>
+            <a:endParaRPr lang="en-US" sz="830" dirty="0"/>
           </a:p>
         </p:txBody>
       </p:sp>

--- a/markdowns/05-deliverables/proposal-deck/Granite_Proposal_Defense.pptx
+++ b/markdowns/05-deliverables/proposal-deck/Granite_Proposal_Defense.pptx
@@ -4,6 +4,9 @@
   <p:sldMasterIdLst>
     <p:sldMasterId id="2147483648" r:id="rId1"/>
   </p:sldMasterIdLst>
+  <p:notesMasterIdLst>
+    <p:notesMasterId r:id="rId12"/>
+  </p:notesMasterIdLst>
   <p:sldIdLst>
     <p:sldId id="256" r:id="rId2"/>
     <p:sldId id="257" r:id="rId3"/>
@@ -16,9 +19,6 @@
     <p:sldId id="264" r:id="rId10"/>
     <p:sldId id="265" r:id="rId11"/>
   </p:sldIdLst>
-  <p:notesMasterIdLst>
-    <p:notesMasterId r:id="rId12"/>
-  </p:notesMasterIdLst>
   <p:sldSz cx="12192000" cy="6858000"/>
   <p:notesSz cx="6858000" cy="12192000"/>
   <p:defaultTextStyle>
@@ -113,13 +113,49 @@
       </a:defRPr>
     </a:lvl9pPr>
   </p:defaultTextStyle>
+  <p:extLst>
+    <p:ext uri="{EFAFB233-063F-42B5-8137-9DF3F51BA10A}">
+      <p15:sldGuideLst xmlns:p15="http://schemas.microsoft.com/office/powerpoint/2012/main"/>
+    </p:ext>
+  </p:extLst>
 </p:presentation>
 </file>
 
+<file path=ppt/changesInfos/changesInfo1.xml><?xml version="1.0" encoding="utf-8"?>
+<pc:chgInfo xmlns:a="http://schemas.openxmlformats.org/drawingml/2006/main" xmlns:r="http://schemas.openxmlformats.org/officeDocument/2006/relationships" xmlns:ac="http://schemas.microsoft.com/office/drawing/2013/main/command" xmlns:pc="http://schemas.microsoft.com/office/powerpoint/2013/main/command">
+  <pc:docChgLst>
+    <pc:chgData name="Shahoud Shahid" userId="3c9cab93-14e5-4819-b0da-9c888b27567f" providerId="ADAL" clId="{F3DB6A94-22EA-4126-B191-698C38F207E8}"/>
+    <pc:docChg chg="modSld">
+      <pc:chgData name="Shahoud Shahid" userId="3c9cab93-14e5-4819-b0da-9c888b27567f" providerId="ADAL" clId="{F3DB6A94-22EA-4126-B191-698C38F207E8}" dt="2026-09-07T03:23:42.200" v="0" actId="14734"/>
+      <pc:docMkLst>
+        <pc:docMk/>
+      </pc:docMkLst>
+      <pc:sldChg chg="modSp mod">
+        <pc:chgData name="Shahoud Shahid" userId="3c9cab93-14e5-4819-b0da-9c888b27567f" providerId="ADAL" clId="{F3DB6A94-22EA-4126-B191-698C38F207E8}" dt="2026-09-07T03:23:42.200" v="0" actId="14734"/>
+        <pc:sldMkLst>
+          <pc:docMk/>
+          <pc:sldMk cId="0" sldId="258"/>
+        </pc:sldMkLst>
+        <pc:graphicFrameChg chg="modGraphic">
+          <ac:chgData name="Shahoud Shahid" userId="3c9cab93-14e5-4819-b0da-9c888b27567f" providerId="ADAL" clId="{F3DB6A94-22EA-4126-B191-698C38F207E8}" dt="2026-09-07T03:23:42.200" v="0" actId="14734"/>
+          <ac:graphicFrameMkLst>
+            <pc:docMk/>
+            <pc:sldMk cId="0" sldId="258"/>
+            <ac:graphicFrameMk id="6" creationId="{00000000-0000-0000-0000-000000000000}"/>
+          </ac:graphicFrameMkLst>
+        </pc:graphicFrameChg>
+      </pc:sldChg>
+    </pc:docChg>
+  </pc:docChgLst>
+</pc:chgInfo>
+</file>
+
 <file path=ppt/charts/chart1.xml><?xml version="1.0" encoding="utf-8"?>
-<c:chartSpace xmlns:c="http://schemas.openxmlformats.org/drawingml/2006/chart" xmlns:a="http://schemas.openxmlformats.org/drawingml/2006/main" xmlns:r="http://schemas.openxmlformats.org/officeDocument/2006/relationships">
+<c:chartSpace xmlns:c="http://schemas.openxmlformats.org/drawingml/2006/chart" xmlns:a="http://schemas.openxmlformats.org/drawingml/2006/main" xmlns:r="http://schemas.openxmlformats.org/officeDocument/2006/relationships" xmlns:c16r2="http://schemas.microsoft.com/office/drawing/2015/06/chart">
   <c:date1904 val="0"/>
+  <c:lang val="en-US"/>
   <c:roundedCorners val="1"/>
+  <c:style val="2"/>
   <c:chart>
     <c:autoTitleDeleted val="1"/>
     <c:plotArea>
@@ -151,18 +187,26 @@
           <c:invertIfNegative val="0"/>
           <c:dLbls>
             <c:numFmt formatCode="#,##0" sourceLinked="0"/>
+            <c:spPr>
+              <a:noFill/>
+              <a:ln>
+                <a:noFill/>
+              </a:ln>
+              <a:effectLst/>
+            </c:spPr>
             <c:txPr>
               <a:bodyPr/>
               <a:lstStyle/>
               <a:p>
                 <a:pPr>
-                  <a:defRPr b="1" i="0" strike="noStrike" sz="1100" u="none">
+                  <a:defRPr sz="1100" b="1" i="0" u="none" strike="noStrike">
                     <a:solidFill>
                       <a:srgbClr val="20232B"/>
                     </a:solidFill>
                     <a:latin typeface="Arial"/>
                   </a:defRPr>
                 </a:pPr>
+                <a:endParaRPr lang="en-PK"/>
               </a:p>
             </c:txPr>
             <c:showLegendKey val="0"/>
@@ -172,27 +216,30 @@
             <c:showPercent val="0"/>
             <c:showBubbleSize val="0"/>
             <c:showLeaderLines val="0"/>
+            <c:extLst>
+              <c:ext xmlns:c15="http://schemas.microsoft.com/office/drawing/2012/chart" uri="{CE6537A1-D6FC-4f65-9D91-7224C49458BB}">
+                <c15:showLeaderLines val="0"/>
+              </c:ext>
+            </c:extLst>
           </c:dLbls>
           <c:cat>
-            <c:multiLvlStrRef>
+            <c:strRef>
               <c:f>Sheet1!$A$2:$A$4</c:f>
-              <c:multiLvlStrCache>
+              <c:strCache>
                 <c:ptCount val="3"/>
-                <c:lvl>
-                  <c:pt idx="0">
-                    <c:v>Who&amp;When
+                <c:pt idx="0">
+                  <c:v>Who&amp;When
 (single-LLM)</c:v>
-                  </c:pt>
-                  <c:pt idx="1">
-                    <c:v>AgenTracer</c:v>
-                  </c:pt>
-                  <c:pt idx="2">
-                    <c:v>ErrorProbe
+                </c:pt>
+                <c:pt idx="1">
+                  <c:v>AgenTracer</c:v>
+                </c:pt>
+                <c:pt idx="2">
+                  <c:v>ErrorProbe
 (chosen baseline)</c:v>
-                  </c:pt>
-                </c:lvl>
-              </c:multiLvlStrCache>
-            </c:multiLvlStrRef>
+                </c:pt>
+              </c:strCache>
+            </c:strRef>
           </c:cat>
           <c:val>
             <c:numRef>
@@ -212,36 +259,23 @@
               </c:numCache>
             </c:numRef>
           </c:val>
+          <c:extLst>
+            <c:ext xmlns:c16="http://schemas.microsoft.com/office/drawing/2014/chart" uri="{C3380CC4-5D6E-409C-BE32-E72D297353CC}">
+              <c16:uniqueId val="{00000000-AB76-41D4-8290-C45D7D1030C7}"/>
+            </c:ext>
+          </c:extLst>
         </c:ser>
         <c:dLbls>
-          <c:numFmt formatCode="#,##0" sourceLinked="0"/>
-          <c:txPr>
-            <a:bodyPr/>
-            <a:lstStyle/>
-            <a:p>
-              <a:pPr>
-                <a:defRPr b="1" i="0" strike="noStrike" sz="1100" u="none">
-                  <a:solidFill>
-                    <a:srgbClr val="20232B"/>
-                  </a:solidFill>
-                  <a:latin typeface="Arial"/>
-                </a:defRPr>
-              </a:pPr>
-            </a:p>
-          </c:txPr>
           <c:showLegendKey val="0"/>
           <c:showVal val="1"/>
           <c:showCatName val="0"/>
           <c:showSerName val="0"/>
           <c:showPercent val="0"/>
           <c:showBubbleSize val="0"/>
-          <c:showLeaderLines val="0"/>
         </c:dLbls>
         <c:gapWidth val="150"/>
-        <c:overlap val="0"/>
         <c:axId val="2094734554"/>
         <c:axId val="2094734552"/>
-        <c:axId val="2094734556"/>
       </c:barChart>
       <c:catAx>
         <c:axId val="2094734554"/>
@@ -282,6 +316,7 @@
         <c:crosses val="autoZero"/>
         <c:auto val="1"/>
         <c:lblAlgn val="ctr"/>
+        <c:lblOffset val="100"/>
         <c:noMultiLvlLbl val="1"/>
       </c:catAx>
       <c:valAx>
@@ -348,6 +383,7 @@
     </c:plotArea>
     <c:plotVisOnly val="1"/>
     <c:dispBlanksAs val="span"/>
+    <c:showDLblsOverMax val="1"/>
   </c:chart>
   <c:spPr>
     <a:noFill/>
@@ -384,234 +420,10 @@
           <a:chExt cx="0" cy="0"/>
         </a:xfrm>
       </p:grpSpPr>
-      <p:sp>
-        <p:nvSpPr>
-          <p:cNvPr id="2" name="Header Placeholder 1"/>
-          <p:cNvSpPr>
-            <a:spLocks noGrp="1"/>
-          </p:cNvSpPr>
-          <p:nvPr>
-            <p:ph type="hdr" sz="quarter"/>
-          </p:nvPr>
-        </p:nvSpPr>
-        <p:spPr>
-          <a:xfrm>
-            <a:off x="0" y="0"/>
-            <a:ext cx="2971800" cy="458788"/>
-          </a:xfrm>
-          <a:prstGeom prst="rect">
-            <a:avLst/>
-          </a:prstGeom>
-        </p:spPr>
-        <p:txBody>
-          <a:bodyPr vert="horz" lIns="91440" tIns="45720" rIns="91440" bIns="45720" rtlCol="0"/>
-          <a:lstStyle>
-            <a:lvl1pPr algn="l">
-              <a:defRPr sz="1200"/>
-            </a:lvl1pPr>
-          </a:lstStyle>
-          <a:p>
-            <a:endParaRPr lang="en-US"/>
-          </a:p>
-        </p:txBody>
-      </p:sp>
-      <p:sp>
-        <p:nvSpPr>
-          <p:cNvPr id="3" name="Date Placeholder 2"/>
-          <p:cNvSpPr>
-            <a:spLocks noGrp="1"/>
-          </p:cNvSpPr>
-          <p:nvPr>
-            <p:ph type="dt" idx="1"/>
-          </p:nvPr>
-        </p:nvSpPr>
-        <p:spPr>
-          <a:xfrm>
-            <a:off x="3884613" y="0"/>
-            <a:ext cx="2971800" cy="458788"/>
-          </a:xfrm>
-          <a:prstGeom prst="rect">
-            <a:avLst/>
-          </a:prstGeom>
-        </p:spPr>
-        <p:txBody>
-          <a:bodyPr vert="horz" lIns="91440" tIns="45720" rIns="91440" bIns="45720" rtlCol="0"/>
-          <a:lstStyle>
-            <a:lvl1pPr algn="r">
-              <a:defRPr sz="1200"/>
-            </a:lvl1pPr>
-          </a:lstStyle>
-          <a:p>
-            <a:fld id="{5282F153-3F37-0F45-9E97-73ACFA13230C}" type="datetimeFigureOut">
-              <a:rPr lang="en-US"/>
-              <a:t>7/23/19</a:t>
-            </a:fld>
-            <a:endParaRPr lang="en-US"/>
-          </a:p>
-        </p:txBody>
-      </p:sp>
-      <p:sp>
-        <p:nvSpPr>
-          <p:cNvPr id="4" name="Slide Image Placeholder 3"/>
-          <p:cNvSpPr>
-            <a:spLocks noGrp="1" noRot="1" noChangeAspect="1"/>
-          </p:cNvSpPr>
-          <p:nvPr>
-            <p:ph type="sldImg" idx="2"/>
-          </p:nvPr>
-        </p:nvSpPr>
-        <p:spPr>
-          <a:xfrm>
-            <a:off x="685800" y="1143000"/>
-            <a:ext cx="5486400" cy="3086100"/>
-          </a:xfrm>
-          <a:prstGeom prst="rect">
-            <a:avLst/>
-          </a:prstGeom>
-          <a:noFill/>
-          <a:ln w="12700">
-            <a:solidFill>
-              <a:prstClr val="black"/>
-            </a:solidFill>
-          </a:ln>
-        </p:spPr>
-        <p:txBody>
-          <a:bodyPr vert="horz" lIns="91440" tIns="45720" rIns="91440" bIns="45720" rtlCol="0" anchor="ctr"/>
-          <a:lstStyle/>
-          <a:p>
-            <a:endParaRPr lang="en-US"/>
-          </a:p>
-        </p:txBody>
-      </p:sp>
-      <p:sp>
-        <p:nvSpPr>
-          <p:cNvPr id="5" name="Notes Placeholder 4"/>
-          <p:cNvSpPr>
-            <a:spLocks noGrp="1"/>
-          </p:cNvSpPr>
-          <p:nvPr>
-            <p:ph type="body" sz="quarter" idx="3"/>
-          </p:nvPr>
-        </p:nvSpPr>
-        <p:spPr>
-          <a:xfrm>
-            <a:off x="685800" y="4400550"/>
-            <a:ext cx="5486400" cy="3600450"/>
-          </a:xfrm>
-          <a:prstGeom prst="rect">
-            <a:avLst/>
-          </a:prstGeom>
-        </p:spPr>
-        <p:txBody>
-          <a:bodyPr vert="horz" lIns="91440" tIns="45720" rIns="91440" bIns="45720" rtlCol="0"/>
-          <a:lstStyle/>
-          <a:p>
-            <a:pPr lvl="0"/>
-            <a:r>
-              <a:rPr lang="en-US"/>
-              <a:t>Click to edit Master text styles</a:t>
-            </a:r>
-          </a:p>
-          <a:p>
-            <a:pPr lvl="1"/>
-            <a:r>
-              <a:rPr lang="en-US"/>
-              <a:t>Second level</a:t>
-            </a:r>
-          </a:p>
-          <a:p>
-            <a:pPr lvl="2"/>
-            <a:r>
-              <a:rPr lang="en-US"/>
-              <a:t>Third level</a:t>
-            </a:r>
-          </a:p>
-          <a:p>
-            <a:pPr lvl="3"/>
-            <a:r>
-              <a:rPr lang="en-US"/>
-              <a:t>Fourth level</a:t>
-            </a:r>
-          </a:p>
-          <a:p>
-            <a:pPr lvl="4"/>
-            <a:r>
-              <a:rPr lang="en-US"/>
-              <a:t>Fifth level</a:t>
-            </a:r>
-          </a:p>
-        </p:txBody>
-      </p:sp>
-      <p:sp>
-        <p:nvSpPr>
-          <p:cNvPr id="6" name="Footer Placeholder 5"/>
-          <p:cNvSpPr>
-            <a:spLocks noGrp="1"/>
-          </p:cNvSpPr>
-          <p:nvPr>
-            <p:ph type="ftr" sz="quarter" idx="4"/>
-          </p:nvPr>
-        </p:nvSpPr>
-        <p:spPr>
-          <a:xfrm>
-            <a:off x="0" y="8685213"/>
-            <a:ext cx="2971800" cy="458787"/>
-          </a:xfrm>
-          <a:prstGeom prst="rect">
-            <a:avLst/>
-          </a:prstGeom>
-        </p:spPr>
-        <p:txBody>
-          <a:bodyPr vert="horz" lIns="91440" tIns="45720" rIns="91440" bIns="45720" rtlCol="0" anchor="b"/>
-          <a:lstStyle>
-            <a:lvl1pPr algn="l">
-              <a:defRPr sz="1200"/>
-            </a:lvl1pPr>
-          </a:lstStyle>
-          <a:p>
-            <a:endParaRPr lang="en-US"/>
-          </a:p>
-        </p:txBody>
-      </p:sp>
-      <p:sp>
-        <p:nvSpPr>
-          <p:cNvPr id="7" name="Slide Number Placeholder 6"/>
-          <p:cNvSpPr>
-            <a:spLocks noGrp="1"/>
-          </p:cNvSpPr>
-          <p:nvPr>
-            <p:ph type="sldNum" sz="quarter" idx="5"/>
-          </p:nvPr>
-        </p:nvSpPr>
-        <p:spPr>
-          <a:xfrm>
-            <a:off x="3884613" y="8685213"/>
-            <a:ext cx="2971800" cy="458787"/>
-          </a:xfrm>
-          <a:prstGeom prst="rect">
-            <a:avLst/>
-          </a:prstGeom>
-        </p:spPr>
-        <p:txBody>
-          <a:bodyPr vert="horz" lIns="91440" tIns="45720" rIns="91440" bIns="45720" rtlCol="0" anchor="b"/>
-          <a:lstStyle>
-            <a:lvl1pPr algn="r">
-              <a:defRPr sz="1200"/>
-            </a:lvl1pPr>
-          </a:lstStyle>
-          <a:p>
-            <a:fld id="{CE5E9CC1-C706-0F49-92D6-E571CC5EEA8F}" type="slidenum">
-              <a:rPr lang="en-US"/>
-              <a:t>‹#›</a:t>
-            </a:fld>
-            <a:endParaRPr lang="en-US"/>
-          </a:p>
-        </p:txBody>
-      </p:sp>
     </p:spTree>
     <p:extLst>
       <p:ext uri="{BB962C8B-B14F-4D97-AF65-F5344CB8AC3E}">
-        <p14:creationId xmlns:p14="http://schemas.microsoft.com/office/powerpoint/2010/main" val="1024086991"/>
+        <p14:creationId xmlns:p14="http://schemas.microsoft.com/office/powerpoint/2010/main" val="841485848"/>
       </p:ext>
     </p:extLst>
   </p:cSld>
@@ -759,7 +571,6 @@
               <a:rPr lang="en-US" dirty="0"/>
               <a:t>Say the one-line problem exactly as written — WHO (teams running multi-agent systems), WHAT fails (attribution + silent failures), WHY it matters (nobody can verify a fix), in one breath. Do not explain the title word-by-word — slide 6 does that.</a:t>
             </a:r>
-            <a:endParaRPr lang="en-US" dirty="0"/>
           </a:p>
         </p:txBody>
       </p:sp>
@@ -847,7 +658,6 @@
               <a:rPr lang="en-US" dirty="0"/>
               <a:t>Each member states their own subsystem in one sentence, aloud — the panel is applying the guide's four ownership questions, and hearing three distinct voices early sets that tone. The DEI line is a real, checkable commitment, not a decorative label.</a:t>
             </a:r>
-            <a:endParaRPr lang="en-US" dirty="0"/>
           </a:p>
         </p:txBody>
       </p:sp>
@@ -935,7 +745,6 @@
               <a:rPr lang="en-US" dirty="0"/>
               <a:t>The stakeholder line is what turns CCP characteristic #6 from weak to clear — name who was actually contacted, or say plainly this is still in progress and name the date it closes. 14.2% is the field's own measured baseline for 'a human reads the trace' — the number the whole project is trying to beat.</a:t>
             </a:r>
-            <a:endParaRPr lang="en-US" dirty="0"/>
           </a:p>
         </p:txBody>
       </p:sp>
@@ -1023,7 +832,6 @@
               <a:rPr lang="en-US" dirty="0"/>
               <a:t>Volunteer the correction story: an early draft said 'nobody automates this' — direct vendor checks proved that stale, corrected on the record (R9). The gap is the combination, not any single missing feature — say this before being asked.</a:t>
             </a:r>
-            <a:endParaRPr lang="en-US" dirty="0"/>
           </a:p>
         </p:txBody>
       </p:sp>
@@ -1111,7 +919,6 @@
               <a:rPr lang="en-US" dirty="0"/>
               <a:t>State the backbone-confound caveat before being asked. Name that credible unpublished preprints exist in adjacent territory and the team made a recorded decision not to chase every one — the strategy is beating a peer-reviewed baseline, not pre-empting unpublished work.</a:t>
             </a:r>
-            <a:endParaRPr lang="en-US" dirty="0"/>
           </a:p>
         </p:txBody>
       </p:sp>
@@ -1199,7 +1006,6 @@
               <a:rPr lang="en-US" dirty="0"/>
               <a:t>Read characteristic 9's resolution aloud if asked why this is complex — the strongest, most concrete sentence in the plan. The guide's own worked examples clear 6–9 characteristics; this clears 8, ahead of most benchmark examples.</a:t>
             </a:r>
-            <a:endParaRPr lang="en-US" dirty="0"/>
           </a:p>
         </p:txBody>
       </p:sp>
@@ -1287,7 +1093,6 @@
               <a:rPr lang="en-US" dirty="0"/>
               <a:t>Say unprompted: 'controlled, not deterministic' — the replay protocol is deterministic, LLM-step variance is measured over N replays, never assumed away (R25). Say unprompted: the Semantic Error Diagnostic abstains where no checkable constraint exists, and the abstention rate is reported as a metric. If asked for the full SRS/use-case/SSD/test-plan detail behind this diagram, point to the architecture atlas's new 'Requirements &amp; Design' tab and the underlying files in markdowns/01-planning-and-scope/.</a:t>
             </a:r>
-            <a:endParaRPr lang="en-US" dirty="0"/>
           </a:p>
         </p:txBody>
       </p:sp>
@@ -1375,7 +1180,6 @@
               <a:rPr lang="en-US" dirty="0"/>
               <a:t>Lead with Spike 7's negative result and Spike 8's failure analysis — quote the guide's own words on this directly. Every number on this slide is real, computed from files in this repo.</a:t>
             </a:r>
-            <a:endParaRPr lang="en-US" dirty="0"/>
           </a:p>
         </p:txBody>
       </p:sp>
@@ -1463,7 +1267,6 @@
               <a:rPr lang="en-US" dirty="0"/>
               <a:t>The false-positive-rate-on-clean-controls metric is absent from every paper in the reviewed corpus and every platform checked — say this is the field's gap, not just ours. The acceptance band was declared before the full reproduction runs — that ordering is the point.</a:t>
             </a:r>
-            <a:endParaRPr lang="en-US" dirty="0"/>
           </a:p>
         </p:txBody>
       </p:sp>
@@ -1551,7 +1354,6 @@
               <a:rPr lang="en-US" dirty="0"/>
               <a:t>Deliver this slide as confidence, not confession: decision rules were pre-registered before results exist — exactly what the guide's change-control section asks for. If feasibility is pressed, point at slide 10's effort-budget number, don't just reassure verbally.</a:t>
             </a:r>
-            <a:endParaRPr lang="en-US" dirty="0"/>
           </a:p>
         </p:txBody>
       </p:sp>
@@ -1624,6 +1426,11 @@
 <file path=ppt/slideMasters/slideMaster1.xml><?xml version="1.0" encoding="utf-8"?>
 <p:sldMaster xmlns:a="http://schemas.openxmlformats.org/drawingml/2006/main" xmlns:r="http://schemas.openxmlformats.org/officeDocument/2006/relationships" xmlns:p="http://schemas.openxmlformats.org/presentationml/2006/main">
   <p:cSld>
+    <p:bg>
+      <p:bgRef idx="1001">
+        <a:schemeClr val="bg1"/>
+      </p:bgRef>
+    </p:bg>
     <p:spTree>
       <p:nvGrpSpPr>
         <p:cNvPr id="1" name=""/>
@@ -1906,6 +1713,7 @@
         <a:solidFill>
           <a:srgbClr val="1B1E25"/>
         </a:solidFill>
+        <a:effectLst/>
       </p:bgPr>
     </p:bg>
     <p:spTree>
@@ -1941,6 +1749,13 @@
           </a:solidFill>
           <a:ln/>
         </p:spPr>
+        <p:txBody>
+          <a:bodyPr/>
+          <a:lstStyle/>
+          <a:p>
+            <a:endParaRPr lang="en-PK"/>
+          </a:p>
+        </p:txBody>
       </p:sp>
       <p:sp>
         <p:nvSpPr>
@@ -1966,6 +1781,13 @@
             <a:prstDash val="solid"/>
           </a:ln>
         </p:spPr>
+        <p:txBody>
+          <a:bodyPr/>
+          <a:lstStyle/>
+          <a:p>
+            <a:endParaRPr lang="en-PK"/>
+          </a:p>
+        </p:txBody>
       </p:sp>
       <p:sp>
         <p:nvSpPr>
@@ -1988,11 +1810,11 @@
           <a:bodyPr wrap="square" lIns="0" tIns="0" rIns="0" bIns="0" rtlCol="0" anchor="ctr"/>
           <a:lstStyle/>
           <a:p>
-            <a:pPr indent="0" marL="0">
-              <a:buNone/>
-            </a:pPr>
-            <a:r>
-              <a:rPr lang="en-US" sz="1200" b="1" spc="150" kern="0" dirty="0">
+            <a:pPr marL="0" indent="0">
+              <a:buNone/>
+            </a:pPr>
+            <a:r>
+              <a:rPr lang="en-US" sz="1200" b="1" kern="0" spc="150" dirty="0">
                 <a:solidFill>
                   <a:srgbClr val="D9A15C"/>
                 </a:solidFill>
@@ -2027,7 +1849,7 @@
           <a:bodyPr wrap="square" lIns="0" tIns="0" rIns="0" bIns="0" rtlCol="0" anchor="ctr"/>
           <a:lstStyle/>
           <a:p>
-            <a:pPr indent="0" marL="0">
+            <a:pPr marL="0" indent="0">
               <a:buNone/>
             </a:pPr>
             <a:r>
@@ -2066,7 +1888,7 @@
           <a:bodyPr wrap="square" lIns="0" tIns="0" rIns="0" bIns="0" rtlCol="0" anchor="ctr"/>
           <a:lstStyle/>
           <a:p>
-            <a:pPr indent="0" marL="0">
+            <a:pPr marL="0" indent="0">
               <a:buNone/>
             </a:pPr>
             <a:r>
@@ -2106,6 +1928,13 @@
             <a:prstDash val="solid"/>
           </a:ln>
         </p:spPr>
+        <p:txBody>
+          <a:bodyPr/>
+          <a:lstStyle/>
+          <a:p>
+            <a:endParaRPr lang="en-PK"/>
+          </a:p>
+        </p:txBody>
       </p:sp>
       <p:sp>
         <p:nvSpPr>
@@ -2128,7 +1957,7 @@
           <a:bodyPr wrap="square" lIns="0" tIns="0" rIns="0" bIns="0" rtlCol="0" anchor="ctr"/>
           <a:lstStyle/>
           <a:p>
-            <a:pPr indent="0" marL="0">
+            <a:pPr marL="0" indent="0">
               <a:buNone/>
             </a:pPr>
             <a:r>
@@ -2167,7 +1996,7 @@
           <a:bodyPr wrap="square" lIns="0" tIns="0" rIns="0" bIns="0" rtlCol="0" anchor="ctr"/>
           <a:lstStyle/>
           <a:p>
-            <a:pPr indent="0" marL="0">
+            <a:pPr marL="0" indent="0">
               <a:buNone/>
             </a:pPr>
             <a:r>
@@ -2184,7 +2013,7 @@
             <a:endParaRPr lang="en-US" sz="1250" dirty="0"/>
           </a:p>
           <a:p>
-            <a:pPr indent="0" marL="0">
+            <a:pPr marL="0" indent="0">
               <a:buNone/>
             </a:pPr>
             <a:r>
@@ -2223,7 +2052,7 @@
           <a:bodyPr wrap="square" lIns="0" tIns="0" rIns="0" bIns="0" rtlCol="0" anchor="ctr"/>
           <a:lstStyle/>
           <a:p>
-            <a:pPr indent="0" marL="0">
+            <a:pPr marL="0" indent="0">
               <a:buNone/>
             </a:pPr>
             <a:r>
@@ -2240,7 +2069,7 @@
             <a:endParaRPr lang="en-US" sz="1250" dirty="0"/>
           </a:p>
           <a:p>
-            <a:pPr indent="0" marL="0">
+            <a:pPr marL="0" indent="0">
               <a:buNone/>
             </a:pPr>
             <a:r>
@@ -2279,7 +2108,7 @@
           <a:bodyPr wrap="square" lIns="0" tIns="0" rIns="0" bIns="0" rtlCol="0" anchor="ctr"/>
           <a:lstStyle/>
           <a:p>
-            <a:pPr indent="0" marL="0">
+            <a:pPr marL="0" indent="0">
               <a:buNone/>
             </a:pPr>
             <a:r>
@@ -2296,7 +2125,7 @@
             <a:endParaRPr lang="en-US" sz="1250" dirty="0"/>
           </a:p>
           <a:p>
-            <a:pPr indent="0" marL="0">
+            <a:pPr marL="0" indent="0">
               <a:buNone/>
             </a:pPr>
             <a:r>
@@ -2336,6 +2165,13 @@
             <a:prstDash val="solid"/>
           </a:ln>
         </p:spPr>
+        <p:txBody>
+          <a:bodyPr/>
+          <a:lstStyle/>
+          <a:p>
+            <a:endParaRPr lang="en-PK"/>
+          </a:p>
+        </p:txBody>
       </p:sp>
       <p:sp>
         <p:nvSpPr>
@@ -2358,7 +2194,7 @@
           <a:bodyPr wrap="square" lIns="0" tIns="0" rIns="0" bIns="0" rtlCol="0" anchor="ctr"/>
           <a:lstStyle/>
           <a:p>
-            <a:pPr indent="0" marL="0">
+            <a:pPr marL="0" indent="0">
               <a:buNone/>
             </a:pPr>
             <a:r>
@@ -2372,9 +2208,6 @@
               </a:rPr>
               <a:t>Supervisor  </a:t>
             </a:r>
-            <a:pPr indent="0" marL="0">
-              <a:buNone/>
-            </a:pPr>
             <a:r>
               <a:rPr lang="en-US" sz="1250" b="1" dirty="0">
                 <a:solidFill>
@@ -2389,7 +2222,7 @@
             <a:endParaRPr lang="en-US" sz="1100" dirty="0"/>
           </a:p>
           <a:p>
-            <a:pPr indent="0" marL="0">
+            <a:pPr marL="0" indent="0">
               <a:buNone/>
             </a:pPr>
             <a:r>
@@ -2423,6 +2256,7 @@
         <a:solidFill>
           <a:srgbClr val="FFFFFF"/>
         </a:solidFill>
+        <a:effectLst/>
       </p:bgPr>
     </p:bg>
     <p:spTree>
@@ -2460,11 +2294,11 @@
           <a:bodyPr wrap="square" lIns="0" tIns="0" rIns="0" bIns="0" rtlCol="0" anchor="ctr"/>
           <a:lstStyle/>
           <a:p>
-            <a:pPr indent="0" marL="0">
-              <a:buNone/>
-            </a:pPr>
-            <a:r>
-              <a:rPr lang="en-US" sz="1100" b="1" spc="150" kern="0" dirty="0">
+            <a:pPr marL="0" indent="0">
+              <a:buNone/>
+            </a:pPr>
+            <a:r>
+              <a:rPr lang="en-US" sz="1100" b="1" kern="0" spc="150" dirty="0">
                 <a:solidFill>
                   <a:srgbClr val="8A5F22"/>
                 </a:solidFill>
@@ -2499,7 +2333,7 @@
           <a:bodyPr wrap="square" lIns="0" tIns="0" rIns="0" bIns="0" rtlCol="0" anchor="ctr"/>
           <a:lstStyle/>
           <a:p>
-            <a:pPr indent="0" marL="0">
+            <a:pPr marL="0" indent="0">
               <a:buNone/>
             </a:pPr>
             <a:r>
@@ -2536,6 +2370,13 @@
           </a:solidFill>
           <a:ln/>
         </p:spPr>
+        <p:txBody>
+          <a:bodyPr/>
+          <a:lstStyle/>
+          <a:p>
+            <a:endParaRPr lang="en-PK"/>
+          </a:p>
+        </p:txBody>
       </p:sp>
       <p:sp>
         <p:nvSpPr>
@@ -2558,7 +2399,7 @@
           <a:bodyPr wrap="square" lIns="0" tIns="0" rIns="0" bIns="0" rtlCol="0" anchor="ctr"/>
           <a:lstStyle/>
           <a:p>
-            <a:pPr algn="r" indent="0" marL="0">
+            <a:pPr marL="0" indent="0" algn="r">
               <a:buNone/>
             </a:pPr>
             <a:r>
@@ -2602,6 +2443,13 @@
             <a:prstDash val="solid"/>
           </a:ln>
         </p:spPr>
+        <p:txBody>
+          <a:bodyPr/>
+          <a:lstStyle/>
+          <a:p>
+            <a:endParaRPr lang="en-PK"/>
+          </a:p>
+        </p:txBody>
       </p:sp>
       <p:sp>
         <p:nvSpPr>
@@ -2624,7 +2472,7 @@
           <a:bodyPr wrap="square" lIns="0" tIns="0" rIns="0" bIns="0" rtlCol="0" anchor="ctr"/>
           <a:lstStyle/>
           <a:p>
-            <a:pPr indent="0" marL="0">
+            <a:pPr marL="0" indent="0">
               <a:buNone/>
             </a:pPr>
             <a:r>
@@ -2663,6 +2511,13 @@
           </a:solidFill>
           <a:ln/>
         </p:spPr>
+        <p:txBody>
+          <a:bodyPr/>
+          <a:lstStyle/>
+          <a:p>
+            <a:endParaRPr lang="en-PK"/>
+          </a:p>
+        </p:txBody>
       </p:sp>
       <p:sp>
         <p:nvSpPr>
@@ -2685,7 +2540,7 @@
           <a:bodyPr wrap="square" lIns="0" tIns="0" rIns="0" bIns="0" rtlCol="0" anchor="ctr"/>
           <a:lstStyle/>
           <a:p>
-            <a:pPr algn="ctr" indent="0" marL="0">
+            <a:pPr marL="0" indent="0" algn="ctr">
               <a:buNone/>
             </a:pPr>
             <a:r>
@@ -2724,7 +2579,7 @@
           <a:bodyPr wrap="square" lIns="0" tIns="0" rIns="0" bIns="0" rtlCol="0" anchor="ctr"/>
           <a:lstStyle/>
           <a:p>
-            <a:pPr indent="0" marL="0">
+            <a:pPr marL="0" indent="0">
               <a:buNone/>
             </a:pPr>
             <a:r>
@@ -2763,7 +2618,7 @@
           <a:bodyPr wrap="square" lIns="0" tIns="0" rIns="0" bIns="0" rtlCol="0" anchor="ctr"/>
           <a:lstStyle/>
           <a:p>
-            <a:pPr indent="0" marL="0">
+            <a:pPr marL="0" indent="0">
               <a:buNone/>
             </a:pPr>
             <a:r>
@@ -2807,6 +2662,13 @@
             <a:prstDash val="solid"/>
           </a:ln>
         </p:spPr>
+        <p:txBody>
+          <a:bodyPr/>
+          <a:lstStyle/>
+          <a:p>
+            <a:endParaRPr lang="en-PK"/>
+          </a:p>
+        </p:txBody>
       </p:sp>
       <p:sp>
         <p:nvSpPr>
@@ -2829,7 +2691,7 @@
           <a:bodyPr wrap="square" lIns="0" tIns="0" rIns="0" bIns="0" rtlCol="0" anchor="ctr"/>
           <a:lstStyle/>
           <a:p>
-            <a:pPr indent="0" marL="0">
+            <a:pPr marL="0" indent="0">
               <a:buNone/>
             </a:pPr>
             <a:r>
@@ -2868,6 +2730,13 @@
           </a:solidFill>
           <a:ln/>
         </p:spPr>
+        <p:txBody>
+          <a:bodyPr/>
+          <a:lstStyle/>
+          <a:p>
+            <a:endParaRPr lang="en-PK"/>
+          </a:p>
+        </p:txBody>
       </p:sp>
       <p:sp>
         <p:nvSpPr>
@@ -2890,7 +2759,7 @@
           <a:bodyPr wrap="square" lIns="0" tIns="0" rIns="0" bIns="0" rtlCol="0" anchor="ctr"/>
           <a:lstStyle/>
           <a:p>
-            <a:pPr algn="ctr" indent="0" marL="0">
+            <a:pPr marL="0" indent="0" algn="ctr">
               <a:buNone/>
             </a:pPr>
             <a:r>
@@ -2929,7 +2798,7 @@
           <a:bodyPr wrap="square" lIns="0" tIns="0" rIns="0" bIns="0" rtlCol="0" anchor="ctr"/>
           <a:lstStyle/>
           <a:p>
-            <a:pPr indent="0" marL="0">
+            <a:pPr marL="0" indent="0">
               <a:buNone/>
             </a:pPr>
             <a:r>
@@ -2968,7 +2837,7 @@
           <a:bodyPr wrap="square" lIns="0" tIns="0" rIns="0" bIns="0" rtlCol="0" anchor="ctr"/>
           <a:lstStyle/>
           <a:p>
-            <a:pPr indent="0" marL="0">
+            <a:pPr marL="0" indent="0">
               <a:buNone/>
             </a:pPr>
             <a:r>
@@ -3012,6 +2881,13 @@
             <a:prstDash val="solid"/>
           </a:ln>
         </p:spPr>
+        <p:txBody>
+          <a:bodyPr/>
+          <a:lstStyle/>
+          <a:p>
+            <a:endParaRPr lang="en-PK"/>
+          </a:p>
+        </p:txBody>
       </p:sp>
       <p:sp>
         <p:nvSpPr>
@@ -3034,7 +2910,7 @@
           <a:bodyPr wrap="square" lIns="0" tIns="0" rIns="0" bIns="0" rtlCol="0" anchor="ctr"/>
           <a:lstStyle/>
           <a:p>
-            <a:pPr indent="0" marL="0">
+            <a:pPr marL="0" indent="0">
               <a:buNone/>
             </a:pPr>
             <a:r>
@@ -3073,6 +2949,13 @@
           </a:solidFill>
           <a:ln/>
         </p:spPr>
+        <p:txBody>
+          <a:bodyPr/>
+          <a:lstStyle/>
+          <a:p>
+            <a:endParaRPr lang="en-PK"/>
+          </a:p>
+        </p:txBody>
       </p:sp>
       <p:sp>
         <p:nvSpPr>
@@ -3095,7 +2978,7 @@
           <a:bodyPr wrap="square" lIns="0" tIns="0" rIns="0" bIns="0" rtlCol="0" anchor="ctr"/>
           <a:lstStyle/>
           <a:p>
-            <a:pPr algn="ctr" indent="0" marL="0">
+            <a:pPr marL="0" indent="0" algn="ctr">
               <a:buNone/>
             </a:pPr>
             <a:r>
@@ -3134,7 +3017,7 @@
           <a:bodyPr wrap="square" lIns="0" tIns="0" rIns="0" bIns="0" rtlCol="0" anchor="ctr"/>
           <a:lstStyle/>
           <a:p>
-            <a:pPr indent="0" marL="0">
+            <a:pPr marL="0" indent="0">
               <a:buNone/>
             </a:pPr>
             <a:r>
@@ -3173,7 +3056,7 @@
           <a:bodyPr wrap="square" lIns="0" tIns="0" rIns="0" bIns="0" rtlCol="0" anchor="ctr"/>
           <a:lstStyle/>
           <a:p>
-            <a:pPr indent="0" marL="0">
+            <a:pPr marL="0" indent="0">
               <a:buNone/>
             </a:pPr>
             <a:r>
@@ -3212,11 +3095,11 @@
           <a:bodyPr wrap="square" lIns="0" tIns="0" rIns="0" bIns="0" rtlCol="0" anchor="ctr"/>
           <a:lstStyle/>
           <a:p>
-            <a:pPr indent="0" marL="0">
-              <a:buNone/>
-            </a:pPr>
-            <a:r>
-              <a:rPr lang="en-US" sz="1000" b="1" spc="100" kern="0" dirty="0">
+            <a:pPr marL="0" indent="0">
+              <a:buNone/>
+            </a:pPr>
+            <a:r>
+              <a:rPr lang="en-US" sz="1000" b="1" kern="0" spc="100" dirty="0">
                 <a:solidFill>
                   <a:srgbClr val="8A5F22"/>
                 </a:solidFill>
@@ -3252,6 +3135,13 @@
             <a:prstDash val="solid"/>
           </a:ln>
         </p:spPr>
+        <p:txBody>
+          <a:bodyPr/>
+          <a:lstStyle/>
+          <a:p>
+            <a:endParaRPr lang="en-PK"/>
+          </a:p>
+        </p:txBody>
       </p:sp>
       <p:sp>
         <p:nvSpPr>
@@ -3277,6 +3167,13 @@
             <a:prstDash val="solid"/>
           </a:ln>
         </p:spPr>
+        <p:txBody>
+          <a:bodyPr/>
+          <a:lstStyle/>
+          <a:p>
+            <a:endParaRPr lang="en-PK"/>
+          </a:p>
+        </p:txBody>
       </p:sp>
       <p:sp>
         <p:nvSpPr>
@@ -3299,7 +3196,7 @@
           <a:bodyPr wrap="square" lIns="0" tIns="0" rIns="0" bIns="0" rtlCol="0" anchor="ctr"/>
           <a:lstStyle/>
           <a:p>
-            <a:pPr algn="ctr" indent="0" marL="0">
+            <a:pPr marL="0" indent="0" algn="ctr">
               <a:buNone/>
             </a:pPr>
             <a:r>
@@ -3316,7 +3213,7 @@
             <a:endParaRPr lang="en-US" sz="830" dirty="0"/>
           </a:p>
           <a:p>
-            <a:pPr algn="ctr" indent="0" marL="0">
+            <a:pPr marL="0" indent="0" algn="ctr">
               <a:buNone/>
             </a:pPr>
             <a:r>
@@ -3358,6 +3255,13 @@
             <a:prstDash val="solid"/>
           </a:ln>
         </p:spPr>
+        <p:txBody>
+          <a:bodyPr/>
+          <a:lstStyle/>
+          <a:p>
+            <a:endParaRPr lang="en-PK"/>
+          </a:p>
+        </p:txBody>
       </p:sp>
       <p:sp>
         <p:nvSpPr>
@@ -3380,7 +3284,7 @@
           <a:bodyPr wrap="square" lIns="0" tIns="0" rIns="0" bIns="0" rtlCol="0" anchor="ctr"/>
           <a:lstStyle/>
           <a:p>
-            <a:pPr algn="ctr" indent="0" marL="0">
+            <a:pPr marL="0" indent="0" algn="ctr">
               <a:buNone/>
             </a:pPr>
             <a:r>
@@ -3397,7 +3301,7 @@
             <a:endParaRPr lang="en-US" sz="830" dirty="0"/>
           </a:p>
           <a:p>
-            <a:pPr algn="ctr" indent="0" marL="0">
+            <a:pPr marL="0" indent="0" algn="ctr">
               <a:buNone/>
             </a:pPr>
             <a:r>
@@ -3414,7 +3318,7 @@
             <a:endParaRPr lang="en-US" sz="830" dirty="0"/>
           </a:p>
           <a:p>
-            <a:pPr algn="ctr" indent="0" marL="0">
+            <a:pPr marL="0" indent="0" algn="ctr">
               <a:buNone/>
             </a:pPr>
             <a:r>
@@ -3456,6 +3360,13 @@
             <a:prstDash val="solid"/>
           </a:ln>
         </p:spPr>
+        <p:txBody>
+          <a:bodyPr/>
+          <a:lstStyle/>
+          <a:p>
+            <a:endParaRPr lang="en-PK"/>
+          </a:p>
+        </p:txBody>
       </p:sp>
       <p:sp>
         <p:nvSpPr>
@@ -3478,7 +3389,7 @@
           <a:bodyPr wrap="square" lIns="0" tIns="0" rIns="0" bIns="0" rtlCol="0" anchor="ctr"/>
           <a:lstStyle/>
           <a:p>
-            <a:pPr algn="ctr" indent="0" marL="0">
+            <a:pPr marL="0" indent="0" algn="ctr">
               <a:buNone/>
             </a:pPr>
             <a:r>
@@ -3495,7 +3406,7 @@
             <a:endParaRPr lang="en-US" sz="830" dirty="0"/>
           </a:p>
           <a:p>
-            <a:pPr algn="ctr" indent="0" marL="0">
+            <a:pPr marL="0" indent="0" algn="ctr">
               <a:buNone/>
             </a:pPr>
             <a:r>
@@ -3537,6 +3448,13 @@
             <a:prstDash val="solid"/>
           </a:ln>
         </p:spPr>
+        <p:txBody>
+          <a:bodyPr/>
+          <a:lstStyle/>
+          <a:p>
+            <a:endParaRPr lang="en-PK"/>
+          </a:p>
+        </p:txBody>
       </p:sp>
       <p:sp>
         <p:nvSpPr>
@@ -3559,7 +3477,7 @@
           <a:bodyPr wrap="square" lIns="0" tIns="0" rIns="0" bIns="0" rtlCol="0" anchor="ctr"/>
           <a:lstStyle/>
           <a:p>
-            <a:pPr algn="ctr" indent="0" marL="0">
+            <a:pPr marL="0" indent="0" algn="ctr">
               <a:buNone/>
             </a:pPr>
             <a:r>
@@ -3576,7 +3494,7 @@
             <a:endParaRPr lang="en-US" sz="830" dirty="0"/>
           </a:p>
           <a:p>
-            <a:pPr algn="ctr" indent="0" marL="0">
+            <a:pPr marL="0" indent="0" algn="ctr">
               <a:buNone/>
             </a:pPr>
             <a:r>
@@ -3618,6 +3536,13 @@
             <a:prstDash val="solid"/>
           </a:ln>
         </p:spPr>
+        <p:txBody>
+          <a:bodyPr/>
+          <a:lstStyle/>
+          <a:p>
+            <a:endParaRPr lang="en-PK"/>
+          </a:p>
+        </p:txBody>
       </p:sp>
       <p:sp>
         <p:nvSpPr>
@@ -3640,7 +3565,7 @@
           <a:bodyPr wrap="square" lIns="0" tIns="0" rIns="0" bIns="0" rtlCol="0" anchor="ctr"/>
           <a:lstStyle/>
           <a:p>
-            <a:pPr algn="ctr" indent="0" marL="0">
+            <a:pPr marL="0" indent="0" algn="ctr">
               <a:buNone/>
             </a:pPr>
             <a:r>
@@ -3657,7 +3582,7 @@
             <a:endParaRPr lang="en-US" sz="830" dirty="0"/>
           </a:p>
           <a:p>
-            <a:pPr algn="ctr" indent="0" marL="0">
+            <a:pPr marL="0" indent="0" algn="ctr">
               <a:buNone/>
             </a:pPr>
             <a:r>
@@ -3701,6 +3626,13 @@
             <a:prstDash val="solid"/>
           </a:ln>
         </p:spPr>
+        <p:txBody>
+          <a:bodyPr/>
+          <a:lstStyle/>
+          <a:p>
+            <a:endParaRPr lang="en-PK"/>
+          </a:p>
+        </p:txBody>
       </p:sp>
       <p:sp>
         <p:nvSpPr>
@@ -3723,7 +3655,7 @@
           <a:bodyPr wrap="square" lIns="0" tIns="0" rIns="0" bIns="0" rtlCol="0" anchor="ctr"/>
           <a:lstStyle/>
           <a:p>
-            <a:pPr indent="0" marL="0">
+            <a:pPr marL="0" indent="0">
               <a:buNone/>
             </a:pPr>
             <a:r>
@@ -3767,6 +3699,13 @@
             <a:prstDash val="solid"/>
           </a:ln>
         </p:spPr>
+        <p:txBody>
+          <a:bodyPr/>
+          <a:lstStyle/>
+          <a:p>
+            <a:endParaRPr lang="en-PK"/>
+          </a:p>
+        </p:txBody>
       </p:sp>
       <p:sp>
         <p:nvSpPr>
@@ -3789,11 +3728,11 @@
           <a:bodyPr wrap="square" lIns="0" tIns="0" rIns="0" bIns="0" rtlCol="0" anchor="ctr"/>
           <a:lstStyle/>
           <a:p>
-            <a:pPr indent="0" marL="0">
-              <a:buNone/>
-            </a:pPr>
-            <a:r>
-              <a:rPr lang="en-US" sz="950" b="1" spc="100" kern="0" dirty="0">
+            <a:pPr marL="0" indent="0">
+              <a:buNone/>
+            </a:pPr>
+            <a:r>
+              <a:rPr lang="en-US" sz="950" b="1" kern="0" spc="100" dirty="0">
                 <a:solidFill>
                   <a:srgbClr val="1F7D84"/>
                 </a:solidFill>
@@ -3918,6 +3857,13 @@
             <a:prstDash val="solid"/>
           </a:ln>
         </p:spPr>
+        <p:txBody>
+          <a:bodyPr/>
+          <a:lstStyle/>
+          <a:p>
+            <a:endParaRPr lang="en-PK"/>
+          </a:p>
+        </p:txBody>
       </p:sp>
       <p:sp>
         <p:nvSpPr>
@@ -3940,11 +3886,11 @@
           <a:bodyPr wrap="square" lIns="0" tIns="0" rIns="0" bIns="0" rtlCol="0" anchor="ctr"/>
           <a:lstStyle/>
           <a:p>
-            <a:pPr indent="0" marL="0">
-              <a:buNone/>
-            </a:pPr>
-            <a:r>
-              <a:rPr lang="en-US" sz="950" b="1" spc="100" kern="0" dirty="0">
+            <a:pPr marL="0" indent="0">
+              <a:buNone/>
+            </a:pPr>
+            <a:r>
+              <a:rPr lang="en-US" sz="950" b="1" kern="0" spc="100" dirty="0">
                 <a:solidFill>
                   <a:srgbClr val="A6392F"/>
                 </a:solidFill>
@@ -4069,6 +4015,13 @@
             <a:prstDash val="solid"/>
           </a:ln>
         </p:spPr>
+        <p:txBody>
+          <a:bodyPr/>
+          <a:lstStyle/>
+          <a:p>
+            <a:endParaRPr lang="en-PK"/>
+          </a:p>
+        </p:txBody>
       </p:sp>
       <p:sp>
         <p:nvSpPr>
@@ -4091,11 +4044,11 @@
           <a:bodyPr wrap="square" lIns="0" tIns="0" rIns="0" bIns="0" rtlCol="0" anchor="ctr"/>
           <a:lstStyle/>
           <a:p>
-            <a:pPr indent="0" marL="0">
-              <a:buNone/>
-            </a:pPr>
-            <a:r>
-              <a:rPr lang="en-US" sz="950" b="1" spc="100" kern="0" dirty="0">
+            <a:pPr marL="0" indent="0">
+              <a:buNone/>
+            </a:pPr>
+            <a:r>
+              <a:rPr lang="en-US" sz="950" b="1" kern="0" spc="100" dirty="0">
                 <a:solidFill>
                   <a:srgbClr val="2F5F9E"/>
                 </a:solidFill>
@@ -4189,6 +4142,7 @@
         <a:solidFill>
           <a:srgbClr val="FFFFFF"/>
         </a:solidFill>
+        <a:effectLst/>
       </p:bgPr>
     </p:bg>
     <p:spTree>
@@ -4226,11 +4180,11 @@
           <a:bodyPr wrap="square" lIns="0" tIns="0" rIns="0" bIns="0" rtlCol="0" anchor="ctr"/>
           <a:lstStyle/>
           <a:p>
-            <a:pPr indent="0" marL="0">
-              <a:buNone/>
-            </a:pPr>
-            <a:r>
-              <a:rPr lang="en-US" sz="1100" b="1" spc="150" kern="0" dirty="0">
+            <a:pPr marL="0" indent="0">
+              <a:buNone/>
+            </a:pPr>
+            <a:r>
+              <a:rPr lang="en-US" sz="1100" b="1" kern="0" spc="150" dirty="0">
                 <a:solidFill>
                   <a:srgbClr val="8A5F22"/>
                 </a:solidFill>
@@ -4265,7 +4219,7 @@
           <a:bodyPr wrap="square" lIns="0" tIns="0" rIns="0" bIns="0" rtlCol="0" anchor="ctr"/>
           <a:lstStyle/>
           <a:p>
-            <a:pPr indent="0" marL="0">
+            <a:pPr marL="0" indent="0">
               <a:buNone/>
             </a:pPr>
             <a:r>
@@ -4302,6 +4256,13 @@
           </a:solidFill>
           <a:ln/>
         </p:spPr>
+        <p:txBody>
+          <a:bodyPr/>
+          <a:lstStyle/>
+          <a:p>
+            <a:endParaRPr lang="en-PK"/>
+          </a:p>
+        </p:txBody>
       </p:sp>
       <p:sp>
         <p:nvSpPr>
@@ -4324,7 +4285,7 @@
           <a:bodyPr wrap="square" lIns="0" tIns="0" rIns="0" bIns="0" rtlCol="0" anchor="ctr"/>
           <a:lstStyle/>
           <a:p>
-            <a:pPr algn="r" indent="0" marL="0">
+            <a:pPr marL="0" indent="0" algn="r">
               <a:buNone/>
             </a:pPr>
             <a:r>
@@ -4368,6 +4329,13 @@
             <a:prstDash val="solid"/>
           </a:ln>
         </p:spPr>
+        <p:txBody>
+          <a:bodyPr/>
+          <a:lstStyle/>
+          <a:p>
+            <a:endParaRPr lang="en-PK"/>
+          </a:p>
+        </p:txBody>
       </p:sp>
       <p:sp>
         <p:nvSpPr>
@@ -4390,11 +4358,11 @@
           <a:bodyPr wrap="square" lIns="0" tIns="0" rIns="0" bIns="0" rtlCol="0" anchor="ctr"/>
           <a:lstStyle/>
           <a:p>
-            <a:pPr indent="0" marL="0">
-              <a:buNone/>
-            </a:pPr>
-            <a:r>
-              <a:rPr lang="en-US" sz="1000" b="1" spc="100" kern="0" dirty="0">
+            <a:pPr marL="0" indent="0">
+              <a:buNone/>
+            </a:pPr>
+            <a:r>
+              <a:rPr lang="en-US" sz="1000" b="1" kern="0" spc="100" dirty="0">
                 <a:solidFill>
                   <a:srgbClr val="8A5F22"/>
                 </a:solidFill>
@@ -4519,6 +4487,13 @@
             <a:prstDash val="solid"/>
           </a:ln>
         </p:spPr>
+        <p:txBody>
+          <a:bodyPr/>
+          <a:lstStyle/>
+          <a:p>
+            <a:endParaRPr lang="en-PK"/>
+          </a:p>
+        </p:txBody>
       </p:sp>
       <p:sp>
         <p:nvSpPr>
@@ -4541,7 +4516,7 @@
           <a:bodyPr wrap="square" lIns="0" tIns="0" rIns="0" bIns="0" rtlCol="0" anchor="ctr"/>
           <a:lstStyle/>
           <a:p>
-            <a:pPr indent="0" marL="0">
+            <a:pPr marL="0" indent="0">
               <a:buNone/>
             </a:pPr>
             <a:r>
@@ -4555,9 +4530,6 @@
               </a:rPr>
               <a:t>SDG 9  </a:t>
             </a:r>
-            <a:pPr indent="0" marL="0">
-              <a:buNone/>
-            </a:pPr>
             <a:r>
               <a:rPr lang="en-US" sz="1150" dirty="0">
                 <a:solidFill>
@@ -4599,6 +4571,13 @@
             <a:prstDash val="solid"/>
           </a:ln>
         </p:spPr>
+        <p:txBody>
+          <a:bodyPr/>
+          <a:lstStyle/>
+          <a:p>
+            <a:endParaRPr lang="en-PK"/>
+          </a:p>
+        </p:txBody>
       </p:sp>
       <p:sp>
         <p:nvSpPr>
@@ -4621,11 +4600,11 @@
           <a:bodyPr wrap="square" lIns="0" tIns="0" rIns="0" bIns="0" rtlCol="0" anchor="ctr"/>
           <a:lstStyle/>
           <a:p>
-            <a:pPr indent="0" marL="0">
-              <a:buNone/>
-            </a:pPr>
-            <a:r>
-              <a:rPr lang="en-US" sz="1000" b="1" spc="100" kern="0" dirty="0">
+            <a:pPr marL="0" indent="0">
+              <a:buNone/>
+            </a:pPr>
+            <a:r>
+              <a:rPr lang="en-US" sz="1000" b="1" kern="0" spc="100" dirty="0">
                 <a:solidFill>
                   <a:srgbClr val="A6392F"/>
                 </a:solidFill>
@@ -4660,7 +4639,7 @@
           <a:bodyPr wrap="square" lIns="0" tIns="0" rIns="0" bIns="0" rtlCol="0" anchor="ctr"/>
           <a:lstStyle/>
           <a:p>
-            <a:pPr indent="0" marL="0">
+            <a:pPr marL="0" indent="0">
               <a:buNone/>
             </a:pPr>
             <a:r>
@@ -4699,11 +4678,11 @@
           <a:bodyPr wrap="square" lIns="0" tIns="0" rIns="0" bIns="0" rtlCol="0" anchor="ctr"/>
           <a:lstStyle/>
           <a:p>
-            <a:pPr indent="0" marL="0">
-              <a:buNone/>
-            </a:pPr>
-            <a:r>
-              <a:rPr lang="en-US" sz="1000" b="1" spc="100" kern="0" dirty="0">
+            <a:pPr marL="0" indent="0">
+              <a:buNone/>
+            </a:pPr>
+            <a:r>
+              <a:rPr lang="en-US" sz="1000" b="1" kern="0" spc="100" dirty="0">
                 <a:solidFill>
                   <a:srgbClr val="5B6270"/>
                 </a:solidFill>
@@ -4736,6 +4715,13 @@
           </a:solidFill>
           <a:ln/>
         </p:spPr>
+        <p:txBody>
+          <a:bodyPr/>
+          <a:lstStyle/>
+          <a:p>
+            <a:endParaRPr lang="en-PK"/>
+          </a:p>
+        </p:txBody>
       </p:sp>
       <p:sp>
         <p:nvSpPr>
@@ -4758,7 +4744,7 @@
           <a:bodyPr wrap="square" lIns="0" tIns="0" rIns="0" bIns="0" rtlCol="0" anchor="ctr"/>
           <a:lstStyle/>
           <a:p>
-            <a:pPr algn="ctr" indent="0" marL="0">
+            <a:pPr marL="0" indent="0" algn="ctr">
               <a:buNone/>
             </a:pPr>
             <a:r>
@@ -4797,7 +4783,7 @@
           <a:bodyPr wrap="square" lIns="0" tIns="0" rIns="0" bIns="0" rtlCol="0" anchor="ctr"/>
           <a:lstStyle/>
           <a:p>
-            <a:pPr indent="0" marL="0">
+            <a:pPr marL="0" indent="0">
               <a:buNone/>
             </a:pPr>
             <a:r>
@@ -4814,7 +4800,7 @@
             <a:endParaRPr lang="en-US" sz="1250" dirty="0"/>
           </a:p>
           <a:p>
-            <a:pPr indent="0" marL="0">
+            <a:pPr marL="0" indent="0">
               <a:buNone/>
             </a:pPr>
             <a:r>
@@ -4854,6 +4840,13 @@
             <a:prstDash val="dash"/>
           </a:ln>
         </p:spPr>
+        <p:txBody>
+          <a:bodyPr/>
+          <a:lstStyle/>
+          <a:p>
+            <a:endParaRPr lang="en-PK"/>
+          </a:p>
+        </p:txBody>
       </p:sp>
       <p:sp>
         <p:nvSpPr>
@@ -4874,6 +4867,13 @@
           </a:solidFill>
           <a:ln/>
         </p:spPr>
+        <p:txBody>
+          <a:bodyPr/>
+          <a:lstStyle/>
+          <a:p>
+            <a:endParaRPr lang="en-PK"/>
+          </a:p>
+        </p:txBody>
       </p:sp>
       <p:sp>
         <p:nvSpPr>
@@ -4896,7 +4896,7 @@
           <a:bodyPr wrap="square" lIns="0" tIns="0" rIns="0" bIns="0" rtlCol="0" anchor="ctr"/>
           <a:lstStyle/>
           <a:p>
-            <a:pPr algn="ctr" indent="0" marL="0">
+            <a:pPr marL="0" indent="0" algn="ctr">
               <a:buNone/>
             </a:pPr>
             <a:r>
@@ -4935,7 +4935,7 @@
           <a:bodyPr wrap="square" lIns="0" tIns="0" rIns="0" bIns="0" rtlCol="0" anchor="ctr"/>
           <a:lstStyle/>
           <a:p>
-            <a:pPr indent="0" marL="0">
+            <a:pPr marL="0" indent="0">
               <a:buNone/>
             </a:pPr>
             <a:r>
@@ -4952,7 +4952,7 @@
             <a:endParaRPr lang="en-US" sz="1250" dirty="0"/>
           </a:p>
           <a:p>
-            <a:pPr indent="0" marL="0">
+            <a:pPr marL="0" indent="0">
               <a:buNone/>
             </a:pPr>
             <a:r>
@@ -4992,6 +4992,13 @@
             <a:prstDash val="dash"/>
           </a:ln>
         </p:spPr>
+        <p:txBody>
+          <a:bodyPr/>
+          <a:lstStyle/>
+          <a:p>
+            <a:endParaRPr lang="en-PK"/>
+          </a:p>
+        </p:txBody>
       </p:sp>
       <p:sp>
         <p:nvSpPr>
@@ -5012,6 +5019,13 @@
           </a:solidFill>
           <a:ln/>
         </p:spPr>
+        <p:txBody>
+          <a:bodyPr/>
+          <a:lstStyle/>
+          <a:p>
+            <a:endParaRPr lang="en-PK"/>
+          </a:p>
+        </p:txBody>
       </p:sp>
       <p:sp>
         <p:nvSpPr>
@@ -5034,7 +5048,7 @@
           <a:bodyPr wrap="square" lIns="0" tIns="0" rIns="0" bIns="0" rtlCol="0" anchor="ctr"/>
           <a:lstStyle/>
           <a:p>
-            <a:pPr algn="ctr" indent="0" marL="0">
+            <a:pPr marL="0" indent="0" algn="ctr">
               <a:buNone/>
             </a:pPr>
             <a:r>
@@ -5073,7 +5087,7 @@
           <a:bodyPr wrap="square" lIns="0" tIns="0" rIns="0" bIns="0" rtlCol="0" anchor="ctr"/>
           <a:lstStyle/>
           <a:p>
-            <a:pPr indent="0" marL="0">
+            <a:pPr marL="0" indent="0">
               <a:buNone/>
             </a:pPr>
             <a:r>
@@ -5090,7 +5104,7 @@
             <a:endParaRPr lang="en-US" sz="1250" dirty="0"/>
           </a:p>
           <a:p>
-            <a:pPr indent="0" marL="0">
+            <a:pPr marL="0" indent="0">
               <a:buNone/>
             </a:pPr>
             <a:r>
@@ -5130,6 +5144,13 @@
             <a:prstDash val="dash"/>
           </a:ln>
         </p:spPr>
+        <p:txBody>
+          <a:bodyPr/>
+          <a:lstStyle/>
+          <a:p>
+            <a:endParaRPr lang="en-PK"/>
+          </a:p>
+        </p:txBody>
       </p:sp>
       <p:sp>
         <p:nvSpPr>
@@ -5150,6 +5171,13 @@
           </a:solidFill>
           <a:ln/>
         </p:spPr>
+        <p:txBody>
+          <a:bodyPr/>
+          <a:lstStyle/>
+          <a:p>
+            <a:endParaRPr lang="en-PK"/>
+          </a:p>
+        </p:txBody>
       </p:sp>
       <p:sp>
         <p:nvSpPr>
@@ -5172,7 +5200,7 @@
           <a:bodyPr wrap="square" lIns="0" tIns="0" rIns="0" bIns="0" rtlCol="0" anchor="ctr"/>
           <a:lstStyle/>
           <a:p>
-            <a:pPr algn="ctr" indent="0" marL="0">
+            <a:pPr marL="0" indent="0" algn="ctr">
               <a:buNone/>
             </a:pPr>
             <a:r>
@@ -5211,7 +5239,7 @@
           <a:bodyPr wrap="square" lIns="0" tIns="0" rIns="0" bIns="0" rtlCol="0" anchor="ctr"/>
           <a:lstStyle/>
           <a:p>
-            <a:pPr indent="0" marL="0">
+            <a:pPr marL="0" indent="0">
               <a:buNone/>
             </a:pPr>
             <a:r>
@@ -5228,7 +5256,7 @@
             <a:endParaRPr lang="en-US" sz="1250" dirty="0"/>
           </a:p>
           <a:p>
-            <a:pPr indent="0" marL="0">
+            <a:pPr marL="0" indent="0">
               <a:buNone/>
             </a:pPr>
             <a:r>
@@ -5262,6 +5290,7 @@
         <a:solidFill>
           <a:srgbClr val="FFFFFF"/>
         </a:solidFill>
+        <a:effectLst/>
       </p:bgPr>
     </p:bg>
     <p:spTree>
@@ -5299,11 +5328,11 @@
           <a:bodyPr wrap="square" lIns="0" tIns="0" rIns="0" bIns="0" rtlCol="0" anchor="ctr"/>
           <a:lstStyle/>
           <a:p>
-            <a:pPr indent="0" marL="0">
-              <a:buNone/>
-            </a:pPr>
-            <a:r>
-              <a:rPr lang="en-US" sz="1100" b="1" spc="150" kern="0" dirty="0">
+            <a:pPr marL="0" indent="0">
+              <a:buNone/>
+            </a:pPr>
+            <a:r>
+              <a:rPr lang="en-US" sz="1100" b="1" kern="0" spc="150" dirty="0">
                 <a:solidFill>
                   <a:srgbClr val="8A5F22"/>
                 </a:solidFill>
@@ -5338,7 +5367,7 @@
           <a:bodyPr wrap="square" lIns="0" tIns="0" rIns="0" bIns="0" rtlCol="0" anchor="ctr"/>
           <a:lstStyle/>
           <a:p>
-            <a:pPr indent="0" marL="0">
+            <a:pPr marL="0" indent="0">
               <a:buNone/>
             </a:pPr>
             <a:r>
@@ -5375,6 +5404,13 @@
           </a:solidFill>
           <a:ln/>
         </p:spPr>
+        <p:txBody>
+          <a:bodyPr/>
+          <a:lstStyle/>
+          <a:p>
+            <a:endParaRPr lang="en-PK"/>
+          </a:p>
+        </p:txBody>
       </p:sp>
       <p:sp>
         <p:nvSpPr>
@@ -5397,7 +5433,7 @@
           <a:bodyPr wrap="square" lIns="0" tIns="0" rIns="0" bIns="0" rtlCol="0" anchor="ctr"/>
           <a:lstStyle/>
           <a:p>
-            <a:pPr algn="r" indent="0" marL="0">
+            <a:pPr marL="0" indent="0" algn="r">
               <a:buNone/>
             </a:pPr>
             <a:r>
@@ -5417,33 +5453,69 @@
       </p:sp>
       <p:graphicFrame>
         <p:nvGraphicFramePr>
-          <p:cNvPr id="4" name="Table 0"/>
+          <p:cNvPr id="6" name="Table 0"/>
           <p:cNvGraphicFramePr>
             <a:graphicFrameLocks noGrp="1"/>
           </p:cNvGraphicFramePr>
           <p:nvPr>
             <p:extLst>
               <p:ext uri="{D42A27DB-BD31-4B8C-83A1-F6EECF244321}">
-                <p14:modId xmlns:p14="http://schemas.microsoft.com/office/powerpoint/2010/main" val="1579011935"/>
+                <p14:modId xmlns:p14="http://schemas.microsoft.com/office/powerpoint/2010/main" val="2576822506"/>
               </p:ext>
             </p:extLst>
           </p:nvPr>
         </p:nvGraphicFramePr>
         <p:xfrm>
-          <a:off x="502920" y="1417320"/>
-          <a:ext cx="11185855" cy="4160520"/>
+          <a:off x="522514" y="1417320"/>
+          <a:ext cx="10633166" cy="4160520"/>
         </p:xfrm>
         <a:graphic>
           <a:graphicData uri="http://schemas.openxmlformats.org/drawingml/2006/table">
             <a:tbl>
               <a:tblPr/>
               <a:tblGrid>
-                <a:gridCol w="1417320"/>
-                <a:gridCol w="1965960"/>
-                <a:gridCol w="1874520"/>
-                <a:gridCol w="1691640"/>
-                <a:gridCol w="1965960"/>
-                <a:gridCol w="1737360"/>
+                <a:gridCol w="1397726">
+                  <a:extLst>
+                    <a:ext uri="{9D8B030D-6E8A-4147-A177-3AD203B41FA5}">
+                      <a16:colId xmlns:a16="http://schemas.microsoft.com/office/drawing/2014/main" val="20000"/>
+                    </a:ext>
+                  </a:extLst>
+                </a:gridCol>
+                <a:gridCol w="1965960">
+                  <a:extLst>
+                    <a:ext uri="{9D8B030D-6E8A-4147-A177-3AD203B41FA5}">
+                      <a16:colId xmlns:a16="http://schemas.microsoft.com/office/drawing/2014/main" val="20001"/>
+                    </a:ext>
+                  </a:extLst>
+                </a:gridCol>
+                <a:gridCol w="1874520">
+                  <a:extLst>
+                    <a:ext uri="{9D8B030D-6E8A-4147-A177-3AD203B41FA5}">
+                      <a16:colId xmlns:a16="http://schemas.microsoft.com/office/drawing/2014/main" val="20002"/>
+                    </a:ext>
+                  </a:extLst>
+                </a:gridCol>
+                <a:gridCol w="1691640">
+                  <a:extLst>
+                    <a:ext uri="{9D8B030D-6E8A-4147-A177-3AD203B41FA5}">
+                      <a16:colId xmlns:a16="http://schemas.microsoft.com/office/drawing/2014/main" val="20003"/>
+                    </a:ext>
+                  </a:extLst>
+                </a:gridCol>
+                <a:gridCol w="1965960">
+                  <a:extLst>
+                    <a:ext uri="{9D8B030D-6E8A-4147-A177-3AD203B41FA5}">
+                      <a16:colId xmlns:a16="http://schemas.microsoft.com/office/drawing/2014/main" val="20004"/>
+                    </a:ext>
+                  </a:extLst>
+                </a:gridCol>
+                <a:gridCol w="1737360">
+                  <a:extLst>
+                    <a:ext uri="{9D8B030D-6E8A-4147-A177-3AD203B41FA5}">
+                      <a16:colId xmlns:a16="http://schemas.microsoft.com/office/drawing/2014/main" val="20005"/>
+                    </a:ext>
+                  </a:extLst>
+                </a:gridCol>
               </a:tblGrid>
               <a:tr h="594360">
                 <a:tc>
@@ -5451,7 +5523,7 @@
                     <a:bodyPr/>
                     <a:lstStyle/>
                     <a:p>
-                      <a:pPr algn="ctr" indent="0" marL="0">
+                      <a:pPr marL="0" indent="0" algn="ctr">
                         <a:buNone/>
                       </a:pPr>
                       <a:endParaRPr lang="en-US" sz="950" dirty="0">
@@ -5461,7 +5533,7 @@
                       </a:endParaRPr>
                     </a:p>
                   </a:txBody>
-                  <a:tcPr marL="91440" marR="91440" marT="45720" marB="45720" anchor="ctr">
+                  <a:tcPr anchor="ctr">
                     <a:lnL w="6350" cap="flat" cmpd="sng" algn="ctr">
                       <a:solidFill>
                         <a:srgbClr val="D8DAE1"/>
@@ -5508,7 +5580,7 @@
                     <a:bodyPr/>
                     <a:lstStyle/>
                     <a:p>
-                      <a:pPr algn="ctr" indent="0" marL="0">
+                      <a:pPr marL="0" indent="0" algn="ctr">
                         <a:buNone/>
                       </a:pPr>
                       <a:r>
@@ -5529,7 +5601,7 @@
                       </a:endParaRPr>
                     </a:p>
                   </a:txBody>
-                  <a:tcPr marL="91440" marR="91440" marT="45720" marB="45720" anchor="ctr">
+                  <a:tcPr anchor="ctr">
                     <a:lnL w="6350" cap="flat" cmpd="sng" algn="ctr">
                       <a:solidFill>
                         <a:srgbClr val="D8DAE1"/>
@@ -5576,7 +5648,7 @@
                     <a:bodyPr/>
                     <a:lstStyle/>
                     <a:p>
-                      <a:pPr algn="ctr" indent="0" marL="0">
+                      <a:pPr marL="0" indent="0" algn="ctr">
                         <a:buNone/>
                       </a:pPr>
                       <a:r>
@@ -5597,7 +5669,7 @@
                       </a:endParaRPr>
                     </a:p>
                     <a:p>
-                      <a:pPr algn="ctr" indent="0" marL="0">
+                      <a:pPr marL="0" indent="0" algn="ctr">
                         <a:buNone/>
                       </a:pPr>
                       <a:r>
@@ -5618,7 +5690,7 @@
                       </a:endParaRPr>
                     </a:p>
                   </a:txBody>
-                  <a:tcPr marL="91440" marR="91440" marT="45720" marB="45720" anchor="ctr">
+                  <a:tcPr anchor="ctr">
                     <a:lnL w="6350" cap="flat" cmpd="sng" algn="ctr">
                       <a:solidFill>
                         <a:srgbClr val="D8DAE1"/>
@@ -5665,7 +5737,7 @@
                     <a:bodyPr/>
                     <a:lstStyle/>
                     <a:p>
-                      <a:pPr algn="ctr" indent="0" marL="0">
+                      <a:pPr marL="0" indent="0" algn="ctr">
                         <a:buNone/>
                       </a:pPr>
                       <a:r>
@@ -5686,7 +5758,7 @@
                       </a:endParaRPr>
                     </a:p>
                     <a:p>
-                      <a:pPr algn="ctr" indent="0" marL="0">
+                      <a:pPr marL="0" indent="0" algn="ctr">
                         <a:buNone/>
                       </a:pPr>
                       <a:r>
@@ -5707,7 +5779,7 @@
                       </a:endParaRPr>
                     </a:p>
                   </a:txBody>
-                  <a:tcPr marL="91440" marR="91440" marT="45720" marB="45720" anchor="ctr">
+                  <a:tcPr anchor="ctr">
                     <a:lnL w="6350" cap="flat" cmpd="sng" algn="ctr">
                       <a:solidFill>
                         <a:srgbClr val="D8DAE1"/>
@@ -5754,7 +5826,7 @@
                     <a:bodyPr/>
                     <a:lstStyle/>
                     <a:p>
-                      <a:pPr algn="ctr" indent="0" marL="0">
+                      <a:pPr marL="0" indent="0" algn="ctr">
                         <a:buNone/>
                       </a:pPr>
                       <a:r>
@@ -5775,7 +5847,7 @@
                       </a:endParaRPr>
                     </a:p>
                     <a:p>
-                      <a:pPr algn="ctr" indent="0" marL="0">
+                      <a:pPr marL="0" indent="0" algn="ctr">
                         <a:buNone/>
                       </a:pPr>
                       <a:r>
@@ -5796,7 +5868,7 @@
                       </a:endParaRPr>
                     </a:p>
                   </a:txBody>
-                  <a:tcPr marL="91440" marR="91440" marT="45720" marB="45720" anchor="ctr">
+                  <a:tcPr anchor="ctr">
                     <a:lnL w="6350" cap="flat" cmpd="sng" algn="ctr">
                       <a:solidFill>
                         <a:srgbClr val="D8DAE1"/>
@@ -5843,7 +5915,7 @@
                     <a:bodyPr/>
                     <a:lstStyle/>
                     <a:p>
-                      <a:pPr algn="ctr" indent="0" marL="0">
+                      <a:pPr marL="0" indent="0" algn="ctr">
                         <a:buNone/>
                       </a:pPr>
                       <a:r>
@@ -5864,7 +5936,7 @@
                       </a:endParaRPr>
                     </a:p>
                     <a:p>
-                      <a:pPr algn="ctr" indent="0" marL="0">
+                      <a:pPr marL="0" indent="0" algn="ctr">
                         <a:buNone/>
                       </a:pPr>
                       <a:r>
@@ -5885,7 +5957,7 @@
                       </a:endParaRPr>
                     </a:p>
                   </a:txBody>
-                  <a:tcPr marL="91440" marR="91440" marT="45720" marB="45720" anchor="ctr">
+                  <a:tcPr anchor="ctr">
                     <a:lnL w="6350" cap="flat" cmpd="sng" algn="ctr">
                       <a:solidFill>
                         <a:srgbClr val="D8DAE1"/>
@@ -5927,6 +5999,11 @@
                     </a:solidFill>
                   </a:tcPr>
                 </a:tc>
+                <a:extLst>
+                  <a:ext uri="{0D108BD9-81ED-4DB2-BD59-A6C34878D82A}">
+                    <a16:rowId xmlns:a16="http://schemas.microsoft.com/office/drawing/2014/main" val="10000"/>
+                  </a:ext>
+                </a:extLst>
               </a:tr>
               <a:tr h="594360">
                 <a:tc>
@@ -5934,7 +6011,7 @@
                     <a:bodyPr/>
                     <a:lstStyle/>
                     <a:p>
-                      <a:pPr algn="l" indent="0" marL="0">
+                      <a:pPr marL="0" indent="0" algn="l">
                         <a:buNone/>
                       </a:pPr>
                       <a:r>
@@ -5955,7 +6032,7 @@
                       </a:endParaRPr>
                     </a:p>
                     <a:p>
-                      <a:pPr algn="l" indent="0" marL="0">
+                      <a:pPr marL="0" indent="0" algn="l">
                         <a:buNone/>
                       </a:pPr>
                       <a:r>
@@ -5976,7 +6053,7 @@
                       </a:endParaRPr>
                     </a:p>
                   </a:txBody>
-                  <a:tcPr marL="91440" marR="91440" marT="45720" marB="45720" anchor="ctr">
+                  <a:tcPr anchor="ctr">
                     <a:lnL w="6350" cap="flat" cmpd="sng" algn="ctr">
                       <a:solidFill>
                         <a:srgbClr val="D8DAE1"/>
@@ -6023,7 +6100,7 @@
                     <a:bodyPr/>
                     <a:lstStyle/>
                     <a:p>
-                      <a:pPr algn="ctr" indent="0" marL="0">
+                      <a:pPr marL="0" indent="0" algn="ctr">
                         <a:buNone/>
                       </a:pPr>
                       <a:r>
@@ -6044,7 +6121,7 @@
                       </a:endParaRPr>
                     </a:p>
                     <a:p>
-                      <a:pPr algn="ctr" indent="0" marL="0">
+                      <a:pPr marL="0" indent="0" algn="ctr">
                         <a:buNone/>
                       </a:pPr>
                       <a:r>
@@ -6065,7 +6142,7 @@
                       </a:endParaRPr>
                     </a:p>
                   </a:txBody>
-                  <a:tcPr marL="91440" marR="91440" marT="45720" marB="45720" anchor="ctr">
+                  <a:tcPr anchor="ctr">
                     <a:lnL w="6350" cap="flat" cmpd="sng" algn="ctr">
                       <a:solidFill>
                         <a:srgbClr val="D8DAE1"/>
@@ -6112,7 +6189,7 @@
                     <a:bodyPr/>
                     <a:lstStyle/>
                     <a:p>
-                      <a:pPr algn="ctr" indent="0" marL="0">
+                      <a:pPr marL="0" indent="0" algn="ctr">
                         <a:buNone/>
                       </a:pPr>
                       <a:r>
@@ -6133,7 +6210,7 @@
                       </a:endParaRPr>
                     </a:p>
                   </a:txBody>
-                  <a:tcPr marL="91440" marR="91440" marT="45720" marB="45720" anchor="ctr">
+                  <a:tcPr anchor="ctr">
                     <a:lnL w="6350" cap="flat" cmpd="sng" algn="ctr">
                       <a:solidFill>
                         <a:srgbClr val="D8DAE1"/>
@@ -6180,7 +6257,7 @@
                     <a:bodyPr/>
                     <a:lstStyle/>
                     <a:p>
-                      <a:pPr algn="ctr" indent="0" marL="0">
+                      <a:pPr marL="0" indent="0" algn="ctr">
                         <a:buNone/>
                       </a:pPr>
                       <a:r>
@@ -6201,7 +6278,7 @@
                       </a:endParaRPr>
                     </a:p>
                     <a:p>
-                      <a:pPr algn="ctr" indent="0" marL="0">
+                      <a:pPr marL="0" indent="0" algn="ctr">
                         <a:buNone/>
                       </a:pPr>
                       <a:r>
@@ -6222,7 +6299,7 @@
                       </a:endParaRPr>
                     </a:p>
                   </a:txBody>
-                  <a:tcPr marL="91440" marR="91440" marT="45720" marB="45720" anchor="ctr">
+                  <a:tcPr anchor="ctr">
                     <a:lnL w="6350" cap="flat" cmpd="sng" algn="ctr">
                       <a:solidFill>
                         <a:srgbClr val="D8DAE1"/>
@@ -6269,7 +6346,7 @@
                     <a:bodyPr/>
                     <a:lstStyle/>
                     <a:p>
-                      <a:pPr algn="ctr" indent="0" marL="0">
+                      <a:pPr marL="0" indent="0" algn="ctr">
                         <a:buNone/>
                       </a:pPr>
                       <a:r>
@@ -6290,7 +6367,7 @@
                       </a:endParaRPr>
                     </a:p>
                   </a:txBody>
-                  <a:tcPr marL="91440" marR="91440" marT="45720" marB="45720" anchor="ctr">
+                  <a:tcPr anchor="ctr">
                     <a:lnL w="6350" cap="flat" cmpd="sng" algn="ctr">
                       <a:solidFill>
                         <a:srgbClr val="D8DAE1"/>
@@ -6337,7 +6414,7 @@
                     <a:bodyPr/>
                     <a:lstStyle/>
                     <a:p>
-                      <a:pPr algn="ctr" indent="0" marL="0">
+                      <a:pPr marL="0" indent="0" algn="ctr">
                         <a:buNone/>
                       </a:pPr>
                       <a:r>
@@ -6358,7 +6435,7 @@
                       </a:endParaRPr>
                     </a:p>
                   </a:txBody>
-                  <a:tcPr marL="91440" marR="91440" marT="45720" marB="45720" anchor="ctr">
+                  <a:tcPr anchor="ctr">
                     <a:lnL w="6350" cap="flat" cmpd="sng" algn="ctr">
                       <a:solidFill>
                         <a:srgbClr val="D8DAE1"/>
@@ -6400,6 +6477,11 @@
                     </a:solidFill>
                   </a:tcPr>
                 </a:tc>
+                <a:extLst>
+                  <a:ext uri="{0D108BD9-81ED-4DB2-BD59-A6C34878D82A}">
+                    <a16:rowId xmlns:a16="http://schemas.microsoft.com/office/drawing/2014/main" val="10001"/>
+                  </a:ext>
+                </a:extLst>
               </a:tr>
               <a:tr h="594360">
                 <a:tc>
@@ -6407,7 +6489,7 @@
                     <a:bodyPr/>
                     <a:lstStyle/>
                     <a:p>
-                      <a:pPr algn="l" indent="0" marL="0">
+                      <a:pPr marL="0" indent="0" algn="l">
                         <a:buNone/>
                       </a:pPr>
                       <a:r>
@@ -6428,7 +6510,7 @@
                       </a:endParaRPr>
                     </a:p>
                     <a:p>
-                      <a:pPr algn="l" indent="0" marL="0">
+                      <a:pPr marL="0" indent="0" algn="l">
                         <a:buNone/>
                       </a:pPr>
                       <a:r>
@@ -6449,7 +6531,7 @@
                       </a:endParaRPr>
                     </a:p>
                   </a:txBody>
-                  <a:tcPr marL="91440" marR="91440" marT="45720" marB="45720" anchor="ctr">
+                  <a:tcPr anchor="ctr">
                     <a:lnL w="6350" cap="flat" cmpd="sng" algn="ctr">
                       <a:solidFill>
                         <a:srgbClr val="D8DAE1"/>
@@ -6496,7 +6578,7 @@
                     <a:bodyPr/>
                     <a:lstStyle/>
                     <a:p>
-                      <a:pPr algn="ctr" indent="0" marL="0">
+                      <a:pPr marL="0" indent="0" algn="ctr">
                         <a:buNone/>
                       </a:pPr>
                       <a:r>
@@ -6517,7 +6599,7 @@
                       </a:endParaRPr>
                     </a:p>
                     <a:p>
-                      <a:pPr algn="ctr" indent="0" marL="0">
+                      <a:pPr marL="0" indent="0" algn="ctr">
                         <a:buNone/>
                       </a:pPr>
                       <a:r>
@@ -6538,7 +6620,7 @@
                       </a:endParaRPr>
                     </a:p>
                   </a:txBody>
-                  <a:tcPr marL="91440" marR="91440" marT="45720" marB="45720" anchor="ctr">
+                  <a:tcPr anchor="ctr">
                     <a:lnL w="6350" cap="flat" cmpd="sng" algn="ctr">
                       <a:solidFill>
                         <a:srgbClr val="D8DAE1"/>
@@ -6585,7 +6667,7 @@
                     <a:bodyPr/>
                     <a:lstStyle/>
                     <a:p>
-                      <a:pPr algn="ctr" indent="0" marL="0">
+                      <a:pPr marL="0" indent="0" algn="ctr">
                         <a:buNone/>
                       </a:pPr>
                       <a:r>
@@ -6606,7 +6688,7 @@
                       </a:endParaRPr>
                     </a:p>
                   </a:txBody>
-                  <a:tcPr marL="91440" marR="91440" marT="45720" marB="45720" anchor="ctr">
+                  <a:tcPr anchor="ctr">
                     <a:lnL w="6350" cap="flat" cmpd="sng" algn="ctr">
                       <a:solidFill>
                         <a:srgbClr val="D8DAE1"/>
@@ -6653,7 +6735,7 @@
                     <a:bodyPr/>
                     <a:lstStyle/>
                     <a:p>
-                      <a:pPr algn="ctr" indent="0" marL="0">
+                      <a:pPr marL="0" indent="0" algn="ctr">
                         <a:buNone/>
                       </a:pPr>
                       <a:r>
@@ -6674,7 +6756,7 @@
                       </a:endParaRPr>
                     </a:p>
                   </a:txBody>
-                  <a:tcPr marL="91440" marR="91440" marT="45720" marB="45720" anchor="ctr">
+                  <a:tcPr anchor="ctr">
                     <a:lnL w="6350" cap="flat" cmpd="sng" algn="ctr">
                       <a:solidFill>
                         <a:srgbClr val="D8DAE1"/>
@@ -6721,7 +6803,7 @@
                     <a:bodyPr/>
                     <a:lstStyle/>
                     <a:p>
-                      <a:pPr algn="ctr" indent="0" marL="0">
+                      <a:pPr marL="0" indent="0" algn="ctr">
                         <a:buNone/>
                       </a:pPr>
                       <a:r>
@@ -6742,7 +6824,7 @@
                       </a:endParaRPr>
                     </a:p>
                   </a:txBody>
-                  <a:tcPr marL="91440" marR="91440" marT="45720" marB="45720" anchor="ctr">
+                  <a:tcPr anchor="ctr">
                     <a:lnL w="6350" cap="flat" cmpd="sng" algn="ctr">
                       <a:solidFill>
                         <a:srgbClr val="D8DAE1"/>
@@ -6789,7 +6871,7 @@
                     <a:bodyPr/>
                     <a:lstStyle/>
                     <a:p>
-                      <a:pPr algn="ctr" indent="0" marL="0">
+                      <a:pPr marL="0" indent="0" algn="ctr">
                         <a:buNone/>
                       </a:pPr>
                       <a:r>
@@ -6810,7 +6892,7 @@
                       </a:endParaRPr>
                     </a:p>
                   </a:txBody>
-                  <a:tcPr marL="91440" marR="91440" marT="45720" marB="45720" anchor="ctr">
+                  <a:tcPr anchor="ctr">
                     <a:lnL w="6350" cap="flat" cmpd="sng" algn="ctr">
                       <a:solidFill>
                         <a:srgbClr val="D8DAE1"/>
@@ -6852,6 +6934,11 @@
                     </a:solidFill>
                   </a:tcPr>
                 </a:tc>
+                <a:extLst>
+                  <a:ext uri="{0D108BD9-81ED-4DB2-BD59-A6C34878D82A}">
+                    <a16:rowId xmlns:a16="http://schemas.microsoft.com/office/drawing/2014/main" val="10002"/>
+                  </a:ext>
+                </a:extLst>
               </a:tr>
               <a:tr h="594360">
                 <a:tc>
@@ -6859,7 +6946,7 @@
                     <a:bodyPr/>
                     <a:lstStyle/>
                     <a:p>
-                      <a:pPr algn="l" indent="0" marL="0">
+                      <a:pPr marL="0" indent="0" algn="l">
                         <a:buNone/>
                       </a:pPr>
                       <a:r>
@@ -6880,7 +6967,7 @@
                       </a:endParaRPr>
                     </a:p>
                     <a:p>
-                      <a:pPr algn="l" indent="0" marL="0">
+                      <a:pPr marL="0" indent="0" algn="l">
                         <a:buNone/>
                       </a:pPr>
                       <a:r>
@@ -6901,7 +6988,7 @@
                       </a:endParaRPr>
                     </a:p>
                   </a:txBody>
-                  <a:tcPr marL="91440" marR="91440" marT="45720" marB="45720" anchor="ctr">
+                  <a:tcPr anchor="ctr">
                     <a:lnL w="6350" cap="flat" cmpd="sng" algn="ctr">
                       <a:solidFill>
                         <a:srgbClr val="D8DAE1"/>
@@ -6948,7 +7035,7 @@
                     <a:bodyPr/>
                     <a:lstStyle/>
                     <a:p>
-                      <a:pPr algn="ctr" indent="0" marL="0">
+                      <a:pPr marL="0" indent="0" algn="ctr">
                         <a:buNone/>
                       </a:pPr>
                       <a:r>
@@ -6969,7 +7056,7 @@
                       </a:endParaRPr>
                     </a:p>
                     <a:p>
-                      <a:pPr algn="ctr" indent="0" marL="0">
+                      <a:pPr marL="0" indent="0" algn="ctr">
                         <a:buNone/>
                       </a:pPr>
                       <a:r>
@@ -6990,7 +7077,7 @@
                       </a:endParaRPr>
                     </a:p>
                   </a:txBody>
-                  <a:tcPr marL="91440" marR="91440" marT="45720" marB="45720" anchor="ctr">
+                  <a:tcPr anchor="ctr">
                     <a:lnL w="6350" cap="flat" cmpd="sng" algn="ctr">
                       <a:solidFill>
                         <a:srgbClr val="D8DAE1"/>
@@ -7037,7 +7124,7 @@
                     <a:bodyPr/>
                     <a:lstStyle/>
                     <a:p>
-                      <a:pPr algn="ctr" indent="0" marL="0">
+                      <a:pPr marL="0" indent="0" algn="ctr">
                         <a:buNone/>
                       </a:pPr>
                       <a:r>
@@ -7058,7 +7145,7 @@
                       </a:endParaRPr>
                     </a:p>
                   </a:txBody>
-                  <a:tcPr marL="91440" marR="91440" marT="45720" marB="45720" anchor="ctr">
+                  <a:tcPr anchor="ctr">
                     <a:lnL w="6350" cap="flat" cmpd="sng" algn="ctr">
                       <a:solidFill>
                         <a:srgbClr val="D8DAE1"/>
@@ -7105,7 +7192,7 @@
                     <a:bodyPr/>
                     <a:lstStyle/>
                     <a:p>
-                      <a:pPr algn="ctr" indent="0" marL="0">
+                      <a:pPr marL="0" indent="0" algn="ctr">
                         <a:buNone/>
                       </a:pPr>
                       <a:r>
@@ -7126,7 +7213,7 @@
                       </a:endParaRPr>
                     </a:p>
                     <a:p>
-                      <a:pPr algn="ctr" indent="0" marL="0">
+                      <a:pPr marL="0" indent="0" algn="ctr">
                         <a:buNone/>
                       </a:pPr>
                       <a:r>
@@ -7147,7 +7234,7 @@
                       </a:endParaRPr>
                     </a:p>
                   </a:txBody>
-                  <a:tcPr marL="91440" marR="91440" marT="45720" marB="45720" anchor="ctr">
+                  <a:tcPr anchor="ctr">
                     <a:lnL w="6350" cap="flat" cmpd="sng" algn="ctr">
                       <a:solidFill>
                         <a:srgbClr val="D8DAE1"/>
@@ -7194,7 +7281,7 @@
                     <a:bodyPr/>
                     <a:lstStyle/>
                     <a:p>
-                      <a:pPr algn="ctr" indent="0" marL="0">
+                      <a:pPr marL="0" indent="0" algn="ctr">
                         <a:buNone/>
                       </a:pPr>
                       <a:r>
@@ -7215,7 +7302,7 @@
                       </a:endParaRPr>
                     </a:p>
                   </a:txBody>
-                  <a:tcPr marL="91440" marR="91440" marT="45720" marB="45720" anchor="ctr">
+                  <a:tcPr anchor="ctr">
                     <a:lnL w="6350" cap="flat" cmpd="sng" algn="ctr">
                       <a:solidFill>
                         <a:srgbClr val="D8DAE1"/>
@@ -7262,7 +7349,7 @@
                     <a:bodyPr/>
                     <a:lstStyle/>
                     <a:p>
-                      <a:pPr algn="ctr" indent="0" marL="0">
+                      <a:pPr marL="0" indent="0" algn="ctr">
                         <a:buNone/>
                       </a:pPr>
                       <a:r>
@@ -7283,7 +7370,7 @@
                       </a:endParaRPr>
                     </a:p>
                   </a:txBody>
-                  <a:tcPr marL="91440" marR="91440" marT="45720" marB="45720" anchor="ctr">
+                  <a:tcPr anchor="ctr">
                     <a:lnL w="6350" cap="flat" cmpd="sng" algn="ctr">
                       <a:solidFill>
                         <a:srgbClr val="D8DAE1"/>
@@ -7325,6 +7412,11 @@
                     </a:solidFill>
                   </a:tcPr>
                 </a:tc>
+                <a:extLst>
+                  <a:ext uri="{0D108BD9-81ED-4DB2-BD59-A6C34878D82A}">
+                    <a16:rowId xmlns:a16="http://schemas.microsoft.com/office/drawing/2014/main" val="10003"/>
+                  </a:ext>
+                </a:extLst>
               </a:tr>
               <a:tr h="594360">
                 <a:tc>
@@ -7332,7 +7424,7 @@
                     <a:bodyPr/>
                     <a:lstStyle/>
                     <a:p>
-                      <a:pPr algn="l" indent="0" marL="0">
+                      <a:pPr marL="0" indent="0" algn="l">
                         <a:buNone/>
                       </a:pPr>
                       <a:r>
@@ -7353,7 +7445,7 @@
                       </a:endParaRPr>
                     </a:p>
                     <a:p>
-                      <a:pPr algn="l" indent="0" marL="0">
+                      <a:pPr marL="0" indent="0" algn="l">
                         <a:buNone/>
                       </a:pPr>
                       <a:r>
@@ -7374,7 +7466,7 @@
                       </a:endParaRPr>
                     </a:p>
                     <a:p>
-                      <a:pPr algn="l" indent="0" marL="0">
+                      <a:pPr marL="0" indent="0" algn="l">
                         <a:buNone/>
                       </a:pPr>
                       <a:r>
@@ -7395,7 +7487,7 @@
                       </a:endParaRPr>
                     </a:p>
                   </a:txBody>
-                  <a:tcPr marL="91440" marR="91440" marT="45720" marB="45720" anchor="ctr">
+                  <a:tcPr anchor="ctr">
                     <a:lnL w="6350" cap="flat" cmpd="sng" algn="ctr">
                       <a:solidFill>
                         <a:srgbClr val="D8DAE1"/>
@@ -7442,7 +7534,7 @@
                     <a:bodyPr/>
                     <a:lstStyle/>
                     <a:p>
-                      <a:pPr algn="ctr" indent="0" marL="0">
+                      <a:pPr marL="0" indent="0" algn="ctr">
                         <a:buNone/>
                       </a:pPr>
                       <a:r>
@@ -7463,7 +7555,7 @@
                       </a:endParaRPr>
                     </a:p>
                     <a:p>
-                      <a:pPr algn="ctr" indent="0" marL="0">
+                      <a:pPr marL="0" indent="0" algn="ctr">
                         <a:buNone/>
                       </a:pPr>
                       <a:r>
@@ -7484,7 +7576,7 @@
                       </a:endParaRPr>
                     </a:p>
                   </a:txBody>
-                  <a:tcPr marL="91440" marR="91440" marT="45720" marB="45720" anchor="ctr">
+                  <a:tcPr anchor="ctr">
                     <a:lnL w="6350" cap="flat" cmpd="sng" algn="ctr">
                       <a:solidFill>
                         <a:srgbClr val="D8DAE1"/>
@@ -7531,7 +7623,7 @@
                     <a:bodyPr/>
                     <a:lstStyle/>
                     <a:p>
-                      <a:pPr algn="ctr" indent="0" marL="0">
+                      <a:pPr marL="0" indent="0" algn="ctr">
                         <a:buNone/>
                       </a:pPr>
                       <a:r>
@@ -7552,7 +7644,7 @@
                       </a:endParaRPr>
                     </a:p>
                     <a:p>
-                      <a:pPr algn="ctr" indent="0" marL="0">
+                      <a:pPr marL="0" indent="0" algn="ctr">
                         <a:buNone/>
                       </a:pPr>
                       <a:r>
@@ -7573,7 +7665,7 @@
                       </a:endParaRPr>
                     </a:p>
                   </a:txBody>
-                  <a:tcPr marL="91440" marR="91440" marT="45720" marB="45720" anchor="ctr">
+                  <a:tcPr anchor="ctr">
                     <a:lnL w="6350" cap="flat" cmpd="sng" algn="ctr">
                       <a:solidFill>
                         <a:srgbClr val="D8DAE1"/>
@@ -7620,7 +7712,7 @@
                     <a:bodyPr/>
                     <a:lstStyle/>
                     <a:p>
-                      <a:pPr algn="ctr" indent="0" marL="0">
+                      <a:pPr marL="0" indent="0" algn="ctr">
                         <a:buNone/>
                       </a:pPr>
                       <a:r>
@@ -7641,7 +7733,7 @@
                       </a:endParaRPr>
                     </a:p>
                     <a:p>
-                      <a:pPr algn="ctr" indent="0" marL="0">
+                      <a:pPr marL="0" indent="0" algn="ctr">
                         <a:buNone/>
                       </a:pPr>
                       <a:r>
@@ -7662,7 +7754,7 @@
                       </a:endParaRPr>
                     </a:p>
                   </a:txBody>
-                  <a:tcPr marL="91440" marR="91440" marT="45720" marB="45720" anchor="ctr">
+                  <a:tcPr anchor="ctr">
                     <a:lnL w="6350" cap="flat" cmpd="sng" algn="ctr">
                       <a:solidFill>
                         <a:srgbClr val="D8DAE1"/>
@@ -7709,7 +7801,7 @@
                     <a:bodyPr/>
                     <a:lstStyle/>
                     <a:p>
-                      <a:pPr algn="ctr" indent="0" marL="0">
+                      <a:pPr marL="0" indent="0" algn="ctr">
                         <a:buNone/>
                       </a:pPr>
                       <a:r>
@@ -7730,7 +7822,7 @@
                       </a:endParaRPr>
                     </a:p>
                     <a:p>
-                      <a:pPr algn="ctr" indent="0" marL="0">
+                      <a:pPr marL="0" indent="0" algn="ctr">
                         <a:buNone/>
                       </a:pPr>
                       <a:r>
@@ -7751,7 +7843,7 @@
                       </a:endParaRPr>
                     </a:p>
                   </a:txBody>
-                  <a:tcPr marL="91440" marR="91440" marT="45720" marB="45720" anchor="ctr">
+                  <a:tcPr anchor="ctr">
                     <a:lnL w="6350" cap="flat" cmpd="sng" algn="ctr">
                       <a:solidFill>
                         <a:srgbClr val="D8DAE1"/>
@@ -7798,7 +7890,7 @@
                     <a:bodyPr/>
                     <a:lstStyle/>
                     <a:p>
-                      <a:pPr algn="ctr" indent="0" marL="0">
+                      <a:pPr marL="0" indent="0" algn="ctr">
                         <a:buNone/>
                       </a:pPr>
                       <a:r>
@@ -7819,7 +7911,7 @@
                       </a:endParaRPr>
                     </a:p>
                     <a:p>
-                      <a:pPr algn="ctr" indent="0" marL="0">
+                      <a:pPr marL="0" indent="0" algn="ctr">
                         <a:buNone/>
                       </a:pPr>
                       <a:r>
@@ -7840,7 +7932,7 @@
                       </a:endParaRPr>
                     </a:p>
                   </a:txBody>
-                  <a:tcPr marL="91440" marR="91440" marT="45720" marB="45720" anchor="ctr">
+                  <a:tcPr anchor="ctr">
                     <a:lnL w="6350" cap="flat" cmpd="sng" algn="ctr">
                       <a:solidFill>
                         <a:srgbClr val="D8DAE1"/>
@@ -7882,6 +7974,11 @@
                     </a:solidFill>
                   </a:tcPr>
                 </a:tc>
+                <a:extLst>
+                  <a:ext uri="{0D108BD9-81ED-4DB2-BD59-A6C34878D82A}">
+                    <a16:rowId xmlns:a16="http://schemas.microsoft.com/office/drawing/2014/main" val="10004"/>
+                  </a:ext>
+                </a:extLst>
               </a:tr>
               <a:tr h="594360">
                 <a:tc>
@@ -7889,7 +7986,7 @@
                     <a:bodyPr/>
                     <a:lstStyle/>
                     <a:p>
-                      <a:pPr algn="l" indent="0" marL="0">
+                      <a:pPr marL="0" indent="0" algn="l">
                         <a:buNone/>
                       </a:pPr>
                       <a:r>
@@ -7910,7 +8007,7 @@
                       </a:endParaRPr>
                     </a:p>
                     <a:p>
-                      <a:pPr algn="l" indent="0" marL="0">
+                      <a:pPr marL="0" indent="0" algn="l">
                         <a:buNone/>
                       </a:pPr>
                       <a:r>
@@ -7931,7 +8028,7 @@
                       </a:endParaRPr>
                     </a:p>
                   </a:txBody>
-                  <a:tcPr marL="91440" marR="91440" marT="45720" marB="45720" anchor="ctr">
+                  <a:tcPr anchor="ctr">
                     <a:lnL w="6350" cap="flat" cmpd="sng" algn="ctr">
                       <a:solidFill>
                         <a:srgbClr val="D8DAE1"/>
@@ -7978,7 +8075,7 @@
                     <a:bodyPr/>
                     <a:lstStyle/>
                     <a:p>
-                      <a:pPr algn="ctr" indent="0" marL="0">
+                      <a:pPr marL="0" indent="0" algn="ctr">
                         <a:buNone/>
                       </a:pPr>
                       <a:r>
@@ -7999,7 +8096,7 @@
                       </a:endParaRPr>
                     </a:p>
                     <a:p>
-                      <a:pPr algn="ctr" indent="0" marL="0">
+                      <a:pPr marL="0" indent="0" algn="ctr">
                         <a:buNone/>
                       </a:pPr>
                       <a:r>
@@ -8020,7 +8117,7 @@
                       </a:endParaRPr>
                     </a:p>
                   </a:txBody>
-                  <a:tcPr marL="91440" marR="91440" marT="45720" marB="45720" anchor="ctr">
+                  <a:tcPr anchor="ctr">
                     <a:lnL w="6350" cap="flat" cmpd="sng" algn="ctr">
                       <a:solidFill>
                         <a:srgbClr val="D8DAE1"/>
@@ -8067,7 +8164,7 @@
                     <a:bodyPr/>
                     <a:lstStyle/>
                     <a:p>
-                      <a:pPr algn="ctr" indent="0" marL="0">
+                      <a:pPr marL="0" indent="0" algn="ctr">
                         <a:buNone/>
                       </a:pPr>
                       <a:r>
@@ -8088,7 +8185,7 @@
                       </a:endParaRPr>
                     </a:p>
                     <a:p>
-                      <a:pPr algn="ctr" indent="0" marL="0">
+                      <a:pPr marL="0" indent="0" algn="ctr">
                         <a:buNone/>
                       </a:pPr>
                       <a:r>
@@ -8109,7 +8206,7 @@
                       </a:endParaRPr>
                     </a:p>
                   </a:txBody>
-                  <a:tcPr marL="91440" marR="91440" marT="45720" marB="45720" anchor="ctr">
+                  <a:tcPr anchor="ctr">
                     <a:lnL w="6350" cap="flat" cmpd="sng" algn="ctr">
                       <a:solidFill>
                         <a:srgbClr val="D8DAE1"/>
@@ -8156,7 +8253,7 @@
                     <a:bodyPr/>
                     <a:lstStyle/>
                     <a:p>
-                      <a:pPr algn="ctr" indent="0" marL="0">
+                      <a:pPr marL="0" indent="0" algn="ctr">
                         <a:buNone/>
                       </a:pPr>
                       <a:r>
@@ -8177,7 +8274,7 @@
                       </a:endParaRPr>
                     </a:p>
                   </a:txBody>
-                  <a:tcPr marL="91440" marR="91440" marT="45720" marB="45720" anchor="ctr">
+                  <a:tcPr anchor="ctr">
                     <a:lnL w="6350" cap="flat" cmpd="sng" algn="ctr">
                       <a:solidFill>
                         <a:srgbClr val="D8DAE1"/>
@@ -8224,7 +8321,7 @@
                     <a:bodyPr/>
                     <a:lstStyle/>
                     <a:p>
-                      <a:pPr algn="ctr" indent="0" marL="0">
+                      <a:pPr marL="0" indent="0" algn="ctr">
                         <a:buNone/>
                       </a:pPr>
                       <a:r>
@@ -8245,7 +8342,7 @@
                       </a:endParaRPr>
                     </a:p>
                   </a:txBody>
-                  <a:tcPr marL="91440" marR="91440" marT="45720" marB="45720" anchor="ctr">
+                  <a:tcPr anchor="ctr">
                     <a:lnL w="6350" cap="flat" cmpd="sng" algn="ctr">
                       <a:solidFill>
                         <a:srgbClr val="D8DAE1"/>
@@ -8292,7 +8389,7 @@
                     <a:bodyPr/>
                     <a:lstStyle/>
                     <a:p>
-                      <a:pPr algn="ctr" indent="0" marL="0">
+                      <a:pPr marL="0" indent="0" algn="ctr">
                         <a:buNone/>
                       </a:pPr>
                       <a:r>
@@ -8313,7 +8410,7 @@
                       </a:endParaRPr>
                     </a:p>
                   </a:txBody>
-                  <a:tcPr marL="91440" marR="91440" marT="45720" marB="45720" anchor="ctr">
+                  <a:tcPr anchor="ctr">
                     <a:lnL w="6350" cap="flat" cmpd="sng" algn="ctr">
                       <a:solidFill>
                         <a:srgbClr val="D8DAE1"/>
@@ -8355,6 +8452,11 @@
                     </a:solidFill>
                   </a:tcPr>
                 </a:tc>
+                <a:extLst>
+                  <a:ext uri="{0D108BD9-81ED-4DB2-BD59-A6C34878D82A}">
+                    <a16:rowId xmlns:a16="http://schemas.microsoft.com/office/drawing/2014/main" val="10005"/>
+                  </a:ext>
+                </a:extLst>
               </a:tr>
               <a:tr h="594360">
                 <a:tc>
@@ -8362,7 +8464,7 @@
                     <a:bodyPr/>
                     <a:lstStyle/>
                     <a:p>
-                      <a:pPr algn="l" indent="0" marL="0">
+                      <a:pPr marL="0" indent="0" algn="l">
                         <a:buNone/>
                       </a:pPr>
                       <a:r>
@@ -8383,7 +8485,7 @@
                       </a:endParaRPr>
                     </a:p>
                     <a:p>
-                      <a:pPr algn="l" indent="0" marL="0">
+                      <a:pPr marL="0" indent="0" algn="l">
                         <a:buNone/>
                       </a:pPr>
                       <a:r>
@@ -8404,7 +8506,7 @@
                       </a:endParaRPr>
                     </a:p>
                   </a:txBody>
-                  <a:tcPr marL="91440" marR="91440" marT="45720" marB="45720" anchor="ctr">
+                  <a:tcPr anchor="ctr">
                     <a:lnL w="6350" cap="flat" cmpd="sng" algn="ctr">
                       <a:solidFill>
                         <a:srgbClr val="D8DAE1"/>
@@ -8451,7 +8553,7 @@
                     <a:bodyPr/>
                     <a:lstStyle/>
                     <a:p>
-                      <a:pPr algn="ctr" indent="0" marL="0">
+                      <a:pPr marL="0" indent="0" algn="ctr">
                         <a:buNone/>
                       </a:pPr>
                       <a:r>
@@ -8472,7 +8574,7 @@
                       </a:endParaRPr>
                     </a:p>
                     <a:p>
-                      <a:pPr algn="ctr" indent="0" marL="0">
+                      <a:pPr marL="0" indent="0" algn="ctr">
                         <a:buNone/>
                       </a:pPr>
                       <a:r>
@@ -8493,7 +8595,7 @@
                       </a:endParaRPr>
                     </a:p>
                   </a:txBody>
-                  <a:tcPr marL="91440" marR="91440" marT="45720" marB="45720" anchor="ctr">
+                  <a:tcPr anchor="ctr">
                     <a:lnL w="6350" cap="flat" cmpd="sng" algn="ctr">
                       <a:solidFill>
                         <a:srgbClr val="D8DAE1"/>
@@ -8540,7 +8642,7 @@
                     <a:bodyPr/>
                     <a:lstStyle/>
                     <a:p>
-                      <a:pPr algn="ctr" indent="0" marL="0">
+                      <a:pPr marL="0" indent="0" algn="ctr">
                         <a:buNone/>
                       </a:pPr>
                       <a:r>
@@ -8561,7 +8663,7 @@
                       </a:endParaRPr>
                     </a:p>
                     <a:p>
-                      <a:pPr algn="ctr" indent="0" marL="0">
+                      <a:pPr marL="0" indent="0" algn="ctr">
                         <a:buNone/>
                       </a:pPr>
                       <a:r>
@@ -8582,7 +8684,7 @@
                       </a:endParaRPr>
                     </a:p>
                   </a:txBody>
-                  <a:tcPr marL="91440" marR="91440" marT="45720" marB="45720" anchor="ctr">
+                  <a:tcPr anchor="ctr">
                     <a:lnL w="6350" cap="flat" cmpd="sng" algn="ctr">
                       <a:solidFill>
                         <a:srgbClr val="D8DAE1"/>
@@ -8629,7 +8731,7 @@
                     <a:bodyPr/>
                     <a:lstStyle/>
                     <a:p>
-                      <a:pPr algn="ctr" indent="0" marL="0">
+                      <a:pPr marL="0" indent="0" algn="ctr">
                         <a:buNone/>
                       </a:pPr>
                       <a:r>
@@ -8650,7 +8752,7 @@
                       </a:endParaRPr>
                     </a:p>
                     <a:p>
-                      <a:pPr algn="ctr" indent="0" marL="0">
+                      <a:pPr marL="0" indent="0" algn="ctr">
                         <a:buNone/>
                       </a:pPr>
                       <a:r>
@@ -8671,7 +8773,7 @@
                       </a:endParaRPr>
                     </a:p>
                   </a:txBody>
-                  <a:tcPr marL="91440" marR="91440" marT="45720" marB="45720" anchor="ctr">
+                  <a:tcPr anchor="ctr">
                     <a:lnL w="6350" cap="flat" cmpd="sng" algn="ctr">
                       <a:solidFill>
                         <a:srgbClr val="D8DAE1"/>
@@ -8718,7 +8820,7 @@
                     <a:bodyPr/>
                     <a:lstStyle/>
                     <a:p>
-                      <a:pPr algn="ctr" indent="0" marL="0">
+                      <a:pPr marL="0" indent="0" algn="ctr">
                         <a:buNone/>
                       </a:pPr>
                       <a:r>
@@ -8739,7 +8841,7 @@
                       </a:endParaRPr>
                     </a:p>
                     <a:p>
-                      <a:pPr algn="ctr" indent="0" marL="0">
+                      <a:pPr marL="0" indent="0" algn="ctr">
                         <a:buNone/>
                       </a:pPr>
                       <a:r>
@@ -8760,7 +8862,7 @@
                       </a:endParaRPr>
                     </a:p>
                   </a:txBody>
-                  <a:tcPr marL="91440" marR="91440" marT="45720" marB="45720" anchor="ctr">
+                  <a:tcPr anchor="ctr">
                     <a:lnL w="6350" cap="flat" cmpd="sng" algn="ctr">
                       <a:solidFill>
                         <a:srgbClr val="D8DAE1"/>
@@ -8807,7 +8909,7 @@
                     <a:bodyPr/>
                     <a:lstStyle/>
                     <a:p>
-                      <a:pPr algn="ctr" indent="0" marL="0">
+                      <a:pPr marL="0" indent="0" algn="ctr">
                         <a:buNone/>
                       </a:pPr>
                       <a:r>
@@ -8828,7 +8930,7 @@
                       </a:endParaRPr>
                     </a:p>
                     <a:p>
-                      <a:pPr algn="ctr" indent="0" marL="0">
+                      <a:pPr marL="0" indent="0" algn="ctr">
                         <a:buNone/>
                       </a:pPr>
                       <a:r>
@@ -8849,7 +8951,7 @@
                       </a:endParaRPr>
                     </a:p>
                   </a:txBody>
-                  <a:tcPr marL="91440" marR="91440" marT="45720" marB="45720" anchor="ctr">
+                  <a:tcPr anchor="ctr">
                     <a:lnL w="6350" cap="flat" cmpd="sng" algn="ctr">
                       <a:solidFill>
                         <a:srgbClr val="D8DAE1"/>
@@ -8891,6 +8993,11 @@
                     </a:solidFill>
                   </a:tcPr>
                 </a:tc>
+                <a:extLst>
+                  <a:ext uri="{0D108BD9-81ED-4DB2-BD59-A6C34878D82A}">
+                    <a16:rowId xmlns:a16="http://schemas.microsoft.com/office/drawing/2014/main" val="10006"/>
+                  </a:ext>
+                </a:extLst>
               </a:tr>
             </a:tbl>
           </a:graphicData>
@@ -8922,6 +9029,13 @@
             <a:prstDash val="solid"/>
           </a:ln>
         </p:spPr>
+        <p:txBody>
+          <a:bodyPr/>
+          <a:lstStyle/>
+          <a:p>
+            <a:endParaRPr lang="en-PK"/>
+          </a:p>
+        </p:txBody>
       </p:sp>
       <p:sp>
         <p:nvSpPr>
@@ -8944,7 +9058,7 @@
           <a:bodyPr wrap="square" lIns="0" tIns="0" rIns="0" bIns="0" rtlCol="0" anchor="ctr"/>
           <a:lstStyle/>
           <a:p>
-            <a:pPr indent="0" marL="0">
+            <a:pPr marL="0" indent="0">
               <a:buNone/>
             </a:pPr>
             <a:r>
@@ -8958,9 +9072,6 @@
               </a:rPr>
               <a:t>The real gap:  </a:t>
             </a:r>
-            <a:pPr indent="0" marL="0">
-              <a:buNone/>
-            </a:pPr>
             <a:r>
               <a:rPr lang="en-US" sz="1150" dirty="0">
                 <a:solidFill>
@@ -8992,6 +9103,7 @@
         <a:solidFill>
           <a:srgbClr val="FFFFFF"/>
         </a:solidFill>
+        <a:effectLst/>
       </p:bgPr>
     </p:bg>
     <p:spTree>
@@ -9029,11 +9141,11 @@
           <a:bodyPr wrap="square" lIns="0" tIns="0" rIns="0" bIns="0" rtlCol="0" anchor="ctr"/>
           <a:lstStyle/>
           <a:p>
-            <a:pPr indent="0" marL="0">
-              <a:buNone/>
-            </a:pPr>
-            <a:r>
-              <a:rPr lang="en-US" sz="1100" b="1" spc="150" kern="0" dirty="0">
+            <a:pPr marL="0" indent="0">
+              <a:buNone/>
+            </a:pPr>
+            <a:r>
+              <a:rPr lang="en-US" sz="1100" b="1" kern="0" spc="150" dirty="0">
                 <a:solidFill>
                   <a:srgbClr val="8A5F22"/>
                 </a:solidFill>
@@ -9068,7 +9180,7 @@
           <a:bodyPr wrap="square" lIns="0" tIns="0" rIns="0" bIns="0" rtlCol="0" anchor="ctr"/>
           <a:lstStyle/>
           <a:p>
-            <a:pPr indent="0" marL="0">
+            <a:pPr marL="0" indent="0">
               <a:buNone/>
             </a:pPr>
             <a:r>
@@ -9105,6 +9217,13 @@
           </a:solidFill>
           <a:ln/>
         </p:spPr>
+        <p:txBody>
+          <a:bodyPr/>
+          <a:lstStyle/>
+          <a:p>
+            <a:endParaRPr lang="en-PK"/>
+          </a:p>
+        </p:txBody>
       </p:sp>
       <p:sp>
         <p:nvSpPr>
@@ -9127,7 +9246,7 @@
           <a:bodyPr wrap="square" lIns="0" tIns="0" rIns="0" bIns="0" rtlCol="0" anchor="ctr"/>
           <a:lstStyle/>
           <a:p>
-            <a:pPr algn="r" indent="0" marL="0">
+            <a:pPr marL="0" indent="0" algn="r">
               <a:buNone/>
             </a:pPr>
             <a:r>
@@ -9166,11 +9285,11 @@
           <a:bodyPr wrap="square" lIns="0" tIns="0" rIns="0" bIns="0" rtlCol="0" anchor="ctr"/>
           <a:lstStyle/>
           <a:p>
-            <a:pPr indent="0" marL="0">
-              <a:buNone/>
-            </a:pPr>
-            <a:r>
-              <a:rPr lang="en-US" sz="1000" b="1" spc="100" kern="0" dirty="0">
+            <a:pPr marL="0" indent="0">
+              <a:buNone/>
+            </a:pPr>
+            <a:r>
+              <a:rPr lang="en-US" sz="1000" b="1" kern="0" spc="100" dirty="0">
                 <a:solidFill>
                   <a:srgbClr val="8A5F22"/>
                 </a:solidFill>
@@ -9203,6 +9322,13 @@
           </a:solidFill>
           <a:ln/>
         </p:spPr>
+        <p:txBody>
+          <a:bodyPr/>
+          <a:lstStyle/>
+          <a:p>
+            <a:endParaRPr lang="en-PK"/>
+          </a:p>
+        </p:txBody>
       </p:sp>
       <p:sp>
         <p:nvSpPr>
@@ -9225,7 +9351,7 @@
           <a:bodyPr wrap="square" lIns="0" tIns="0" rIns="0" bIns="0" rtlCol="0" anchor="ctr"/>
           <a:lstStyle/>
           <a:p>
-            <a:pPr algn="ctr" indent="0" marL="0">
+            <a:pPr marL="0" indent="0" algn="ctr">
               <a:buNone/>
             </a:pPr>
             <a:r>
@@ -9264,7 +9390,7 @@
           <a:bodyPr wrap="square" lIns="0" tIns="0" rIns="0" bIns="0" rtlCol="0" anchor="ctr"/>
           <a:lstStyle/>
           <a:p>
-            <a:pPr indent="0" marL="0">
+            <a:pPr marL="0" indent="0">
               <a:buNone/>
             </a:pPr>
             <a:r>
@@ -9281,7 +9407,7 @@
             <a:endParaRPr lang="en-US" sz="1200" dirty="0"/>
           </a:p>
           <a:p>
-            <a:pPr indent="0" marL="0">
+            <a:pPr marL="0" indent="0">
               <a:buNone/>
             </a:pPr>
             <a:r>
@@ -9318,6 +9444,13 @@
           </a:solidFill>
           <a:ln/>
         </p:spPr>
+        <p:txBody>
+          <a:bodyPr/>
+          <a:lstStyle/>
+          <a:p>
+            <a:endParaRPr lang="en-PK"/>
+          </a:p>
+        </p:txBody>
       </p:sp>
       <p:sp>
         <p:nvSpPr>
@@ -9340,7 +9473,7 @@
           <a:bodyPr wrap="square" lIns="0" tIns="0" rIns="0" bIns="0" rtlCol="0" anchor="ctr"/>
           <a:lstStyle/>
           <a:p>
-            <a:pPr algn="ctr" indent="0" marL="0">
+            <a:pPr marL="0" indent="0" algn="ctr">
               <a:buNone/>
             </a:pPr>
             <a:r>
@@ -9379,7 +9512,7 @@
           <a:bodyPr wrap="square" lIns="0" tIns="0" rIns="0" bIns="0" rtlCol="0" anchor="ctr"/>
           <a:lstStyle/>
           <a:p>
-            <a:pPr indent="0" marL="0">
+            <a:pPr marL="0" indent="0">
               <a:buNone/>
             </a:pPr>
             <a:r>
@@ -9396,7 +9529,7 @@
             <a:endParaRPr lang="en-US" sz="1200" dirty="0"/>
           </a:p>
           <a:p>
-            <a:pPr indent="0" marL="0">
+            <a:pPr marL="0" indent="0">
               <a:buNone/>
             </a:pPr>
             <a:r>
@@ -9433,6 +9566,13 @@
           </a:solidFill>
           <a:ln/>
         </p:spPr>
+        <p:txBody>
+          <a:bodyPr/>
+          <a:lstStyle/>
+          <a:p>
+            <a:endParaRPr lang="en-PK"/>
+          </a:p>
+        </p:txBody>
       </p:sp>
       <p:sp>
         <p:nvSpPr>
@@ -9455,7 +9595,7 @@
           <a:bodyPr wrap="square" lIns="0" tIns="0" rIns="0" bIns="0" rtlCol="0" anchor="ctr"/>
           <a:lstStyle/>
           <a:p>
-            <a:pPr algn="ctr" indent="0" marL="0">
+            <a:pPr marL="0" indent="0" algn="ctr">
               <a:buNone/>
             </a:pPr>
             <a:r>
@@ -9494,7 +9634,7 @@
           <a:bodyPr wrap="square" lIns="0" tIns="0" rIns="0" bIns="0" rtlCol="0" anchor="ctr"/>
           <a:lstStyle/>
           <a:p>
-            <a:pPr indent="0" marL="0">
+            <a:pPr marL="0" indent="0">
               <a:buNone/>
             </a:pPr>
             <a:r>
@@ -9511,7 +9651,7 @@
             <a:endParaRPr lang="en-US" sz="1200" dirty="0"/>
           </a:p>
           <a:p>
-            <a:pPr indent="0" marL="0">
+            <a:pPr marL="0" indent="0">
               <a:buNone/>
             </a:pPr>
             <a:r>
@@ -9548,6 +9688,13 @@
           </a:solidFill>
           <a:ln/>
         </p:spPr>
+        <p:txBody>
+          <a:bodyPr/>
+          <a:lstStyle/>
+          <a:p>
+            <a:endParaRPr lang="en-PK"/>
+          </a:p>
+        </p:txBody>
       </p:sp>
       <p:sp>
         <p:nvSpPr>
@@ -9570,7 +9717,7 @@
           <a:bodyPr wrap="square" lIns="0" tIns="0" rIns="0" bIns="0" rtlCol="0" anchor="ctr"/>
           <a:lstStyle/>
           <a:p>
-            <a:pPr algn="ctr" indent="0" marL="0">
+            <a:pPr marL="0" indent="0" algn="ctr">
               <a:buNone/>
             </a:pPr>
             <a:r>
@@ -9609,7 +9756,7 @@
           <a:bodyPr wrap="square" lIns="0" tIns="0" rIns="0" bIns="0" rtlCol="0" anchor="ctr"/>
           <a:lstStyle/>
           <a:p>
-            <a:pPr indent="0" marL="0">
+            <a:pPr marL="0" indent="0">
               <a:buNone/>
             </a:pPr>
             <a:r>
@@ -9626,7 +9773,7 @@
             <a:endParaRPr lang="en-US" sz="1200" dirty="0"/>
           </a:p>
           <a:p>
-            <a:pPr indent="0" marL="0">
+            <a:pPr marL="0" indent="0">
               <a:buNone/>
             </a:pPr>
             <a:r>
@@ -9665,11 +9812,11 @@
           <a:bodyPr wrap="square" lIns="0" tIns="0" rIns="0" bIns="0" rtlCol="0" anchor="ctr"/>
           <a:lstStyle/>
           <a:p>
-            <a:pPr indent="0" marL="0">
-              <a:buNone/>
-            </a:pPr>
-            <a:r>
-              <a:rPr lang="en-US" sz="1000" b="1" spc="100" kern="0" dirty="0">
+            <a:pPr marL="0" indent="0">
+              <a:buNone/>
+            </a:pPr>
+            <a:r>
+              <a:rPr lang="en-US" sz="1000" b="1" kern="0" spc="100" dirty="0">
                 <a:solidFill>
                   <a:srgbClr val="8A5F22"/>
                 </a:solidFill>
@@ -9685,7 +9832,7 @@
       </p:sp>
       <p:graphicFrame>
         <p:nvGraphicFramePr>
-          <p:cNvPr id="20" name="Chart 0" descr=""/>
+          <p:cNvPr id="20" name="Chart 0"/>
           <p:cNvGraphicFramePr/>
           <p:nvPr/>
         </p:nvGraphicFramePr>
@@ -9693,9 +9840,9 @@
           <a:off x="6858000" y="1737360"/>
           <a:ext cx="4830775" cy="2194560"/>
         </p:xfrm>
-        <a:graphic xmlns:a="http://schemas.openxmlformats.org/drawingml/2006/main">
+        <a:graphic>
           <a:graphicData uri="http://schemas.openxmlformats.org/drawingml/2006/chart">
-            <c:chart xmlns:c="http://schemas.openxmlformats.org/drawingml/2006/chart" r:id="rId1"/>
+            <c:chart xmlns:c="http://schemas.openxmlformats.org/drawingml/2006/chart" xmlns:r="http://schemas.openxmlformats.org/officeDocument/2006/relationships" r:id="rId3"/>
           </a:graphicData>
         </a:graphic>
       </p:graphicFrame>
@@ -9725,6 +9872,13 @@
             <a:prstDash val="solid"/>
           </a:ln>
         </p:spPr>
+        <p:txBody>
+          <a:bodyPr/>
+          <a:lstStyle/>
+          <a:p>
+            <a:endParaRPr lang="en-PK"/>
+          </a:p>
+        </p:txBody>
       </p:sp>
       <p:sp>
         <p:nvSpPr>
@@ -9747,7 +9901,7 @@
           <a:bodyPr wrap="square" lIns="0" tIns="0" rIns="0" bIns="0" rtlCol="0" anchor="ctr"/>
           <a:lstStyle/>
           <a:p>
-            <a:pPr indent="0" marL="0">
+            <a:pPr marL="0" indent="0">
               <a:buNone/>
             </a:pPr>
             <a:r>
@@ -9761,9 +9915,6 @@
               </a:rPr>
               <a:t>40.5 points still wrong  </a:t>
             </a:r>
-            <a:pPr indent="0" marL="0">
-              <a:buNone/>
-            </a:pPr>
             <a:r>
               <a:rPr lang="en-US" sz="1100" dirty="0">
                 <a:solidFill>
@@ -9805,6 +9956,13 @@
             <a:prstDash val="solid"/>
           </a:ln>
         </p:spPr>
+        <p:txBody>
+          <a:bodyPr/>
+          <a:lstStyle/>
+          <a:p>
+            <a:endParaRPr lang="en-PK"/>
+          </a:p>
+        </p:txBody>
       </p:sp>
       <p:sp>
         <p:nvSpPr>
@@ -9827,11 +9985,11 @@
           <a:bodyPr wrap="square" lIns="0" tIns="0" rIns="0" bIns="0" rtlCol="0" anchor="ctr"/>
           <a:lstStyle/>
           <a:p>
-            <a:pPr indent="0" marL="0">
-              <a:buNone/>
-            </a:pPr>
-            <a:r>
-              <a:rPr lang="en-US" sz="900" b="1" spc="50" kern="0" dirty="0">
+            <a:pPr marL="0" indent="0">
+              <a:buNone/>
+            </a:pPr>
+            <a:r>
+              <a:rPr lang="en-US" sz="900" b="1" kern="0" spc="50" dirty="0">
                 <a:solidFill>
                   <a:srgbClr val="5B6270"/>
                 </a:solidFill>
@@ -9866,7 +10024,7 @@
           <a:bodyPr wrap="square" lIns="0" tIns="0" rIns="0" bIns="0" rtlCol="0" anchor="ctr"/>
           <a:lstStyle/>
           <a:p>
-            <a:pPr indent="0" marL="0">
+            <a:pPr marL="0" indent="0">
               <a:buNone/>
             </a:pPr>
             <a:r>
@@ -9900,6 +10058,7 @@
         <a:solidFill>
           <a:srgbClr val="FFFFFF"/>
         </a:solidFill>
+        <a:effectLst/>
       </p:bgPr>
     </p:bg>
     <p:spTree>
@@ -9937,11 +10096,11 @@
           <a:bodyPr wrap="square" lIns="0" tIns="0" rIns="0" bIns="0" rtlCol="0" anchor="ctr"/>
           <a:lstStyle/>
           <a:p>
-            <a:pPr indent="0" marL="0">
-              <a:buNone/>
-            </a:pPr>
-            <a:r>
-              <a:rPr lang="en-US" sz="1100" b="1" spc="150" kern="0" dirty="0">
+            <a:pPr marL="0" indent="0">
+              <a:buNone/>
+            </a:pPr>
+            <a:r>
+              <a:rPr lang="en-US" sz="1100" b="1" kern="0" spc="150" dirty="0">
                 <a:solidFill>
                   <a:srgbClr val="8A5F22"/>
                 </a:solidFill>
@@ -9976,7 +10135,7 @@
           <a:bodyPr wrap="square" lIns="0" tIns="0" rIns="0" bIns="0" rtlCol="0" anchor="ctr"/>
           <a:lstStyle/>
           <a:p>
-            <a:pPr indent="0" marL="0">
+            <a:pPr marL="0" indent="0">
               <a:buNone/>
             </a:pPr>
             <a:r>
@@ -10013,6 +10172,13 @@
           </a:solidFill>
           <a:ln/>
         </p:spPr>
+        <p:txBody>
+          <a:bodyPr/>
+          <a:lstStyle/>
+          <a:p>
+            <a:endParaRPr lang="en-PK"/>
+          </a:p>
+        </p:txBody>
       </p:sp>
       <p:sp>
         <p:nvSpPr>
@@ -10035,7 +10201,7 @@
           <a:bodyPr wrap="square" lIns="0" tIns="0" rIns="0" bIns="0" rtlCol="0" anchor="ctr"/>
           <a:lstStyle/>
           <a:p>
-            <a:pPr algn="r" indent="0" marL="0">
+            <a:pPr marL="0" indent="0" algn="r">
               <a:buNone/>
             </a:pPr>
             <a:r>
@@ -10079,6 +10245,13 @@
             <a:prstDash val="solid"/>
           </a:ln>
         </p:spPr>
+        <p:txBody>
+          <a:bodyPr/>
+          <a:lstStyle/>
+          <a:p>
+            <a:endParaRPr lang="en-PK"/>
+          </a:p>
+        </p:txBody>
       </p:sp>
       <p:sp>
         <p:nvSpPr>
@@ -10099,6 +10272,13 @@
           </a:solidFill>
           <a:ln/>
         </p:spPr>
+        <p:txBody>
+          <a:bodyPr/>
+          <a:lstStyle/>
+          <a:p>
+            <a:endParaRPr lang="en-PK"/>
+          </a:p>
+        </p:txBody>
       </p:sp>
       <p:sp>
         <p:nvSpPr>
@@ -10121,7 +10301,7 @@
           <a:bodyPr wrap="square" lIns="0" tIns="0" rIns="0" bIns="0" rtlCol="0" anchor="ctr"/>
           <a:lstStyle/>
           <a:p>
-            <a:pPr algn="ctr" indent="0" marL="0">
+            <a:pPr marL="0" indent="0" algn="ctr">
               <a:buNone/>
             </a:pPr>
             <a:r>
@@ -10160,7 +10340,7 @@
           <a:bodyPr wrap="square" lIns="0" tIns="0" rIns="0" bIns="0" rtlCol="0" anchor="ctr"/>
           <a:lstStyle/>
           <a:p>
-            <a:pPr indent="0" marL="0">
+            <a:pPr marL="0" indent="0">
               <a:buNone/>
             </a:pPr>
             <a:r>
@@ -10199,7 +10379,7 @@
           <a:bodyPr wrap="square" lIns="0" tIns="0" rIns="0" bIns="0" rtlCol="0" anchor="ctr"/>
           <a:lstStyle/>
           <a:p>
-            <a:pPr indent="0" marL="0">
+            <a:pPr marL="0" indent="0">
               <a:buNone/>
             </a:pPr>
             <a:r>
@@ -10238,6 +10418,13 @@
           </a:solidFill>
           <a:ln/>
         </p:spPr>
+        <p:txBody>
+          <a:bodyPr/>
+          <a:lstStyle/>
+          <a:p>
+            <a:endParaRPr lang="en-PK"/>
+          </a:p>
+        </p:txBody>
       </p:sp>
       <p:sp>
         <p:nvSpPr>
@@ -10260,7 +10447,7 @@
           <a:bodyPr wrap="square" lIns="0" tIns="0" rIns="0" bIns="0" rtlCol="0" anchor="ctr"/>
           <a:lstStyle/>
           <a:p>
-            <a:pPr algn="ctr" indent="0" marL="0">
+            <a:pPr marL="0" indent="0" algn="ctr">
               <a:buNone/>
             </a:pPr>
             <a:r>
@@ -10304,6 +10491,13 @@
             <a:prstDash val="solid"/>
           </a:ln>
         </p:spPr>
+        <p:txBody>
+          <a:bodyPr/>
+          <a:lstStyle/>
+          <a:p>
+            <a:endParaRPr lang="en-PK"/>
+          </a:p>
+        </p:txBody>
       </p:sp>
       <p:sp>
         <p:nvSpPr>
@@ -10324,6 +10518,13 @@
           </a:solidFill>
           <a:ln/>
         </p:spPr>
+        <p:txBody>
+          <a:bodyPr/>
+          <a:lstStyle/>
+          <a:p>
+            <a:endParaRPr lang="en-PK"/>
+          </a:p>
+        </p:txBody>
       </p:sp>
       <p:sp>
         <p:nvSpPr>
@@ -10346,7 +10547,7 @@
           <a:bodyPr wrap="square" lIns="0" tIns="0" rIns="0" bIns="0" rtlCol="0" anchor="ctr"/>
           <a:lstStyle/>
           <a:p>
-            <a:pPr algn="ctr" indent="0" marL="0">
+            <a:pPr marL="0" indent="0" algn="ctr">
               <a:buNone/>
             </a:pPr>
             <a:r>
@@ -10385,7 +10586,7 @@
           <a:bodyPr wrap="square" lIns="0" tIns="0" rIns="0" bIns="0" rtlCol="0" anchor="ctr"/>
           <a:lstStyle/>
           <a:p>
-            <a:pPr indent="0" marL="0">
+            <a:pPr marL="0" indent="0">
               <a:buNone/>
             </a:pPr>
             <a:r>
@@ -10424,7 +10625,7 @@
           <a:bodyPr wrap="square" lIns="0" tIns="0" rIns="0" bIns="0" rtlCol="0" anchor="ctr"/>
           <a:lstStyle/>
           <a:p>
-            <a:pPr indent="0" marL="0">
+            <a:pPr marL="0" indent="0">
               <a:buNone/>
             </a:pPr>
             <a:r>
@@ -10463,6 +10664,13 @@
           </a:solidFill>
           <a:ln/>
         </p:spPr>
+        <p:txBody>
+          <a:bodyPr/>
+          <a:lstStyle/>
+          <a:p>
+            <a:endParaRPr lang="en-PK"/>
+          </a:p>
+        </p:txBody>
       </p:sp>
       <p:sp>
         <p:nvSpPr>
@@ -10485,7 +10693,7 @@
           <a:bodyPr wrap="square" lIns="0" tIns="0" rIns="0" bIns="0" rtlCol="0" anchor="ctr"/>
           <a:lstStyle/>
           <a:p>
-            <a:pPr algn="ctr" indent="0" marL="0">
+            <a:pPr marL="0" indent="0" algn="ctr">
               <a:buNone/>
             </a:pPr>
             <a:r>
@@ -10529,6 +10737,13 @@
             <a:prstDash val="solid"/>
           </a:ln>
         </p:spPr>
+        <p:txBody>
+          <a:bodyPr/>
+          <a:lstStyle/>
+          <a:p>
+            <a:endParaRPr lang="en-PK"/>
+          </a:p>
+        </p:txBody>
       </p:sp>
       <p:sp>
         <p:nvSpPr>
@@ -10549,6 +10764,13 @@
           </a:solidFill>
           <a:ln/>
         </p:spPr>
+        <p:txBody>
+          <a:bodyPr/>
+          <a:lstStyle/>
+          <a:p>
+            <a:endParaRPr lang="en-PK"/>
+          </a:p>
+        </p:txBody>
       </p:sp>
       <p:sp>
         <p:nvSpPr>
@@ -10571,7 +10793,7 @@
           <a:bodyPr wrap="square" lIns="0" tIns="0" rIns="0" bIns="0" rtlCol="0" anchor="ctr"/>
           <a:lstStyle/>
           <a:p>
-            <a:pPr algn="ctr" indent="0" marL="0">
+            <a:pPr marL="0" indent="0" algn="ctr">
               <a:buNone/>
             </a:pPr>
             <a:r>
@@ -10610,7 +10832,7 @@
           <a:bodyPr wrap="square" lIns="0" tIns="0" rIns="0" bIns="0" rtlCol="0" anchor="ctr"/>
           <a:lstStyle/>
           <a:p>
-            <a:pPr indent="0" marL="0">
+            <a:pPr marL="0" indent="0">
               <a:buNone/>
             </a:pPr>
             <a:r>
@@ -10649,7 +10871,7 @@
           <a:bodyPr wrap="square" lIns="0" tIns="0" rIns="0" bIns="0" rtlCol="0" anchor="ctr"/>
           <a:lstStyle/>
           <a:p>
-            <a:pPr indent="0" marL="0">
+            <a:pPr marL="0" indent="0">
               <a:buNone/>
             </a:pPr>
             <a:r>
@@ -10688,6 +10910,13 @@
           </a:solidFill>
           <a:ln/>
         </p:spPr>
+        <p:txBody>
+          <a:bodyPr/>
+          <a:lstStyle/>
+          <a:p>
+            <a:endParaRPr lang="en-PK"/>
+          </a:p>
+        </p:txBody>
       </p:sp>
       <p:sp>
         <p:nvSpPr>
@@ -10710,7 +10939,7 @@
           <a:bodyPr wrap="square" lIns="0" tIns="0" rIns="0" bIns="0" rtlCol="0" anchor="ctr"/>
           <a:lstStyle/>
           <a:p>
-            <a:pPr algn="ctr" indent="0" marL="0">
+            <a:pPr marL="0" indent="0" algn="ctr">
               <a:buNone/>
             </a:pPr>
             <a:r>
@@ -10754,6 +10983,13 @@
             <a:prstDash val="solid"/>
           </a:ln>
         </p:spPr>
+        <p:txBody>
+          <a:bodyPr/>
+          <a:lstStyle/>
+          <a:p>
+            <a:endParaRPr lang="en-PK"/>
+          </a:p>
+        </p:txBody>
       </p:sp>
       <p:sp>
         <p:nvSpPr>
@@ -10774,6 +11010,13 @@
           </a:solidFill>
           <a:ln/>
         </p:spPr>
+        <p:txBody>
+          <a:bodyPr/>
+          <a:lstStyle/>
+          <a:p>
+            <a:endParaRPr lang="en-PK"/>
+          </a:p>
+        </p:txBody>
       </p:sp>
       <p:sp>
         <p:nvSpPr>
@@ -10796,7 +11039,7 @@
           <a:bodyPr wrap="square" lIns="0" tIns="0" rIns="0" bIns="0" rtlCol="0" anchor="ctr"/>
           <a:lstStyle/>
           <a:p>
-            <a:pPr algn="ctr" indent="0" marL="0">
+            <a:pPr marL="0" indent="0" algn="ctr">
               <a:buNone/>
             </a:pPr>
             <a:r>
@@ -10835,7 +11078,7 @@
           <a:bodyPr wrap="square" lIns="0" tIns="0" rIns="0" bIns="0" rtlCol="0" anchor="ctr"/>
           <a:lstStyle/>
           <a:p>
-            <a:pPr indent="0" marL="0">
+            <a:pPr marL="0" indent="0">
               <a:buNone/>
             </a:pPr>
             <a:r>
@@ -10874,7 +11117,7 @@
           <a:bodyPr wrap="square" lIns="0" tIns="0" rIns="0" bIns="0" rtlCol="0" anchor="ctr"/>
           <a:lstStyle/>
           <a:p>
-            <a:pPr indent="0" marL="0">
+            <a:pPr marL="0" indent="0">
               <a:buNone/>
             </a:pPr>
             <a:r>
@@ -10913,6 +11156,13 @@
           </a:solidFill>
           <a:ln/>
         </p:spPr>
+        <p:txBody>
+          <a:bodyPr/>
+          <a:lstStyle/>
+          <a:p>
+            <a:endParaRPr lang="en-PK"/>
+          </a:p>
+        </p:txBody>
       </p:sp>
       <p:sp>
         <p:nvSpPr>
@@ -10935,7 +11185,7 @@
           <a:bodyPr wrap="square" lIns="0" tIns="0" rIns="0" bIns="0" rtlCol="0" anchor="ctr"/>
           <a:lstStyle/>
           <a:p>
-            <a:pPr algn="ctr" indent="0" marL="0">
+            <a:pPr marL="0" indent="0" algn="ctr">
               <a:buNone/>
             </a:pPr>
             <a:r>
@@ -10979,6 +11229,13 @@
             <a:prstDash val="solid"/>
           </a:ln>
         </p:spPr>
+        <p:txBody>
+          <a:bodyPr/>
+          <a:lstStyle/>
+          <a:p>
+            <a:endParaRPr lang="en-PK"/>
+          </a:p>
+        </p:txBody>
       </p:sp>
       <p:sp>
         <p:nvSpPr>
@@ -10999,6 +11256,13 @@
           </a:solidFill>
           <a:ln/>
         </p:spPr>
+        <p:txBody>
+          <a:bodyPr/>
+          <a:lstStyle/>
+          <a:p>
+            <a:endParaRPr lang="en-PK"/>
+          </a:p>
+        </p:txBody>
       </p:sp>
       <p:sp>
         <p:nvSpPr>
@@ -11021,7 +11285,7 @@
           <a:bodyPr wrap="square" lIns="0" tIns="0" rIns="0" bIns="0" rtlCol="0" anchor="ctr"/>
           <a:lstStyle/>
           <a:p>
-            <a:pPr algn="ctr" indent="0" marL="0">
+            <a:pPr marL="0" indent="0" algn="ctr">
               <a:buNone/>
             </a:pPr>
             <a:r>
@@ -11060,7 +11324,7 @@
           <a:bodyPr wrap="square" lIns="0" tIns="0" rIns="0" bIns="0" rtlCol="0" anchor="ctr"/>
           <a:lstStyle/>
           <a:p>
-            <a:pPr indent="0" marL="0">
+            <a:pPr marL="0" indent="0">
               <a:buNone/>
             </a:pPr>
             <a:r>
@@ -11099,7 +11363,7 @@
           <a:bodyPr wrap="square" lIns="0" tIns="0" rIns="0" bIns="0" rtlCol="0" anchor="ctr"/>
           <a:lstStyle/>
           <a:p>
-            <a:pPr indent="0" marL="0">
+            <a:pPr marL="0" indent="0">
               <a:buNone/>
             </a:pPr>
             <a:r>
@@ -11138,6 +11402,13 @@
           </a:solidFill>
           <a:ln/>
         </p:spPr>
+        <p:txBody>
+          <a:bodyPr/>
+          <a:lstStyle/>
+          <a:p>
+            <a:endParaRPr lang="en-PK"/>
+          </a:p>
+        </p:txBody>
       </p:sp>
       <p:sp>
         <p:nvSpPr>
@@ -11160,7 +11431,7 @@
           <a:bodyPr wrap="square" lIns="0" tIns="0" rIns="0" bIns="0" rtlCol="0" anchor="ctr"/>
           <a:lstStyle/>
           <a:p>
-            <a:pPr algn="ctr" indent="0" marL="0">
+            <a:pPr marL="0" indent="0" algn="ctr">
               <a:buNone/>
             </a:pPr>
             <a:r>
@@ -11204,6 +11475,13 @@
             <a:prstDash val="solid"/>
           </a:ln>
         </p:spPr>
+        <p:txBody>
+          <a:bodyPr/>
+          <a:lstStyle/>
+          <a:p>
+            <a:endParaRPr lang="en-PK"/>
+          </a:p>
+        </p:txBody>
       </p:sp>
       <p:sp>
         <p:nvSpPr>
@@ -11224,6 +11502,13 @@
           </a:solidFill>
           <a:ln/>
         </p:spPr>
+        <p:txBody>
+          <a:bodyPr/>
+          <a:lstStyle/>
+          <a:p>
+            <a:endParaRPr lang="en-PK"/>
+          </a:p>
+        </p:txBody>
       </p:sp>
       <p:sp>
         <p:nvSpPr>
@@ -11246,7 +11531,7 @@
           <a:bodyPr wrap="square" lIns="0" tIns="0" rIns="0" bIns="0" rtlCol="0" anchor="ctr"/>
           <a:lstStyle/>
           <a:p>
-            <a:pPr algn="ctr" indent="0" marL="0">
+            <a:pPr marL="0" indent="0" algn="ctr">
               <a:buNone/>
             </a:pPr>
             <a:r>
@@ -11285,7 +11570,7 @@
           <a:bodyPr wrap="square" lIns="0" tIns="0" rIns="0" bIns="0" rtlCol="0" anchor="ctr"/>
           <a:lstStyle/>
           <a:p>
-            <a:pPr indent="0" marL="0">
+            <a:pPr marL="0" indent="0">
               <a:buNone/>
             </a:pPr>
             <a:r>
@@ -11324,7 +11609,7 @@
           <a:bodyPr wrap="square" lIns="0" tIns="0" rIns="0" bIns="0" rtlCol="0" anchor="ctr"/>
           <a:lstStyle/>
           <a:p>
-            <a:pPr indent="0" marL="0">
+            <a:pPr marL="0" indent="0">
               <a:buNone/>
             </a:pPr>
             <a:r>
@@ -11363,6 +11648,13 @@
           </a:solidFill>
           <a:ln/>
         </p:spPr>
+        <p:txBody>
+          <a:bodyPr/>
+          <a:lstStyle/>
+          <a:p>
+            <a:endParaRPr lang="en-PK"/>
+          </a:p>
+        </p:txBody>
       </p:sp>
       <p:sp>
         <p:nvSpPr>
@@ -11385,7 +11677,7 @@
           <a:bodyPr wrap="square" lIns="0" tIns="0" rIns="0" bIns="0" rtlCol="0" anchor="ctr"/>
           <a:lstStyle/>
           <a:p>
-            <a:pPr algn="ctr" indent="0" marL="0">
+            <a:pPr marL="0" indent="0" algn="ctr">
               <a:buNone/>
             </a:pPr>
             <a:r>
@@ -11429,6 +11721,13 @@
             <a:prstDash val="solid"/>
           </a:ln>
         </p:spPr>
+        <p:txBody>
+          <a:bodyPr/>
+          <a:lstStyle/>
+          <a:p>
+            <a:endParaRPr lang="en-PK"/>
+          </a:p>
+        </p:txBody>
       </p:sp>
       <p:sp>
         <p:nvSpPr>
@@ -11449,6 +11748,13 @@
           </a:solidFill>
           <a:ln/>
         </p:spPr>
+        <p:txBody>
+          <a:bodyPr/>
+          <a:lstStyle/>
+          <a:p>
+            <a:endParaRPr lang="en-PK"/>
+          </a:p>
+        </p:txBody>
       </p:sp>
       <p:sp>
         <p:nvSpPr>
@@ -11471,7 +11777,7 @@
           <a:bodyPr wrap="square" lIns="0" tIns="0" rIns="0" bIns="0" rtlCol="0" anchor="ctr"/>
           <a:lstStyle/>
           <a:p>
-            <a:pPr algn="ctr" indent="0" marL="0">
+            <a:pPr marL="0" indent="0" algn="ctr">
               <a:buNone/>
             </a:pPr>
             <a:r>
@@ -11510,7 +11816,7 @@
           <a:bodyPr wrap="square" lIns="0" tIns="0" rIns="0" bIns="0" rtlCol="0" anchor="ctr"/>
           <a:lstStyle/>
           <a:p>
-            <a:pPr indent="0" marL="0">
+            <a:pPr marL="0" indent="0">
               <a:buNone/>
             </a:pPr>
             <a:r>
@@ -11549,7 +11855,7 @@
           <a:bodyPr wrap="square" lIns="0" tIns="0" rIns="0" bIns="0" rtlCol="0" anchor="ctr"/>
           <a:lstStyle/>
           <a:p>
-            <a:pPr indent="0" marL="0">
+            <a:pPr marL="0" indent="0">
               <a:buNone/>
             </a:pPr>
             <a:r>
@@ -11588,6 +11894,13 @@
           </a:solidFill>
           <a:ln/>
         </p:spPr>
+        <p:txBody>
+          <a:bodyPr/>
+          <a:lstStyle/>
+          <a:p>
+            <a:endParaRPr lang="en-PK"/>
+          </a:p>
+        </p:txBody>
       </p:sp>
       <p:sp>
         <p:nvSpPr>
@@ -11610,7 +11923,7 @@
           <a:bodyPr wrap="square" lIns="0" tIns="0" rIns="0" bIns="0" rtlCol="0" anchor="ctr"/>
           <a:lstStyle/>
           <a:p>
-            <a:pPr algn="ctr" indent="0" marL="0">
+            <a:pPr marL="0" indent="0" algn="ctr">
               <a:buNone/>
             </a:pPr>
             <a:r>
@@ -11654,6 +11967,13 @@
             <a:prstDash val="solid"/>
           </a:ln>
         </p:spPr>
+        <p:txBody>
+          <a:bodyPr/>
+          <a:lstStyle/>
+          <a:p>
+            <a:endParaRPr lang="en-PK"/>
+          </a:p>
+        </p:txBody>
       </p:sp>
       <p:sp>
         <p:nvSpPr>
@@ -11674,6 +11994,13 @@
           </a:solidFill>
           <a:ln/>
         </p:spPr>
+        <p:txBody>
+          <a:bodyPr/>
+          <a:lstStyle/>
+          <a:p>
+            <a:endParaRPr lang="en-PK"/>
+          </a:p>
+        </p:txBody>
       </p:sp>
       <p:sp>
         <p:nvSpPr>
@@ -11696,7 +12023,7 @@
           <a:bodyPr wrap="square" lIns="0" tIns="0" rIns="0" bIns="0" rtlCol="0" anchor="ctr"/>
           <a:lstStyle/>
           <a:p>
-            <a:pPr algn="ctr" indent="0" marL="0">
+            <a:pPr marL="0" indent="0" algn="ctr">
               <a:buNone/>
             </a:pPr>
             <a:r>
@@ -11735,7 +12062,7 @@
           <a:bodyPr wrap="square" lIns="0" tIns="0" rIns="0" bIns="0" rtlCol="0" anchor="ctr"/>
           <a:lstStyle/>
           <a:p>
-            <a:pPr indent="0" marL="0">
+            <a:pPr marL="0" indent="0">
               <a:buNone/>
             </a:pPr>
             <a:r>
@@ -11774,7 +12101,7 @@
           <a:bodyPr wrap="square" lIns="0" tIns="0" rIns="0" bIns="0" rtlCol="0" anchor="ctr"/>
           <a:lstStyle/>
           <a:p>
-            <a:pPr indent="0" marL="0">
+            <a:pPr marL="0" indent="0">
               <a:buNone/>
             </a:pPr>
             <a:r>
@@ -11813,6 +12140,13 @@
           </a:solidFill>
           <a:ln/>
         </p:spPr>
+        <p:txBody>
+          <a:bodyPr/>
+          <a:lstStyle/>
+          <a:p>
+            <a:endParaRPr lang="en-PK"/>
+          </a:p>
+        </p:txBody>
       </p:sp>
       <p:sp>
         <p:nvSpPr>
@@ -11835,7 +12169,7 @@
           <a:bodyPr wrap="square" lIns="0" tIns="0" rIns="0" bIns="0" rtlCol="0" anchor="ctr"/>
           <a:lstStyle/>
           <a:p>
-            <a:pPr algn="ctr" indent="0" marL="0">
+            <a:pPr marL="0" indent="0" algn="ctr">
               <a:buNone/>
             </a:pPr>
             <a:r>
@@ -11879,6 +12213,13 @@
             <a:prstDash val="solid"/>
           </a:ln>
         </p:spPr>
+        <p:txBody>
+          <a:bodyPr/>
+          <a:lstStyle/>
+          <a:p>
+            <a:endParaRPr lang="en-PK"/>
+          </a:p>
+        </p:txBody>
       </p:sp>
       <p:sp>
         <p:nvSpPr>
@@ -11899,6 +12240,13 @@
           </a:solidFill>
           <a:ln/>
         </p:spPr>
+        <p:txBody>
+          <a:bodyPr/>
+          <a:lstStyle/>
+          <a:p>
+            <a:endParaRPr lang="en-PK"/>
+          </a:p>
+        </p:txBody>
       </p:sp>
       <p:sp>
         <p:nvSpPr>
@@ -11921,7 +12269,7 @@
           <a:bodyPr wrap="square" lIns="0" tIns="0" rIns="0" bIns="0" rtlCol="0" anchor="ctr"/>
           <a:lstStyle/>
           <a:p>
-            <a:pPr algn="ctr" indent="0" marL="0">
+            <a:pPr marL="0" indent="0" algn="ctr">
               <a:buNone/>
             </a:pPr>
             <a:r>
@@ -11960,7 +12308,7 @@
           <a:bodyPr wrap="square" lIns="0" tIns="0" rIns="0" bIns="0" rtlCol="0" anchor="ctr"/>
           <a:lstStyle/>
           <a:p>
-            <a:pPr indent="0" marL="0">
+            <a:pPr marL="0" indent="0">
               <a:buNone/>
             </a:pPr>
             <a:r>
@@ -11999,7 +12347,7 @@
           <a:bodyPr wrap="square" lIns="0" tIns="0" rIns="0" bIns="0" rtlCol="0" anchor="ctr"/>
           <a:lstStyle/>
           <a:p>
-            <a:pPr indent="0" marL="0">
+            <a:pPr marL="0" indent="0">
               <a:buNone/>
             </a:pPr>
             <a:r>
@@ -12038,6 +12386,13 @@
           </a:solidFill>
           <a:ln/>
         </p:spPr>
+        <p:txBody>
+          <a:bodyPr/>
+          <a:lstStyle/>
+          <a:p>
+            <a:endParaRPr lang="en-PK"/>
+          </a:p>
+        </p:txBody>
       </p:sp>
       <p:sp>
         <p:nvSpPr>
@@ -12060,7 +12415,7 @@
           <a:bodyPr wrap="square" lIns="0" tIns="0" rIns="0" bIns="0" rtlCol="0" anchor="ctr"/>
           <a:lstStyle/>
           <a:p>
-            <a:pPr algn="ctr" indent="0" marL="0">
+            <a:pPr marL="0" indent="0" algn="ctr">
               <a:buNone/>
             </a:pPr>
             <a:r>
@@ -12094,6 +12449,7 @@
         <a:solidFill>
           <a:srgbClr val="FFFFFF"/>
         </a:solidFill>
+        <a:effectLst/>
       </p:bgPr>
     </p:bg>
     <p:spTree>
@@ -12131,11 +12487,11 @@
           <a:bodyPr wrap="square" lIns="0" tIns="0" rIns="0" bIns="0" rtlCol="0" anchor="ctr"/>
           <a:lstStyle/>
           <a:p>
-            <a:pPr indent="0" marL="0">
-              <a:buNone/>
-            </a:pPr>
-            <a:r>
-              <a:rPr lang="en-US" sz="1100" b="1" spc="150" kern="0" dirty="0">
+            <a:pPr marL="0" indent="0">
+              <a:buNone/>
+            </a:pPr>
+            <a:r>
+              <a:rPr lang="en-US" sz="1100" b="1" kern="0" spc="150" dirty="0">
                 <a:solidFill>
                   <a:srgbClr val="8A5F22"/>
                 </a:solidFill>
@@ -12170,7 +12526,7 @@
           <a:bodyPr wrap="square" lIns="0" tIns="0" rIns="0" bIns="0" rtlCol="0" anchor="ctr"/>
           <a:lstStyle/>
           <a:p>
-            <a:pPr indent="0" marL="0">
+            <a:pPr marL="0" indent="0">
               <a:buNone/>
             </a:pPr>
             <a:r>
@@ -12207,6 +12563,13 @@
           </a:solidFill>
           <a:ln/>
         </p:spPr>
+        <p:txBody>
+          <a:bodyPr/>
+          <a:lstStyle/>
+          <a:p>
+            <a:endParaRPr lang="en-PK"/>
+          </a:p>
+        </p:txBody>
       </p:sp>
       <p:sp>
         <p:nvSpPr>
@@ -12229,7 +12592,7 @@
           <a:bodyPr wrap="square" lIns="0" tIns="0" rIns="0" bIns="0" rtlCol="0" anchor="ctr"/>
           <a:lstStyle/>
           <a:p>
-            <a:pPr algn="r" indent="0" marL="0">
+            <a:pPr marL="0" indent="0" algn="r">
               <a:buNone/>
             </a:pPr>
             <a:r>
@@ -12273,6 +12636,13 @@
             <a:prstDash val="solid"/>
           </a:ln>
         </p:spPr>
+        <p:txBody>
+          <a:bodyPr/>
+          <a:lstStyle/>
+          <a:p>
+            <a:endParaRPr lang="en-PK"/>
+          </a:p>
+        </p:txBody>
       </p:sp>
       <p:sp>
         <p:nvSpPr>
@@ -12295,7 +12665,7 @@
           <a:bodyPr wrap="square" lIns="0" tIns="0" rIns="0" bIns="0" rtlCol="0" anchor="ctr"/>
           <a:lstStyle/>
           <a:p>
-            <a:pPr indent="0" marL="0">
+            <a:pPr marL="0" indent="0">
               <a:buNone/>
             </a:pPr>
             <a:r>
@@ -12309,9 +12679,6 @@
               </a:rPr>
               <a:t>Contribution.  </a:t>
             </a:r>
-            <a:pPr indent="0" marL="0">
-              <a:buNone/>
-            </a:pPr>
             <a:r>
               <a:rPr lang="en-US" sz="1100" dirty="0">
                 <a:solidFill>
@@ -12353,6 +12720,13 @@
             <a:prstDash val="dash"/>
           </a:ln>
         </p:spPr>
+        <p:txBody>
+          <a:bodyPr/>
+          <a:lstStyle/>
+          <a:p>
+            <a:endParaRPr lang="en-PK"/>
+          </a:p>
+        </p:txBody>
       </p:sp>
       <p:sp>
         <p:nvSpPr>
@@ -12375,7 +12749,7 @@
           <a:bodyPr wrap="square" lIns="0" tIns="0" rIns="0" bIns="0" rtlCol="0" anchor="ctr"/>
           <a:lstStyle/>
           <a:p>
-            <a:pPr algn="ctr" indent="0" marL="0">
+            <a:pPr marL="0" indent="0" algn="ctr">
               <a:buNone/>
             </a:pPr>
             <a:r>
@@ -12392,7 +12766,7 @@
             <a:endParaRPr lang="en-US" sz="1000" dirty="0"/>
           </a:p>
           <a:p>
-            <a:pPr algn="ctr" indent="0" marL="0">
+            <a:pPr marL="0" indent="0" algn="ctr">
               <a:buNone/>
             </a:pPr>
             <a:r>
@@ -12436,6 +12810,13 @@
             <a:prstDash val="dash"/>
           </a:ln>
         </p:spPr>
+        <p:txBody>
+          <a:bodyPr/>
+          <a:lstStyle/>
+          <a:p>
+            <a:endParaRPr lang="en-PK"/>
+          </a:p>
+        </p:txBody>
       </p:sp>
       <p:sp>
         <p:nvSpPr>
@@ -12458,7 +12839,7 @@
           <a:bodyPr wrap="square" lIns="0" tIns="0" rIns="0" bIns="0" rtlCol="0" anchor="ctr"/>
           <a:lstStyle/>
           <a:p>
-            <a:pPr algn="ctr" indent="0" marL="0">
+            <a:pPr marL="0" indent="0" algn="ctr">
               <a:buNone/>
             </a:pPr>
             <a:r>
@@ -12475,7 +12856,7 @@
             <a:endParaRPr lang="en-US" sz="1000" dirty="0"/>
           </a:p>
           <a:p>
-            <a:pPr algn="ctr" indent="0" marL="0">
+            <a:pPr marL="0" indent="0" algn="ctr">
               <a:buNone/>
             </a:pPr>
             <a:r>
@@ -12519,6 +12900,13 @@
             <a:prstDash val="dash"/>
           </a:ln>
         </p:spPr>
+        <p:txBody>
+          <a:bodyPr/>
+          <a:lstStyle/>
+          <a:p>
+            <a:endParaRPr lang="en-PK"/>
+          </a:p>
+        </p:txBody>
       </p:sp>
       <p:sp>
         <p:nvSpPr>
@@ -12541,11 +12929,11 @@
           <a:bodyPr wrap="square" lIns="0" tIns="0" rIns="0" bIns="0" rtlCol="0" anchor="ctr"/>
           <a:lstStyle/>
           <a:p>
-            <a:pPr indent="0" marL="0">
-              <a:buNone/>
-            </a:pPr>
-            <a:r>
-              <a:rPr lang="en-US" sz="800" b="1" spc="100" kern="0" dirty="0">
+            <a:pPr marL="0" indent="0">
+              <a:buNone/>
+            </a:pPr>
+            <a:r>
+              <a:rPr lang="en-US" sz="800" b="1" kern="0" spc="100" dirty="0">
                 <a:solidFill>
                   <a:srgbClr val="8A5F22"/>
                 </a:solidFill>
@@ -12585,6 +12973,13 @@
             <a:prstDash val="solid"/>
           </a:ln>
         </p:spPr>
+        <p:txBody>
+          <a:bodyPr/>
+          <a:lstStyle/>
+          <a:p>
+            <a:endParaRPr lang="en-PK"/>
+          </a:p>
+        </p:txBody>
       </p:sp>
       <p:sp>
         <p:nvSpPr>
@@ -12607,7 +13002,7 @@
           <a:bodyPr wrap="square" lIns="0" tIns="0" rIns="0" bIns="0" rtlCol="0" anchor="ctr"/>
           <a:lstStyle/>
           <a:p>
-            <a:pPr indent="0" marL="0">
+            <a:pPr marL="0" indent="0">
               <a:buNone/>
             </a:pPr>
             <a:r>
@@ -12646,7 +13041,7 @@
           <a:bodyPr wrap="square" lIns="0" tIns="0" rIns="0" bIns="0" rtlCol="0" anchor="ctr"/>
           <a:lstStyle/>
           <a:p>
-            <a:pPr indent="0" marL="0">
+            <a:pPr marL="0" indent="0">
               <a:buNone/>
             </a:pPr>
             <a:r>
@@ -12687,6 +13082,13 @@
             <a:tailEnd type="triangle"/>
           </a:ln>
         </p:spPr>
+        <p:txBody>
+          <a:bodyPr/>
+          <a:lstStyle/>
+          <a:p>
+            <a:endParaRPr lang="en-PK"/>
+          </a:p>
+        </p:txBody>
       </p:sp>
       <p:sp>
         <p:nvSpPr>
@@ -12714,6 +13116,13 @@
             <a:prstDash val="solid"/>
           </a:ln>
         </p:spPr>
+        <p:txBody>
+          <a:bodyPr/>
+          <a:lstStyle/>
+          <a:p>
+            <a:endParaRPr lang="en-PK"/>
+          </a:p>
+        </p:txBody>
       </p:sp>
       <p:sp>
         <p:nvSpPr>
@@ -12736,7 +13145,7 @@
           <a:bodyPr wrap="square" lIns="0" tIns="0" rIns="0" bIns="0" rtlCol="0" anchor="ctr"/>
           <a:lstStyle/>
           <a:p>
-            <a:pPr indent="0" marL="0">
+            <a:pPr marL="0" indent="0">
               <a:buNone/>
             </a:pPr>
             <a:r>
@@ -12775,7 +13184,7 @@
           <a:bodyPr wrap="square" lIns="0" tIns="0" rIns="0" bIns="0" rtlCol="0" anchor="ctr"/>
           <a:lstStyle/>
           <a:p>
-            <a:pPr indent="0" marL="0">
+            <a:pPr marL="0" indent="0">
               <a:buNone/>
             </a:pPr>
             <a:r>
@@ -12816,6 +13225,13 @@
             <a:tailEnd type="triangle"/>
           </a:ln>
         </p:spPr>
+        <p:txBody>
+          <a:bodyPr/>
+          <a:lstStyle/>
+          <a:p>
+            <a:endParaRPr lang="en-PK"/>
+          </a:p>
+        </p:txBody>
       </p:sp>
       <p:sp>
         <p:nvSpPr>
@@ -12843,6 +13259,13 @@
             <a:prstDash val="solid"/>
           </a:ln>
         </p:spPr>
+        <p:txBody>
+          <a:bodyPr/>
+          <a:lstStyle/>
+          <a:p>
+            <a:endParaRPr lang="en-PK"/>
+          </a:p>
+        </p:txBody>
       </p:sp>
       <p:sp>
         <p:nvSpPr>
@@ -12865,7 +13288,7 @@
           <a:bodyPr wrap="square" lIns="0" tIns="0" rIns="0" bIns="0" rtlCol="0" anchor="ctr"/>
           <a:lstStyle/>
           <a:p>
-            <a:pPr indent="0" marL="0">
+            <a:pPr marL="0" indent="0">
               <a:buNone/>
             </a:pPr>
             <a:r>
@@ -12904,7 +13327,7 @@
           <a:bodyPr wrap="square" lIns="0" tIns="0" rIns="0" bIns="0" rtlCol="0" anchor="ctr"/>
           <a:lstStyle/>
           <a:p>
-            <a:pPr indent="0" marL="0">
+            <a:pPr marL="0" indent="0">
               <a:buNone/>
             </a:pPr>
             <a:r>
@@ -12948,6 +13371,13 @@
             <a:prstDash val="dash"/>
           </a:ln>
         </p:spPr>
+        <p:txBody>
+          <a:bodyPr/>
+          <a:lstStyle/>
+          <a:p>
+            <a:endParaRPr lang="en-PK"/>
+          </a:p>
+        </p:txBody>
       </p:sp>
       <p:sp>
         <p:nvSpPr>
@@ -12970,7 +13400,7 @@
           <a:bodyPr wrap="square" lIns="0" tIns="0" rIns="0" bIns="0" rtlCol="0" anchor="ctr"/>
           <a:lstStyle/>
           <a:p>
-            <a:pPr algn="ctr" indent="0" marL="0">
+            <a:pPr marL="0" indent="0" algn="ctr">
               <a:buNone/>
             </a:pPr>
             <a:r>
@@ -12987,7 +13417,7 @@
             <a:endParaRPr lang="en-US" sz="1000" dirty="0"/>
           </a:p>
           <a:p>
-            <a:pPr algn="ctr" indent="0" marL="0">
+            <a:pPr marL="0" indent="0" algn="ctr">
               <a:buNone/>
             </a:pPr>
             <a:r>
@@ -13004,7 +13434,7 @@
             <a:endParaRPr lang="en-US" sz="1000" dirty="0"/>
           </a:p>
           <a:p>
-            <a:pPr algn="ctr" indent="0" marL="0">
+            <a:pPr marL="0" indent="0" algn="ctr">
               <a:buNone/>
             </a:pPr>
             <a:r>
@@ -13043,7 +13473,7 @@
           <a:bodyPr wrap="square" lIns="0" tIns="0" rIns="0" bIns="0" rtlCol="0" anchor="ctr"/>
           <a:lstStyle/>
           <a:p>
-            <a:pPr indent="0" marL="0">
+            <a:pPr marL="0" indent="0">
               <a:buNone/>
             </a:pPr>
             <a:r>
@@ -13082,7 +13512,7 @@
           <a:bodyPr wrap="square" lIns="0" tIns="0" rIns="0" bIns="0" rtlCol="0" anchor="ctr"/>
           <a:lstStyle/>
           <a:p>
-            <a:pPr indent="0" marL="0">
+            <a:pPr marL="0" indent="0">
               <a:buNone/>
             </a:pPr>
             <a:r>
@@ -13116,6 +13546,7 @@
         <a:solidFill>
           <a:srgbClr val="FFFFFF"/>
         </a:solidFill>
+        <a:effectLst/>
       </p:bgPr>
     </p:bg>
     <p:spTree>
@@ -13153,11 +13584,11 @@
           <a:bodyPr wrap="square" lIns="0" tIns="0" rIns="0" bIns="0" rtlCol="0" anchor="ctr"/>
           <a:lstStyle/>
           <a:p>
-            <a:pPr indent="0" marL="0">
-              <a:buNone/>
-            </a:pPr>
-            <a:r>
-              <a:rPr lang="en-US" sz="1100" b="1" spc="150" kern="0" dirty="0">
+            <a:pPr marL="0" indent="0">
+              <a:buNone/>
+            </a:pPr>
+            <a:r>
+              <a:rPr lang="en-US" sz="1100" b="1" kern="0" spc="150" dirty="0">
                 <a:solidFill>
                   <a:srgbClr val="8A5F22"/>
                 </a:solidFill>
@@ -13192,7 +13623,7 @@
           <a:bodyPr wrap="square" lIns="0" tIns="0" rIns="0" bIns="0" rtlCol="0" anchor="ctr"/>
           <a:lstStyle/>
           <a:p>
-            <a:pPr indent="0" marL="0">
+            <a:pPr marL="0" indent="0">
               <a:buNone/>
             </a:pPr>
             <a:r>
@@ -13229,6 +13660,13 @@
           </a:solidFill>
           <a:ln/>
         </p:spPr>
+        <p:txBody>
+          <a:bodyPr/>
+          <a:lstStyle/>
+          <a:p>
+            <a:endParaRPr lang="en-PK"/>
+          </a:p>
+        </p:txBody>
       </p:sp>
       <p:sp>
         <p:nvSpPr>
@@ -13251,7 +13689,7 @@
           <a:bodyPr wrap="square" lIns="0" tIns="0" rIns="0" bIns="0" rtlCol="0" anchor="ctr"/>
           <a:lstStyle/>
           <a:p>
-            <a:pPr algn="r" indent="0" marL="0">
+            <a:pPr marL="0" indent="0" algn="r">
               <a:buNone/>
             </a:pPr>
             <a:r>
@@ -13290,7 +13728,7 @@
           <a:bodyPr wrap="square" lIns="0" tIns="0" rIns="0" bIns="0" rtlCol="0" anchor="ctr"/>
           <a:lstStyle/>
           <a:p>
-            <a:pPr algn="l" indent="0" marL="0">
+            <a:pPr marL="0" indent="0" algn="l">
               <a:buNone/>
             </a:pPr>
             <a:r>
@@ -13329,7 +13767,7 @@
           <a:bodyPr wrap="square" lIns="0" tIns="0" rIns="0" bIns="0" rtlCol="0" anchor="ctr"/>
           <a:lstStyle/>
           <a:p>
-            <a:pPr indent="0" marL="0">
+            <a:pPr marL="0" indent="0">
               <a:buNone/>
             </a:pPr>
             <a:r>
@@ -13368,7 +13806,7 @@
           <a:bodyPr wrap="square" lIns="0" tIns="0" rIns="0" bIns="0" rtlCol="0" anchor="ctr"/>
           <a:lstStyle/>
           <a:p>
-            <a:pPr algn="l" indent="0" marL="0">
+            <a:pPr marL="0" indent="0" algn="l">
               <a:buNone/>
             </a:pPr>
             <a:r>
@@ -13407,7 +13845,7 @@
           <a:bodyPr wrap="square" lIns="0" tIns="0" rIns="0" bIns="0" rtlCol="0" anchor="ctr"/>
           <a:lstStyle/>
           <a:p>
-            <a:pPr indent="0" marL="0">
+            <a:pPr marL="0" indent="0">
               <a:buNone/>
             </a:pPr>
             <a:r>
@@ -13446,7 +13884,7 @@
           <a:bodyPr wrap="square" lIns="0" tIns="0" rIns="0" bIns="0" rtlCol="0" anchor="ctr"/>
           <a:lstStyle/>
           <a:p>
-            <a:pPr algn="l" indent="0" marL="0">
+            <a:pPr marL="0" indent="0" algn="l">
               <a:buNone/>
             </a:pPr>
             <a:r>
@@ -13485,7 +13923,7 @@
           <a:bodyPr wrap="square" lIns="0" tIns="0" rIns="0" bIns="0" rtlCol="0" anchor="ctr"/>
           <a:lstStyle/>
           <a:p>
-            <a:pPr indent="0" marL="0">
+            <a:pPr marL="0" indent="0">
               <a:buNone/>
             </a:pPr>
             <a:r>
@@ -13524,7 +13962,7 @@
           <a:bodyPr wrap="square" lIns="0" tIns="0" rIns="0" bIns="0" rtlCol="0" anchor="ctr"/>
           <a:lstStyle/>
           <a:p>
-            <a:pPr algn="l" indent="0" marL="0">
+            <a:pPr marL="0" indent="0" algn="l">
               <a:buNone/>
             </a:pPr>
             <a:r>
@@ -13563,7 +14001,7 @@
           <a:bodyPr wrap="square" lIns="0" tIns="0" rIns="0" bIns="0" rtlCol="0" anchor="ctr"/>
           <a:lstStyle/>
           <a:p>
-            <a:pPr indent="0" marL="0">
+            <a:pPr marL="0" indent="0">
               <a:buNone/>
             </a:pPr>
             <a:r>
@@ -13603,10 +14041,17 @@
             <a:prstDash val="solid"/>
           </a:ln>
         </p:spPr>
+        <p:txBody>
+          <a:bodyPr/>
+          <a:lstStyle/>
+          <a:p>
+            <a:endParaRPr lang="en-PK"/>
+          </a:p>
+        </p:txBody>
       </p:sp>
       <p:graphicFrame>
         <p:nvGraphicFramePr>
-          <p:cNvPr id="8" name="Table 0"/>
+          <p:cNvPr id="15" name="Table 0"/>
           <p:cNvGraphicFramePr>
             <a:graphicFrameLocks noGrp="1"/>
           </p:cNvGraphicFramePr>
@@ -13627,10 +14072,34 @@
             <a:tbl>
               <a:tblPr/>
               <a:tblGrid>
-                <a:gridCol w="457200"/>
-                <a:gridCol w="2377440"/>
-                <a:gridCol w="1965960"/>
-                <a:gridCol w="6382512"/>
+                <a:gridCol w="457200">
+                  <a:extLst>
+                    <a:ext uri="{9D8B030D-6E8A-4147-A177-3AD203B41FA5}">
+                      <a16:colId xmlns:a16="http://schemas.microsoft.com/office/drawing/2014/main" val="20000"/>
+                    </a:ext>
+                  </a:extLst>
+                </a:gridCol>
+                <a:gridCol w="2377440">
+                  <a:extLst>
+                    <a:ext uri="{9D8B030D-6E8A-4147-A177-3AD203B41FA5}">
+                      <a16:colId xmlns:a16="http://schemas.microsoft.com/office/drawing/2014/main" val="20001"/>
+                    </a:ext>
+                  </a:extLst>
+                </a:gridCol>
+                <a:gridCol w="1965960">
+                  <a:extLst>
+                    <a:ext uri="{9D8B030D-6E8A-4147-A177-3AD203B41FA5}">
+                      <a16:colId xmlns:a16="http://schemas.microsoft.com/office/drawing/2014/main" val="20002"/>
+                    </a:ext>
+                  </a:extLst>
+                </a:gridCol>
+                <a:gridCol w="6382512">
+                  <a:extLst>
+                    <a:ext uri="{9D8B030D-6E8A-4147-A177-3AD203B41FA5}">
+                      <a16:colId xmlns:a16="http://schemas.microsoft.com/office/drawing/2014/main" val="20003"/>
+                    </a:ext>
+                  </a:extLst>
+                </a:gridCol>
               </a:tblGrid>
               <a:tr h="360680">
                 <a:tc>
@@ -13638,7 +14107,7 @@
                     <a:bodyPr/>
                     <a:lstStyle/>
                     <a:p>
-                      <a:pPr algn="ctr" indent="0" marL="0">
+                      <a:pPr marL="0" indent="0" algn="ctr">
                         <a:buNone/>
                       </a:pPr>
                       <a:r>
@@ -13659,7 +14128,7 @@
                       </a:endParaRPr>
                     </a:p>
                   </a:txBody>
-                  <a:tcPr marL="91440" marR="91440" marT="45720" marB="45720" anchor="ctr">
+                  <a:tcPr anchor="ctr">
                     <a:lnL w="6350" cap="flat" cmpd="sng" algn="ctr">
                       <a:solidFill>
                         <a:srgbClr val="D8DAE1"/>
@@ -13706,7 +14175,7 @@
                     <a:bodyPr/>
                     <a:lstStyle/>
                     <a:p>
-                      <a:pPr algn="l" indent="0" marL="0">
+                      <a:pPr marL="0" indent="0" algn="l">
                         <a:buNone/>
                       </a:pPr>
                       <a:r>
@@ -13727,7 +14196,7 @@
                       </a:endParaRPr>
                     </a:p>
                   </a:txBody>
-                  <a:tcPr marL="91440" marR="91440" marT="45720" marB="45720" anchor="ctr">
+                  <a:tcPr anchor="ctr">
                     <a:lnL w="6350" cap="flat" cmpd="sng" algn="ctr">
                       <a:solidFill>
                         <a:srgbClr val="D8DAE1"/>
@@ -13774,7 +14243,7 @@
                     <a:bodyPr/>
                     <a:lstStyle/>
                     <a:p>
-                      <a:pPr algn="l" indent="0" marL="0">
+                      <a:pPr marL="0" indent="0" algn="l">
                         <a:buNone/>
                       </a:pPr>
                       <a:r>
@@ -13795,7 +14264,7 @@
                       </a:endParaRPr>
                     </a:p>
                   </a:txBody>
-                  <a:tcPr marL="91440" marR="91440" marT="45720" marB="45720" anchor="ctr">
+                  <a:tcPr anchor="ctr">
                     <a:lnL w="6350" cap="flat" cmpd="sng" algn="ctr">
                       <a:solidFill>
                         <a:srgbClr val="D8DAE1"/>
@@ -13842,7 +14311,7 @@
                     <a:bodyPr/>
                     <a:lstStyle/>
                     <a:p>
-                      <a:pPr algn="l" indent="0" marL="0">
+                      <a:pPr marL="0" indent="0" algn="l">
                         <a:buNone/>
                       </a:pPr>
                       <a:r>
@@ -13863,7 +14332,7 @@
                       </a:endParaRPr>
                     </a:p>
                   </a:txBody>
-                  <a:tcPr marL="91440" marR="91440" marT="45720" marB="45720" anchor="ctr">
+                  <a:tcPr anchor="ctr">
                     <a:lnL w="6350" cap="flat" cmpd="sng" algn="ctr">
                       <a:solidFill>
                         <a:srgbClr val="D8DAE1"/>
@@ -13905,6 +14374,11 @@
                     </a:solidFill>
                   </a:tcPr>
                 </a:tc>
+                <a:extLst>
+                  <a:ext uri="{0D108BD9-81ED-4DB2-BD59-A6C34878D82A}">
+                    <a16:rowId xmlns:a16="http://schemas.microsoft.com/office/drawing/2014/main" val="10000"/>
+                  </a:ext>
+                </a:extLst>
               </a:tr>
               <a:tr h="360680">
                 <a:tc>
@@ -13912,7 +14386,7 @@
                     <a:bodyPr/>
                     <a:lstStyle/>
                     <a:p>
-                      <a:pPr algn="ctr" indent="0" marL="0">
+                      <a:pPr marL="0" indent="0" algn="ctr">
                         <a:buNone/>
                       </a:pPr>
                       <a:r>
@@ -13933,7 +14407,7 @@
                       </a:endParaRPr>
                     </a:p>
                   </a:txBody>
-                  <a:tcPr marL="91440" marR="91440" marT="45720" marB="45720" anchor="ctr">
+                  <a:tcPr anchor="ctr">
                     <a:lnL w="6350" cap="flat" cmpd="sng" algn="ctr">
                       <a:solidFill>
                         <a:srgbClr val="D8DAE1"/>
@@ -13980,7 +14454,7 @@
                     <a:bodyPr/>
                     <a:lstStyle/>
                     <a:p>
-                      <a:pPr algn="l" indent="0" marL="0">
+                      <a:pPr marL="0" indent="0" algn="l">
                         <a:buNone/>
                       </a:pPr>
                       <a:r>
@@ -14001,7 +14475,7 @@
                       </a:endParaRPr>
                     </a:p>
                   </a:txBody>
-                  <a:tcPr marL="91440" marR="91440" marT="45720" marB="45720" anchor="ctr">
+                  <a:tcPr anchor="ctr">
                     <a:lnL w="6350" cap="flat" cmpd="sng" algn="ctr">
                       <a:solidFill>
                         <a:srgbClr val="D8DAE1"/>
@@ -14048,7 +14522,7 @@
                     <a:bodyPr/>
                     <a:lstStyle/>
                     <a:p>
-                      <a:pPr algn="l" indent="0" marL="0">
+                      <a:pPr marL="0" indent="0" algn="l">
                         <a:buNone/>
                       </a:pPr>
                       <a:r>
@@ -14069,7 +14543,7 @@
                       </a:endParaRPr>
                     </a:p>
                   </a:txBody>
-                  <a:tcPr marL="91440" marR="91440" marT="45720" marB="45720" anchor="ctr">
+                  <a:tcPr anchor="ctr">
                     <a:lnL w="6350" cap="flat" cmpd="sng" algn="ctr">
                       <a:solidFill>
                         <a:srgbClr val="D8DAE1"/>
@@ -14116,7 +14590,7 @@
                     <a:bodyPr/>
                     <a:lstStyle/>
                     <a:p>
-                      <a:pPr algn="l" indent="0" marL="0">
+                      <a:pPr marL="0" indent="0" algn="l">
                         <a:buNone/>
                       </a:pPr>
                       <a:r>
@@ -14137,7 +14611,7 @@
                       </a:endParaRPr>
                     </a:p>
                   </a:txBody>
-                  <a:tcPr marL="91440" marR="91440" marT="45720" marB="45720" anchor="ctr">
+                  <a:tcPr anchor="ctr">
                     <a:lnL w="6350" cap="flat" cmpd="sng" algn="ctr">
                       <a:solidFill>
                         <a:srgbClr val="D8DAE1"/>
@@ -14179,6 +14653,11 @@
                     </a:solidFill>
                   </a:tcPr>
                 </a:tc>
+                <a:extLst>
+                  <a:ext uri="{0D108BD9-81ED-4DB2-BD59-A6C34878D82A}">
+                    <a16:rowId xmlns:a16="http://schemas.microsoft.com/office/drawing/2014/main" val="10001"/>
+                  </a:ext>
+                </a:extLst>
               </a:tr>
               <a:tr h="360680">
                 <a:tc>
@@ -14186,7 +14665,7 @@
                     <a:bodyPr/>
                     <a:lstStyle/>
                     <a:p>
-                      <a:pPr algn="ctr" indent="0" marL="0">
+                      <a:pPr marL="0" indent="0" algn="ctr">
                         <a:buNone/>
                       </a:pPr>
                       <a:r>
@@ -14207,7 +14686,7 @@
                       </a:endParaRPr>
                     </a:p>
                   </a:txBody>
-                  <a:tcPr marL="91440" marR="91440" marT="45720" marB="45720" anchor="ctr">
+                  <a:tcPr anchor="ctr">
                     <a:lnL w="6350" cap="flat" cmpd="sng" algn="ctr">
                       <a:solidFill>
                         <a:srgbClr val="D8DAE1"/>
@@ -14254,7 +14733,7 @@
                     <a:bodyPr/>
                     <a:lstStyle/>
                     <a:p>
-                      <a:pPr algn="l" indent="0" marL="0">
+                      <a:pPr marL="0" indent="0" algn="l">
                         <a:buNone/>
                       </a:pPr>
                       <a:r>
@@ -14275,7 +14754,7 @@
                       </a:endParaRPr>
                     </a:p>
                   </a:txBody>
-                  <a:tcPr marL="91440" marR="91440" marT="45720" marB="45720" anchor="ctr">
+                  <a:tcPr anchor="ctr">
                     <a:lnL w="6350" cap="flat" cmpd="sng" algn="ctr">
                       <a:solidFill>
                         <a:srgbClr val="D8DAE1"/>
@@ -14322,7 +14801,7 @@
                     <a:bodyPr/>
                     <a:lstStyle/>
                     <a:p>
-                      <a:pPr algn="l" indent="0" marL="0">
+                      <a:pPr marL="0" indent="0" algn="l">
                         <a:buNone/>
                       </a:pPr>
                       <a:r>
@@ -14343,7 +14822,7 @@
                       </a:endParaRPr>
                     </a:p>
                   </a:txBody>
-                  <a:tcPr marL="91440" marR="91440" marT="45720" marB="45720" anchor="ctr">
+                  <a:tcPr anchor="ctr">
                     <a:lnL w="6350" cap="flat" cmpd="sng" algn="ctr">
                       <a:solidFill>
                         <a:srgbClr val="D8DAE1"/>
@@ -14390,7 +14869,7 @@
                     <a:bodyPr/>
                     <a:lstStyle/>
                     <a:p>
-                      <a:pPr algn="l" indent="0" marL="0">
+                      <a:pPr marL="0" indent="0" algn="l">
                         <a:buNone/>
                       </a:pPr>
                       <a:r>
@@ -14411,7 +14890,7 @@
                       </a:endParaRPr>
                     </a:p>
                   </a:txBody>
-                  <a:tcPr marL="91440" marR="91440" marT="45720" marB="45720" anchor="ctr">
+                  <a:tcPr anchor="ctr">
                     <a:lnL w="6350" cap="flat" cmpd="sng" algn="ctr">
                       <a:solidFill>
                         <a:srgbClr val="D8DAE1"/>
@@ -14453,6 +14932,11 @@
                     </a:solidFill>
                   </a:tcPr>
                 </a:tc>
+                <a:extLst>
+                  <a:ext uri="{0D108BD9-81ED-4DB2-BD59-A6C34878D82A}">
+                    <a16:rowId xmlns:a16="http://schemas.microsoft.com/office/drawing/2014/main" val="10002"/>
+                  </a:ext>
+                </a:extLst>
               </a:tr>
               <a:tr h="360680">
                 <a:tc>
@@ -14460,7 +14944,7 @@
                     <a:bodyPr/>
                     <a:lstStyle/>
                     <a:p>
-                      <a:pPr algn="ctr" indent="0" marL="0">
+                      <a:pPr marL="0" indent="0" algn="ctr">
                         <a:buNone/>
                       </a:pPr>
                       <a:r>
@@ -14481,7 +14965,7 @@
                       </a:endParaRPr>
                     </a:p>
                   </a:txBody>
-                  <a:tcPr marL="91440" marR="91440" marT="45720" marB="45720" anchor="ctr">
+                  <a:tcPr anchor="ctr">
                     <a:lnL w="6350" cap="flat" cmpd="sng" algn="ctr">
                       <a:solidFill>
                         <a:srgbClr val="D8DAE1"/>
@@ -14528,7 +15012,7 @@
                     <a:bodyPr/>
                     <a:lstStyle/>
                     <a:p>
-                      <a:pPr algn="l" indent="0" marL="0">
+                      <a:pPr marL="0" indent="0" algn="l">
                         <a:buNone/>
                       </a:pPr>
                       <a:r>
@@ -14549,7 +15033,7 @@
                       </a:endParaRPr>
                     </a:p>
                   </a:txBody>
-                  <a:tcPr marL="91440" marR="91440" marT="45720" marB="45720" anchor="ctr">
+                  <a:tcPr anchor="ctr">
                     <a:lnL w="6350" cap="flat" cmpd="sng" algn="ctr">
                       <a:solidFill>
                         <a:srgbClr val="D8DAE1"/>
@@ -14596,7 +15080,7 @@
                     <a:bodyPr/>
                     <a:lstStyle/>
                     <a:p>
-                      <a:pPr algn="l" indent="0" marL="0">
+                      <a:pPr marL="0" indent="0" algn="l">
                         <a:buNone/>
                       </a:pPr>
                       <a:r>
@@ -14617,7 +15101,7 @@
                       </a:endParaRPr>
                     </a:p>
                   </a:txBody>
-                  <a:tcPr marL="91440" marR="91440" marT="45720" marB="45720" anchor="ctr">
+                  <a:tcPr anchor="ctr">
                     <a:lnL w="6350" cap="flat" cmpd="sng" algn="ctr">
                       <a:solidFill>
                         <a:srgbClr val="D8DAE1"/>
@@ -14664,7 +15148,7 @@
                     <a:bodyPr/>
                     <a:lstStyle/>
                     <a:p>
-                      <a:pPr algn="l" indent="0" marL="0">
+                      <a:pPr marL="0" indent="0" algn="l">
                         <a:buNone/>
                       </a:pPr>
                       <a:r>
@@ -14685,7 +15169,7 @@
                       </a:endParaRPr>
                     </a:p>
                   </a:txBody>
-                  <a:tcPr marL="91440" marR="91440" marT="45720" marB="45720" anchor="ctr">
+                  <a:tcPr anchor="ctr">
                     <a:lnL w="6350" cap="flat" cmpd="sng" algn="ctr">
                       <a:solidFill>
                         <a:srgbClr val="D8DAE1"/>
@@ -14727,6 +15211,11 @@
                     </a:solidFill>
                   </a:tcPr>
                 </a:tc>
+                <a:extLst>
+                  <a:ext uri="{0D108BD9-81ED-4DB2-BD59-A6C34878D82A}">
+                    <a16:rowId xmlns:a16="http://schemas.microsoft.com/office/drawing/2014/main" val="10003"/>
+                  </a:ext>
+                </a:extLst>
               </a:tr>
               <a:tr h="360680">
                 <a:tc>
@@ -14734,7 +15223,7 @@
                     <a:bodyPr/>
                     <a:lstStyle/>
                     <a:p>
-                      <a:pPr algn="ctr" indent="0" marL="0">
+                      <a:pPr marL="0" indent="0" algn="ctr">
                         <a:buNone/>
                       </a:pPr>
                       <a:r>
@@ -14755,7 +15244,7 @@
                       </a:endParaRPr>
                     </a:p>
                   </a:txBody>
-                  <a:tcPr marL="91440" marR="91440" marT="45720" marB="45720" anchor="ctr">
+                  <a:tcPr anchor="ctr">
                     <a:lnL w="6350" cap="flat" cmpd="sng" algn="ctr">
                       <a:solidFill>
                         <a:srgbClr val="D8DAE1"/>
@@ -14802,7 +15291,7 @@
                     <a:bodyPr/>
                     <a:lstStyle/>
                     <a:p>
-                      <a:pPr algn="l" indent="0" marL="0">
+                      <a:pPr marL="0" indent="0" algn="l">
                         <a:buNone/>
                       </a:pPr>
                       <a:r>
@@ -14823,7 +15312,7 @@
                       </a:endParaRPr>
                     </a:p>
                   </a:txBody>
-                  <a:tcPr marL="91440" marR="91440" marT="45720" marB="45720" anchor="ctr">
+                  <a:tcPr anchor="ctr">
                     <a:lnL w="6350" cap="flat" cmpd="sng" algn="ctr">
                       <a:solidFill>
                         <a:srgbClr val="D8DAE1"/>
@@ -14870,7 +15359,7 @@
                     <a:bodyPr/>
                     <a:lstStyle/>
                     <a:p>
-                      <a:pPr algn="l" indent="0" marL="0">
+                      <a:pPr marL="0" indent="0" algn="l">
                         <a:buNone/>
                       </a:pPr>
                       <a:r>
@@ -14891,7 +15380,7 @@
                       </a:endParaRPr>
                     </a:p>
                   </a:txBody>
-                  <a:tcPr marL="91440" marR="91440" marT="45720" marB="45720" anchor="ctr">
+                  <a:tcPr anchor="ctr">
                     <a:lnL w="6350" cap="flat" cmpd="sng" algn="ctr">
                       <a:solidFill>
                         <a:srgbClr val="D8DAE1"/>
@@ -14938,7 +15427,7 @@
                     <a:bodyPr/>
                     <a:lstStyle/>
                     <a:p>
-                      <a:pPr algn="l" indent="0" marL="0">
+                      <a:pPr marL="0" indent="0" algn="l">
                         <a:buNone/>
                       </a:pPr>
                       <a:r>
@@ -14959,7 +15448,7 @@
                       </a:endParaRPr>
                     </a:p>
                   </a:txBody>
-                  <a:tcPr marL="91440" marR="91440" marT="45720" marB="45720" anchor="ctr">
+                  <a:tcPr anchor="ctr">
                     <a:lnL w="6350" cap="flat" cmpd="sng" algn="ctr">
                       <a:solidFill>
                         <a:srgbClr val="D8DAE1"/>
@@ -15001,6 +15490,11 @@
                     </a:solidFill>
                   </a:tcPr>
                 </a:tc>
+                <a:extLst>
+                  <a:ext uri="{0D108BD9-81ED-4DB2-BD59-A6C34878D82A}">
+                    <a16:rowId xmlns:a16="http://schemas.microsoft.com/office/drawing/2014/main" val="10004"/>
+                  </a:ext>
+                </a:extLst>
               </a:tr>
               <a:tr h="360680">
                 <a:tc>
@@ -15008,7 +15502,7 @@
                     <a:bodyPr/>
                     <a:lstStyle/>
                     <a:p>
-                      <a:pPr algn="ctr" indent="0" marL="0">
+                      <a:pPr marL="0" indent="0" algn="ctr">
                         <a:buNone/>
                       </a:pPr>
                       <a:r>
@@ -15029,7 +15523,7 @@
                       </a:endParaRPr>
                     </a:p>
                   </a:txBody>
-                  <a:tcPr marL="91440" marR="91440" marT="45720" marB="45720" anchor="ctr">
+                  <a:tcPr anchor="ctr">
                     <a:lnL w="6350" cap="flat" cmpd="sng" algn="ctr">
                       <a:solidFill>
                         <a:srgbClr val="D8DAE1"/>
@@ -15076,7 +15570,7 @@
                     <a:bodyPr/>
                     <a:lstStyle/>
                     <a:p>
-                      <a:pPr algn="l" indent="0" marL="0">
+                      <a:pPr marL="0" indent="0" algn="l">
                         <a:buNone/>
                       </a:pPr>
                       <a:r>
@@ -15097,7 +15591,7 @@
                       </a:endParaRPr>
                     </a:p>
                   </a:txBody>
-                  <a:tcPr marL="91440" marR="91440" marT="45720" marB="45720" anchor="ctr">
+                  <a:tcPr anchor="ctr">
                     <a:lnL w="6350" cap="flat" cmpd="sng" algn="ctr">
                       <a:solidFill>
                         <a:srgbClr val="D8DAE1"/>
@@ -15144,7 +15638,7 @@
                     <a:bodyPr/>
                     <a:lstStyle/>
                     <a:p>
-                      <a:pPr algn="l" indent="0" marL="0">
+                      <a:pPr marL="0" indent="0" algn="l">
                         <a:buNone/>
                       </a:pPr>
                       <a:r>
@@ -15165,7 +15659,7 @@
                       </a:endParaRPr>
                     </a:p>
                   </a:txBody>
-                  <a:tcPr marL="91440" marR="91440" marT="45720" marB="45720" anchor="ctr">
+                  <a:tcPr anchor="ctr">
                     <a:lnL w="6350" cap="flat" cmpd="sng" algn="ctr">
                       <a:solidFill>
                         <a:srgbClr val="D8DAE1"/>
@@ -15212,7 +15706,7 @@
                     <a:bodyPr/>
                     <a:lstStyle/>
                     <a:p>
-                      <a:pPr algn="l" indent="0" marL="0">
+                      <a:pPr marL="0" indent="0" algn="l">
                         <a:buNone/>
                       </a:pPr>
                       <a:r>
@@ -15233,7 +15727,7 @@
                       </a:endParaRPr>
                     </a:p>
                   </a:txBody>
-                  <a:tcPr marL="91440" marR="91440" marT="45720" marB="45720" anchor="ctr">
+                  <a:tcPr anchor="ctr">
                     <a:lnL w="6350" cap="flat" cmpd="sng" algn="ctr">
                       <a:solidFill>
                         <a:srgbClr val="D8DAE1"/>
@@ -15275,6 +15769,11 @@
                     </a:solidFill>
                   </a:tcPr>
                 </a:tc>
+                <a:extLst>
+                  <a:ext uri="{0D108BD9-81ED-4DB2-BD59-A6C34878D82A}">
+                    <a16:rowId xmlns:a16="http://schemas.microsoft.com/office/drawing/2014/main" val="10005"/>
+                  </a:ext>
+                </a:extLst>
               </a:tr>
               <a:tr h="360680">
                 <a:tc>
@@ -15282,7 +15781,7 @@
                     <a:bodyPr/>
                     <a:lstStyle/>
                     <a:p>
-                      <a:pPr algn="ctr" indent="0" marL="0">
+                      <a:pPr marL="0" indent="0" algn="ctr">
                         <a:buNone/>
                       </a:pPr>
                       <a:r>
@@ -15303,7 +15802,7 @@
                       </a:endParaRPr>
                     </a:p>
                   </a:txBody>
-                  <a:tcPr marL="91440" marR="91440" marT="45720" marB="45720" anchor="ctr">
+                  <a:tcPr anchor="ctr">
                     <a:lnL w="6350" cap="flat" cmpd="sng" algn="ctr">
                       <a:solidFill>
                         <a:srgbClr val="D8DAE1"/>
@@ -15350,7 +15849,7 @@
                     <a:bodyPr/>
                     <a:lstStyle/>
                     <a:p>
-                      <a:pPr algn="l" indent="0" marL="0">
+                      <a:pPr marL="0" indent="0" algn="l">
                         <a:buNone/>
                       </a:pPr>
                       <a:r>
@@ -15371,7 +15870,7 @@
                       </a:endParaRPr>
                     </a:p>
                   </a:txBody>
-                  <a:tcPr marL="91440" marR="91440" marT="45720" marB="45720" anchor="ctr">
+                  <a:tcPr anchor="ctr">
                     <a:lnL w="6350" cap="flat" cmpd="sng" algn="ctr">
                       <a:solidFill>
                         <a:srgbClr val="D8DAE1"/>
@@ -15418,7 +15917,7 @@
                     <a:bodyPr/>
                     <a:lstStyle/>
                     <a:p>
-                      <a:pPr algn="l" indent="0" marL="0">
+                      <a:pPr marL="0" indent="0" algn="l">
                         <a:buNone/>
                       </a:pPr>
                       <a:r>
@@ -15439,7 +15938,7 @@
                       </a:endParaRPr>
                     </a:p>
                   </a:txBody>
-                  <a:tcPr marL="91440" marR="91440" marT="45720" marB="45720" anchor="ctr">
+                  <a:tcPr anchor="ctr">
                     <a:lnL w="6350" cap="flat" cmpd="sng" algn="ctr">
                       <a:solidFill>
                         <a:srgbClr val="D8DAE1"/>
@@ -15486,7 +15985,7 @@
                     <a:bodyPr/>
                     <a:lstStyle/>
                     <a:p>
-                      <a:pPr algn="l" indent="0" marL="0">
+                      <a:pPr marL="0" indent="0" algn="l">
                         <a:buNone/>
                       </a:pPr>
                       <a:r>
@@ -15507,7 +16006,7 @@
                       </a:endParaRPr>
                     </a:p>
                   </a:txBody>
-                  <a:tcPr marL="91440" marR="91440" marT="45720" marB="45720" anchor="ctr">
+                  <a:tcPr anchor="ctr">
                     <a:lnL w="6350" cap="flat" cmpd="sng" algn="ctr">
                       <a:solidFill>
                         <a:srgbClr val="D8DAE1"/>
@@ -15549,6 +16048,11 @@
                     </a:solidFill>
                   </a:tcPr>
                 </a:tc>
+                <a:extLst>
+                  <a:ext uri="{0D108BD9-81ED-4DB2-BD59-A6C34878D82A}">
+                    <a16:rowId xmlns:a16="http://schemas.microsoft.com/office/drawing/2014/main" val="10006"/>
+                  </a:ext>
+                </a:extLst>
               </a:tr>
               <a:tr h="360680">
                 <a:tc>
@@ -15556,7 +16060,7 @@
                     <a:bodyPr/>
                     <a:lstStyle/>
                     <a:p>
-                      <a:pPr algn="ctr" indent="0" marL="0">
+                      <a:pPr marL="0" indent="0" algn="ctr">
                         <a:buNone/>
                       </a:pPr>
                       <a:r>
@@ -15577,7 +16081,7 @@
                       </a:endParaRPr>
                     </a:p>
                   </a:txBody>
-                  <a:tcPr marL="91440" marR="91440" marT="45720" marB="45720" anchor="ctr">
+                  <a:tcPr anchor="ctr">
                     <a:lnL w="6350" cap="flat" cmpd="sng" algn="ctr">
                       <a:solidFill>
                         <a:srgbClr val="D8DAE1"/>
@@ -15624,7 +16128,7 @@
                     <a:bodyPr/>
                     <a:lstStyle/>
                     <a:p>
-                      <a:pPr algn="l" indent="0" marL="0">
+                      <a:pPr marL="0" indent="0" algn="l">
                         <a:buNone/>
                       </a:pPr>
                       <a:r>
@@ -15645,7 +16149,7 @@
                       </a:endParaRPr>
                     </a:p>
                   </a:txBody>
-                  <a:tcPr marL="91440" marR="91440" marT="45720" marB="45720" anchor="ctr">
+                  <a:tcPr anchor="ctr">
                     <a:lnL w="6350" cap="flat" cmpd="sng" algn="ctr">
                       <a:solidFill>
                         <a:srgbClr val="D8DAE1"/>
@@ -15692,7 +16196,7 @@
                     <a:bodyPr/>
                     <a:lstStyle/>
                     <a:p>
-                      <a:pPr algn="l" indent="0" marL="0">
+                      <a:pPr marL="0" indent="0" algn="l">
                         <a:buNone/>
                       </a:pPr>
                       <a:r>
@@ -15713,7 +16217,7 @@
                       </a:endParaRPr>
                     </a:p>
                   </a:txBody>
-                  <a:tcPr marL="91440" marR="91440" marT="45720" marB="45720" anchor="ctr">
+                  <a:tcPr anchor="ctr">
                     <a:lnL w="6350" cap="flat" cmpd="sng" algn="ctr">
                       <a:solidFill>
                         <a:srgbClr val="D8DAE1"/>
@@ -15760,7 +16264,7 @@
                     <a:bodyPr/>
                     <a:lstStyle/>
                     <a:p>
-                      <a:pPr algn="l" indent="0" marL="0">
+                      <a:pPr marL="0" indent="0" algn="l">
                         <a:buNone/>
                       </a:pPr>
                       <a:r>
@@ -15781,7 +16285,7 @@
                       </a:endParaRPr>
                     </a:p>
                   </a:txBody>
-                  <a:tcPr marL="91440" marR="91440" marT="45720" marB="45720" anchor="ctr">
+                  <a:tcPr anchor="ctr">
                     <a:lnL w="6350" cap="flat" cmpd="sng" algn="ctr">
                       <a:solidFill>
                         <a:srgbClr val="D8DAE1"/>
@@ -15823,6 +16327,11 @@
                     </a:solidFill>
                   </a:tcPr>
                 </a:tc>
+                <a:extLst>
+                  <a:ext uri="{0D108BD9-81ED-4DB2-BD59-A6C34878D82A}">
+                    <a16:rowId xmlns:a16="http://schemas.microsoft.com/office/drawing/2014/main" val="10007"/>
+                  </a:ext>
+                </a:extLst>
               </a:tr>
               <a:tr h="360680">
                 <a:tc>
@@ -15830,7 +16339,7 @@
                     <a:bodyPr/>
                     <a:lstStyle/>
                     <a:p>
-                      <a:pPr algn="ctr" indent="0" marL="0">
+                      <a:pPr marL="0" indent="0" algn="ctr">
                         <a:buNone/>
                       </a:pPr>
                       <a:r>
@@ -15851,7 +16360,7 @@
                       </a:endParaRPr>
                     </a:p>
                   </a:txBody>
-                  <a:tcPr marL="91440" marR="91440" marT="45720" marB="45720" anchor="ctr">
+                  <a:tcPr anchor="ctr">
                     <a:lnL w="6350" cap="flat" cmpd="sng" algn="ctr">
                       <a:solidFill>
                         <a:srgbClr val="D8DAE1"/>
@@ -15898,7 +16407,7 @@
                     <a:bodyPr/>
                     <a:lstStyle/>
                     <a:p>
-                      <a:pPr algn="l" indent="0" marL="0">
+                      <a:pPr marL="0" indent="0" algn="l">
                         <a:buNone/>
                       </a:pPr>
                       <a:r>
@@ -15919,7 +16428,7 @@
                       </a:endParaRPr>
                     </a:p>
                   </a:txBody>
-                  <a:tcPr marL="91440" marR="91440" marT="45720" marB="45720" anchor="ctr">
+                  <a:tcPr anchor="ctr">
                     <a:lnL w="6350" cap="flat" cmpd="sng" algn="ctr">
                       <a:solidFill>
                         <a:srgbClr val="D8DAE1"/>
@@ -15966,7 +16475,7 @@
                     <a:bodyPr/>
                     <a:lstStyle/>
                     <a:p>
-                      <a:pPr algn="l" indent="0" marL="0">
+                      <a:pPr marL="0" indent="0" algn="l">
                         <a:buNone/>
                       </a:pPr>
                       <a:r>
@@ -15987,7 +16496,7 @@
                       </a:endParaRPr>
                     </a:p>
                   </a:txBody>
-                  <a:tcPr marL="91440" marR="91440" marT="45720" marB="45720" anchor="ctr">
+                  <a:tcPr anchor="ctr">
                     <a:lnL w="6350" cap="flat" cmpd="sng" algn="ctr">
                       <a:solidFill>
                         <a:srgbClr val="D8DAE1"/>
@@ -16034,7 +16543,7 @@
                     <a:bodyPr/>
                     <a:lstStyle/>
                     <a:p>
-                      <a:pPr algn="l" indent="0" marL="0">
+                      <a:pPr marL="0" indent="0" algn="l">
                         <a:buNone/>
                       </a:pPr>
                       <a:r>
@@ -16055,7 +16564,7 @@
                       </a:endParaRPr>
                     </a:p>
                   </a:txBody>
-                  <a:tcPr marL="91440" marR="91440" marT="45720" marB="45720" anchor="ctr">
+                  <a:tcPr anchor="ctr">
                     <a:lnL w="6350" cap="flat" cmpd="sng" algn="ctr">
                       <a:solidFill>
                         <a:srgbClr val="D8DAE1"/>
@@ -16097,6 +16606,11 @@
                     </a:solidFill>
                   </a:tcPr>
                 </a:tc>
+                <a:extLst>
+                  <a:ext uri="{0D108BD9-81ED-4DB2-BD59-A6C34878D82A}">
+                    <a16:rowId xmlns:a16="http://schemas.microsoft.com/office/drawing/2014/main" val="10008"/>
+                  </a:ext>
+                </a:extLst>
               </a:tr>
             </a:tbl>
           </a:graphicData>
@@ -16128,6 +16642,13 @@
             <a:prstDash val="solid"/>
           </a:ln>
         </p:spPr>
+        <p:txBody>
+          <a:bodyPr/>
+          <a:lstStyle/>
+          <a:p>
+            <a:endParaRPr lang="en-PK"/>
+          </a:p>
+        </p:txBody>
       </p:sp>
       <p:sp>
         <p:nvSpPr>
@@ -16150,7 +16671,7 @@
           <a:bodyPr wrap="square" lIns="0" tIns="0" rIns="0" bIns="0" rtlCol="0" anchor="ctr"/>
           <a:lstStyle/>
           <a:p>
-            <a:pPr indent="0" marL="0">
+            <a:pPr marL="0" indent="0">
               <a:buNone/>
             </a:pPr>
             <a:r>
@@ -16164,9 +16685,6 @@
               </a:rPr>
               <a:t>In progress: </a:t>
             </a:r>
-            <a:pPr indent="0" marL="0">
-              <a:buNone/>
-            </a:pPr>
             <a:r>
               <a:rPr lang="en-US" sz="1000" dirty="0">
                 <a:solidFill>
@@ -16178,9 +16696,6 @@
               </a:rPr>
               <a:t>full 3-stage reproduction (top FYP-1 priority).   </a:t>
             </a:r>
-            <a:pPr indent="0" marL="0">
-              <a:buNone/>
-            </a:pPr>
             <a:r>
               <a:rPr lang="en-US" sz="1000" b="1" dirty="0">
                 <a:solidFill>
@@ -16192,9 +16707,6 @@
               </a:rPr>
               <a:t>Planned: </a:t>
             </a:r>
-            <a:pPr indent="0" marL="0">
-              <a:buNone/>
-            </a:pPr>
             <a:r>
               <a:rPr lang="en-US" sz="1000" dirty="0">
                 <a:solidFill>
@@ -16226,6 +16738,7 @@
         <a:solidFill>
           <a:srgbClr val="FFFFFF"/>
         </a:solidFill>
+        <a:effectLst/>
       </p:bgPr>
     </p:bg>
     <p:spTree>
@@ -16263,11 +16776,11 @@
           <a:bodyPr wrap="square" lIns="0" tIns="0" rIns="0" bIns="0" rtlCol="0" anchor="ctr"/>
           <a:lstStyle/>
           <a:p>
-            <a:pPr indent="0" marL="0">
-              <a:buNone/>
-            </a:pPr>
-            <a:r>
-              <a:rPr lang="en-US" sz="1100" b="1" spc="150" kern="0" dirty="0">
+            <a:pPr marL="0" indent="0">
+              <a:buNone/>
+            </a:pPr>
+            <a:r>
+              <a:rPr lang="en-US" sz="1100" b="1" kern="0" spc="150" dirty="0">
                 <a:solidFill>
                   <a:srgbClr val="8A5F22"/>
                 </a:solidFill>
@@ -16302,7 +16815,7 @@
           <a:bodyPr wrap="square" lIns="0" tIns="0" rIns="0" bIns="0" rtlCol="0" anchor="ctr"/>
           <a:lstStyle/>
           <a:p>
-            <a:pPr indent="0" marL="0">
+            <a:pPr marL="0" indent="0">
               <a:buNone/>
             </a:pPr>
             <a:r>
@@ -16339,6 +16852,13 @@
           </a:solidFill>
           <a:ln/>
         </p:spPr>
+        <p:txBody>
+          <a:bodyPr/>
+          <a:lstStyle/>
+          <a:p>
+            <a:endParaRPr lang="en-PK"/>
+          </a:p>
+        </p:txBody>
       </p:sp>
       <p:sp>
         <p:nvSpPr>
@@ -16361,7 +16881,7 @@
           <a:bodyPr wrap="square" lIns="0" tIns="0" rIns="0" bIns="0" rtlCol="0" anchor="ctr"/>
           <a:lstStyle/>
           <a:p>
-            <a:pPr algn="r" indent="0" marL="0">
+            <a:pPr marL="0" indent="0" algn="r">
               <a:buNone/>
             </a:pPr>
             <a:r>
@@ -16405,6 +16925,13 @@
             <a:prstDash val="solid"/>
           </a:ln>
         </p:spPr>
+        <p:txBody>
+          <a:bodyPr/>
+          <a:lstStyle/>
+          <a:p>
+            <a:endParaRPr lang="en-PK"/>
+          </a:p>
+        </p:txBody>
       </p:sp>
       <p:sp>
         <p:nvSpPr>
@@ -16427,7 +16954,7 @@
           <a:bodyPr wrap="square" lIns="0" tIns="0" rIns="0" bIns="0" rtlCol="0" anchor="ctr"/>
           <a:lstStyle/>
           <a:p>
-            <a:pPr indent="0" marL="0">
+            <a:pPr marL="0" indent="0">
               <a:buNone/>
             </a:pPr>
             <a:r>
@@ -16441,9 +16968,6 @@
               </a:rPr>
               <a:t>Pre-registered acceptance band.  </a:t>
             </a:r>
-            <a:pPr indent="0" marL="0">
-              <a:buNone/>
-            </a:pPr>
             <a:r>
               <a:rPr lang="en-US" sz="1100" dirty="0">
                 <a:solidFill>
@@ -16480,11 +17004,11 @@
           <a:bodyPr wrap="square" lIns="0" tIns="0" rIns="0" bIns="0" rtlCol="0" anchor="ctr"/>
           <a:lstStyle/>
           <a:p>
-            <a:pPr indent="0" marL="0">
-              <a:buNone/>
-            </a:pPr>
-            <a:r>
-              <a:rPr lang="en-US" sz="1000" b="1" spc="100" kern="0" dirty="0">
+            <a:pPr marL="0" indent="0">
+              <a:buNone/>
+            </a:pPr>
+            <a:r>
+              <a:rPr lang="en-US" sz="1000" b="1" kern="0" spc="100" dirty="0">
                 <a:solidFill>
                   <a:srgbClr val="8A5F22"/>
                 </a:solidFill>
@@ -16651,6 +17175,13 @@
             <a:prstDash val="solid"/>
           </a:ln>
         </p:spPr>
+        <p:txBody>
+          <a:bodyPr/>
+          <a:lstStyle/>
+          <a:p>
+            <a:endParaRPr lang="en-PK"/>
+          </a:p>
+        </p:txBody>
       </p:sp>
       <p:sp>
         <p:nvSpPr>
@@ -16673,11 +17204,11 @@
           <a:bodyPr wrap="square" lIns="0" tIns="0" rIns="0" bIns="0" rtlCol="0" anchor="ctr"/>
           <a:lstStyle/>
           <a:p>
-            <a:pPr indent="0" marL="0">
-              <a:buNone/>
-            </a:pPr>
-            <a:r>
-              <a:rPr lang="en-US" sz="950" b="1" spc="100" kern="0" dirty="0">
+            <a:pPr marL="0" indent="0">
+              <a:buNone/>
+            </a:pPr>
+            <a:r>
+              <a:rPr lang="en-US" sz="950" b="1" kern="0" spc="100" dirty="0">
                 <a:solidFill>
                   <a:srgbClr val="5B6270"/>
                 </a:solidFill>
@@ -16712,7 +17243,7 @@
           <a:bodyPr wrap="square" lIns="0" tIns="0" rIns="0" bIns="0" rtlCol="0" anchor="ctr"/>
           <a:lstStyle/>
           <a:p>
-            <a:pPr indent="0" marL="0">
+            <a:pPr marL="0" indent="0">
               <a:buNone/>
             </a:pPr>
             <a:r>
@@ -16756,6 +17287,13 @@
             <a:prstDash val="solid"/>
           </a:ln>
         </p:spPr>
+        <p:txBody>
+          <a:bodyPr/>
+          <a:lstStyle/>
+          <a:p>
+            <a:endParaRPr lang="en-PK"/>
+          </a:p>
+        </p:txBody>
       </p:sp>
       <p:sp>
         <p:nvSpPr>
@@ -16778,7 +17316,7 @@
           <a:bodyPr wrap="square" lIns="0" tIns="0" rIns="0" bIns="0" rtlCol="0" anchor="ctr"/>
           <a:lstStyle/>
           <a:p>
-            <a:pPr indent="0" marL="0">
+            <a:pPr marL="0" indent="0">
               <a:buNone/>
             </a:pPr>
             <a:r>
@@ -16792,9 +17330,6 @@
               </a:rPr>
               <a:t>Cannot support: </a:t>
             </a:r>
-            <a:pPr indent="0" marL="0">
-              <a:buNone/>
-            </a:pPr>
             <a:r>
               <a:rPr lang="en-US" sz="1000" dirty="0">
                 <a:solidFill>
@@ -16831,11 +17366,11 @@
           <a:bodyPr wrap="square" lIns="0" tIns="0" rIns="0" bIns="0" rtlCol="0" anchor="ctr"/>
           <a:lstStyle/>
           <a:p>
-            <a:pPr indent="0" marL="0">
-              <a:buNone/>
-            </a:pPr>
-            <a:r>
-              <a:rPr lang="en-US" sz="1000" b="1" spc="100" kern="0" dirty="0">
+            <a:pPr marL="0" indent="0">
+              <a:buNone/>
+            </a:pPr>
+            <a:r>
+              <a:rPr lang="en-US" sz="1000" b="1" kern="0" spc="100" dirty="0">
                 <a:solidFill>
                   <a:srgbClr val="8A5F22"/>
                 </a:solidFill>
@@ -16875,6 +17410,13 @@
             <a:prstDash val="solid"/>
           </a:ln>
         </p:spPr>
+        <p:txBody>
+          <a:bodyPr/>
+          <a:lstStyle/>
+          <a:p>
+            <a:endParaRPr lang="en-PK"/>
+          </a:p>
+        </p:txBody>
       </p:sp>
       <p:sp>
         <p:nvSpPr>
@@ -16897,7 +17439,7 @@
           <a:bodyPr wrap="square" lIns="0" tIns="0" rIns="0" bIns="0" rtlCol="0" anchor="ctr"/>
           <a:lstStyle/>
           <a:p>
-            <a:pPr indent="0" marL="0">
+            <a:pPr marL="0" indent="0">
               <a:buNone/>
             </a:pPr>
             <a:r>
@@ -16936,7 +17478,7 @@
           <a:bodyPr wrap="square" lIns="0" tIns="0" rIns="0" bIns="0" rtlCol="0" anchor="ctr"/>
           <a:lstStyle/>
           <a:p>
-            <a:pPr indent="0" marL="0">
+            <a:pPr marL="0" indent="0">
               <a:buNone/>
             </a:pPr>
             <a:r>
@@ -16980,6 +17522,13 @@
             <a:prstDash val="solid"/>
           </a:ln>
         </p:spPr>
+        <p:txBody>
+          <a:bodyPr/>
+          <a:lstStyle/>
+          <a:p>
+            <a:endParaRPr lang="en-PK"/>
+          </a:p>
+        </p:txBody>
       </p:sp>
       <p:sp>
         <p:nvSpPr>
@@ -17002,7 +17551,7 @@
           <a:bodyPr wrap="square" lIns="0" tIns="0" rIns="0" bIns="0" rtlCol="0" anchor="ctr"/>
           <a:lstStyle/>
           <a:p>
-            <a:pPr indent="0" marL="0">
+            <a:pPr marL="0" indent="0">
               <a:buNone/>
             </a:pPr>
             <a:r>
@@ -17041,7 +17590,7 @@
           <a:bodyPr wrap="square" lIns="0" tIns="0" rIns="0" bIns="0" rtlCol="0" anchor="ctr"/>
           <a:lstStyle/>
           <a:p>
-            <a:pPr indent="0" marL="0">
+            <a:pPr marL="0" indent="0">
               <a:buNone/>
             </a:pPr>
             <a:r>
@@ -17085,6 +17634,13 @@
             <a:prstDash val="solid"/>
           </a:ln>
         </p:spPr>
+        <p:txBody>
+          <a:bodyPr/>
+          <a:lstStyle/>
+          <a:p>
+            <a:endParaRPr lang="en-PK"/>
+          </a:p>
+        </p:txBody>
       </p:sp>
       <p:sp>
         <p:nvSpPr>
@@ -17107,7 +17663,7 @@
           <a:bodyPr wrap="square" lIns="0" tIns="0" rIns="0" bIns="0" rtlCol="0" anchor="ctr"/>
           <a:lstStyle/>
           <a:p>
-            <a:pPr indent="0" marL="0">
+            <a:pPr marL="0" indent="0">
               <a:buNone/>
             </a:pPr>
             <a:r>
@@ -17146,7 +17702,7 @@
           <a:bodyPr wrap="square" lIns="0" tIns="0" rIns="0" bIns="0" rtlCol="0" anchor="ctr"/>
           <a:lstStyle/>
           <a:p>
-            <a:pPr indent="0" marL="0">
+            <a:pPr marL="0" indent="0">
               <a:buNone/>
             </a:pPr>
             <a:r>
@@ -17190,6 +17746,13 @@
             <a:prstDash val="solid"/>
           </a:ln>
         </p:spPr>
+        <p:txBody>
+          <a:bodyPr/>
+          <a:lstStyle/>
+          <a:p>
+            <a:endParaRPr lang="en-PK"/>
+          </a:p>
+        </p:txBody>
       </p:sp>
       <p:sp>
         <p:nvSpPr>
@@ -17212,7 +17775,7 @@
           <a:bodyPr wrap="square" lIns="0" tIns="0" rIns="0" bIns="0" rtlCol="0" anchor="ctr"/>
           <a:lstStyle/>
           <a:p>
-            <a:pPr indent="0" marL="0">
+            <a:pPr marL="0" indent="0">
               <a:buNone/>
             </a:pPr>
             <a:r>
@@ -17251,7 +17814,7 @@
           <a:bodyPr wrap="square" lIns="0" tIns="0" rIns="0" bIns="0" rtlCol="0" anchor="ctr"/>
           <a:lstStyle/>
           <a:p>
-            <a:pPr indent="0" marL="0">
+            <a:pPr marL="0" indent="0">
               <a:buNone/>
             </a:pPr>
             <a:r>
@@ -17285,6 +17848,7 @@
         <a:solidFill>
           <a:srgbClr val="FFFFFF"/>
         </a:solidFill>
+        <a:effectLst/>
       </p:bgPr>
     </p:bg>
     <p:spTree>
@@ -17322,11 +17886,11 @@
           <a:bodyPr wrap="square" lIns="0" tIns="0" rIns="0" bIns="0" rtlCol="0" anchor="ctr"/>
           <a:lstStyle/>
           <a:p>
-            <a:pPr indent="0" marL="0">
-              <a:buNone/>
-            </a:pPr>
-            <a:r>
-              <a:rPr lang="en-US" sz="1100" b="1" spc="150" kern="0" dirty="0">
+            <a:pPr marL="0" indent="0">
+              <a:buNone/>
+            </a:pPr>
+            <a:r>
+              <a:rPr lang="en-US" sz="1100" b="1" kern="0" spc="150" dirty="0">
                 <a:solidFill>
                   <a:srgbClr val="8A5F22"/>
                 </a:solidFill>
@@ -17361,7 +17925,7 @@
           <a:bodyPr wrap="square" lIns="0" tIns="0" rIns="0" bIns="0" rtlCol="0" anchor="ctr"/>
           <a:lstStyle/>
           <a:p>
-            <a:pPr indent="0" marL="0">
+            <a:pPr marL="0" indent="0">
               <a:buNone/>
             </a:pPr>
             <a:r>
@@ -17398,6 +17962,13 @@
           </a:solidFill>
           <a:ln/>
         </p:spPr>
+        <p:txBody>
+          <a:bodyPr/>
+          <a:lstStyle/>
+          <a:p>
+            <a:endParaRPr lang="en-PK"/>
+          </a:p>
+        </p:txBody>
       </p:sp>
       <p:sp>
         <p:nvSpPr>
@@ -17420,7 +17991,7 @@
           <a:bodyPr wrap="square" lIns="0" tIns="0" rIns="0" bIns="0" rtlCol="0" anchor="ctr"/>
           <a:lstStyle/>
           <a:p>
-            <a:pPr algn="r" indent="0" marL="0">
+            <a:pPr marL="0" indent="0" algn="r">
               <a:buNone/>
             </a:pPr>
             <a:r>
@@ -17459,11 +18030,11 @@
           <a:bodyPr wrap="square" lIns="0" tIns="0" rIns="0" bIns="0" rtlCol="0" anchor="ctr"/>
           <a:lstStyle/>
           <a:p>
-            <a:pPr indent="0" marL="0">
-              <a:buNone/>
-            </a:pPr>
-            <a:r>
-              <a:rPr lang="en-US" sz="1000" b="1" spc="100" kern="0" dirty="0">
+            <a:pPr marL="0" indent="0">
+              <a:buNone/>
+            </a:pPr>
+            <a:r>
+              <a:rPr lang="en-US" sz="1000" b="1" kern="0" spc="100" dirty="0">
                 <a:solidFill>
                   <a:srgbClr val="8A5F22"/>
                 </a:solidFill>
@@ -17503,6 +18074,13 @@
             <a:prstDash val="solid"/>
           </a:ln>
         </p:spPr>
+        <p:txBody>
+          <a:bodyPr/>
+          <a:lstStyle/>
+          <a:p>
+            <a:endParaRPr lang="en-PK"/>
+          </a:p>
+        </p:txBody>
       </p:sp>
       <p:sp>
         <p:nvSpPr>
@@ -17525,7 +18103,7 @@
           <a:bodyPr wrap="square" lIns="0" tIns="0" rIns="0" bIns="0" rtlCol="0" anchor="ctr"/>
           <a:lstStyle/>
           <a:p>
-            <a:pPr indent="0" marL="0">
+            <a:pPr marL="0" indent="0">
               <a:buNone/>
             </a:pPr>
             <a:r>
@@ -17564,7 +18142,7 @@
           <a:bodyPr wrap="square" lIns="0" tIns="0" rIns="0" bIns="0" rtlCol="0" anchor="ctr"/>
           <a:lstStyle/>
           <a:p>
-            <a:pPr indent="0" marL="0">
+            <a:pPr marL="0" indent="0">
               <a:buNone/>
             </a:pPr>
             <a:r>
@@ -17608,6 +18186,13 @@
             <a:prstDash val="solid"/>
           </a:ln>
         </p:spPr>
+        <p:txBody>
+          <a:bodyPr/>
+          <a:lstStyle/>
+          <a:p>
+            <a:endParaRPr lang="en-PK"/>
+          </a:p>
+        </p:txBody>
       </p:sp>
       <p:sp>
         <p:nvSpPr>
@@ -17630,7 +18215,7 @@
           <a:bodyPr wrap="square" lIns="0" tIns="0" rIns="0" bIns="0" rtlCol="0" anchor="ctr"/>
           <a:lstStyle/>
           <a:p>
-            <a:pPr indent="0" marL="0">
+            <a:pPr marL="0" indent="0">
               <a:buNone/>
             </a:pPr>
             <a:r>
@@ -17669,7 +18254,7 @@
           <a:bodyPr wrap="square" lIns="0" tIns="0" rIns="0" bIns="0" rtlCol="0" anchor="ctr"/>
           <a:lstStyle/>
           <a:p>
-            <a:pPr indent="0" marL="0">
+            <a:pPr marL="0" indent="0">
               <a:buNone/>
             </a:pPr>
             <a:r>
@@ -17708,7 +18293,7 @@
           <a:bodyPr wrap="square" lIns="0" tIns="0" rIns="0" bIns="0" rtlCol="0" anchor="ctr"/>
           <a:lstStyle/>
           <a:p>
-            <a:pPr indent="0" marL="0">
+            <a:pPr marL="0" indent="0">
               <a:buNone/>
             </a:pPr>
             <a:r>
@@ -17752,6 +18337,13 @@
             <a:prstDash val="solid"/>
           </a:ln>
         </p:spPr>
+        <p:txBody>
+          <a:bodyPr/>
+          <a:lstStyle/>
+          <a:p>
+            <a:endParaRPr lang="en-PK"/>
+          </a:p>
+        </p:txBody>
       </p:sp>
       <p:sp>
         <p:nvSpPr>
@@ -17774,7 +18366,7 @@
           <a:bodyPr wrap="square" lIns="0" tIns="0" rIns="0" bIns="0" rtlCol="0" anchor="ctr"/>
           <a:lstStyle/>
           <a:p>
-            <a:pPr indent="0" marL="0">
+            <a:pPr marL="0" indent="0">
               <a:buNone/>
             </a:pPr>
             <a:r>
@@ -17791,7 +18383,7 @@
             <a:endParaRPr lang="en-US" sz="1600" dirty="0"/>
           </a:p>
           <a:p>
-            <a:pPr indent="0" marL="0">
+            <a:pPr marL="0" indent="0">
               <a:buNone/>
             </a:pPr>
             <a:r>
@@ -17830,11 +18422,11 @@
           <a:bodyPr wrap="square" lIns="0" tIns="0" rIns="0" bIns="0" rtlCol="0" anchor="ctr"/>
           <a:lstStyle/>
           <a:p>
-            <a:pPr indent="0" marL="0">
-              <a:buNone/>
-            </a:pPr>
-            <a:r>
-              <a:rPr lang="en-US" sz="950" b="1" spc="100" kern="0" dirty="0">
+            <a:pPr marL="0" indent="0">
+              <a:buNone/>
+            </a:pPr>
+            <a:r>
+              <a:rPr lang="en-US" sz="950" b="1" kern="0" spc="100" dirty="0">
                 <a:solidFill>
                   <a:srgbClr val="5B6270"/>
                 </a:solidFill>
@@ -17869,7 +18461,7 @@
           <a:bodyPr wrap="square" lIns="0" tIns="0" rIns="0" bIns="0" rtlCol="0" anchor="ctr"/>
           <a:lstStyle/>
           <a:p>
-            <a:pPr indent="0" marL="0">
+            <a:pPr marL="0" indent="0">
               <a:buNone/>
             </a:pPr>
             <a:r>
@@ -17913,6 +18505,13 @@
             <a:prstDash val="solid"/>
           </a:ln>
         </p:spPr>
+        <p:txBody>
+          <a:bodyPr/>
+          <a:lstStyle/>
+          <a:p>
+            <a:endParaRPr lang="en-PK"/>
+          </a:p>
+        </p:txBody>
       </p:sp>
       <p:sp>
         <p:nvSpPr>
@@ -17935,7 +18534,7 @@
           <a:bodyPr wrap="square" lIns="0" tIns="0" rIns="0" bIns="0" rtlCol="0" anchor="ctr"/>
           <a:lstStyle/>
           <a:p>
-            <a:pPr indent="0" marL="0">
+            <a:pPr marL="0" indent="0">
               <a:buNone/>
             </a:pPr>
             <a:r>
@@ -17949,9 +18548,6 @@
               </a:rPr>
               <a:t>Ethical: </a:t>
             </a:r>
-            <a:pPr indent="0" marL="0">
-              <a:buNone/>
-            </a:pPr>
             <a:r>
               <a:rPr lang="en-US" sz="930" dirty="0">
                 <a:solidFill>
@@ -17988,11 +18584,11 @@
           <a:bodyPr wrap="square" lIns="0" tIns="0" rIns="0" bIns="0" rtlCol="0" anchor="ctr"/>
           <a:lstStyle/>
           <a:p>
-            <a:pPr indent="0" marL="0">
-              <a:buNone/>
-            </a:pPr>
-            <a:r>
-              <a:rPr lang="en-US" sz="1000" b="1" spc="100" kern="0" dirty="0">
+            <a:pPr marL="0" indent="0">
+              <a:buNone/>
+            </a:pPr>
+            <a:r>
+              <a:rPr lang="en-US" sz="1000" b="1" kern="0" spc="100" dirty="0">
                 <a:solidFill>
                   <a:srgbClr val="8A5F22"/>
                 </a:solidFill>
@@ -18032,6 +18628,13 @@
             <a:prstDash val="solid"/>
           </a:ln>
         </p:spPr>
+        <p:txBody>
+          <a:bodyPr/>
+          <a:lstStyle/>
+          <a:p>
+            <a:endParaRPr lang="en-PK"/>
+          </a:p>
+        </p:txBody>
       </p:sp>
       <p:sp>
         <p:nvSpPr>
@@ -18054,7 +18657,7 @@
           <a:bodyPr wrap="square" lIns="0" tIns="0" rIns="0" bIns="0" rtlCol="0" anchor="ctr"/>
           <a:lstStyle/>
           <a:p>
-            <a:pPr indent="0" marL="0">
+            <a:pPr marL="0" indent="0">
               <a:buNone/>
             </a:pPr>
             <a:r>
@@ -18093,7 +18696,7 @@
           <a:bodyPr wrap="square" lIns="0" tIns="0" rIns="0" bIns="0" rtlCol="0" anchor="ctr"/>
           <a:lstStyle/>
           <a:p>
-            <a:pPr indent="0" marL="0">
+            <a:pPr marL="0" indent="0">
               <a:buNone/>
             </a:pPr>
             <a:r>
@@ -18137,6 +18740,13 @@
             <a:prstDash val="solid"/>
           </a:ln>
         </p:spPr>
+        <p:txBody>
+          <a:bodyPr/>
+          <a:lstStyle/>
+          <a:p>
+            <a:endParaRPr lang="en-PK"/>
+          </a:p>
+        </p:txBody>
       </p:sp>
       <p:sp>
         <p:nvSpPr>
@@ -18159,7 +18769,7 @@
           <a:bodyPr wrap="square" lIns="0" tIns="0" rIns="0" bIns="0" rtlCol="0" anchor="ctr"/>
           <a:lstStyle/>
           <a:p>
-            <a:pPr indent="0" marL="0">
+            <a:pPr marL="0" indent="0">
               <a:buNone/>
             </a:pPr>
             <a:r>
@@ -18198,7 +18808,7 @@
           <a:bodyPr wrap="square" lIns="0" tIns="0" rIns="0" bIns="0" rtlCol="0" anchor="ctr"/>
           <a:lstStyle/>
           <a:p>
-            <a:pPr indent="0" marL="0">
+            <a:pPr marL="0" indent="0">
               <a:buNone/>
             </a:pPr>
             <a:r>
@@ -18242,6 +18852,13 @@
             <a:prstDash val="solid"/>
           </a:ln>
         </p:spPr>
+        <p:txBody>
+          <a:bodyPr/>
+          <a:lstStyle/>
+          <a:p>
+            <a:endParaRPr lang="en-PK"/>
+          </a:p>
+        </p:txBody>
       </p:sp>
       <p:sp>
         <p:nvSpPr>
@@ -18264,7 +18881,7 @@
           <a:bodyPr wrap="square" lIns="0" tIns="0" rIns="0" bIns="0" rtlCol="0" anchor="ctr"/>
           <a:lstStyle/>
           <a:p>
-            <a:pPr indent="0" marL="0">
+            <a:pPr marL="0" indent="0">
               <a:buNone/>
             </a:pPr>
             <a:r>
@@ -18303,7 +18920,7 @@
           <a:bodyPr wrap="square" lIns="0" tIns="0" rIns="0" bIns="0" rtlCol="0" anchor="ctr"/>
           <a:lstStyle/>
           <a:p>
-            <a:pPr indent="0" marL="0">
+            <a:pPr marL="0" indent="0">
               <a:buNone/>
             </a:pPr>
             <a:r>
@@ -18347,6 +18964,13 @@
             <a:prstDash val="solid"/>
           </a:ln>
         </p:spPr>
+        <p:txBody>
+          <a:bodyPr/>
+          <a:lstStyle/>
+          <a:p>
+            <a:endParaRPr lang="en-PK"/>
+          </a:p>
+        </p:txBody>
       </p:sp>
       <p:sp>
         <p:nvSpPr>
@@ -18369,7 +18993,7 @@
           <a:bodyPr wrap="square" lIns="0" tIns="0" rIns="0" bIns="0" rtlCol="0" anchor="ctr"/>
           <a:lstStyle/>
           <a:p>
-            <a:pPr indent="0" marL="0">
+            <a:pPr marL="0" indent="0">
               <a:buNone/>
             </a:pPr>
             <a:r>
@@ -18408,7 +19032,7 @@
           <a:bodyPr wrap="square" lIns="0" tIns="0" rIns="0" bIns="0" rtlCol="0" anchor="ctr"/>
           <a:lstStyle/>
           <a:p>
-            <a:pPr indent="0" marL="0">
+            <a:pPr marL="0" indent="0">
               <a:buNone/>
             </a:pPr>
             <a:r>
@@ -18452,6 +19076,13 @@
             <a:prstDash val="solid"/>
           </a:ln>
         </p:spPr>
+        <p:txBody>
+          <a:bodyPr/>
+          <a:lstStyle/>
+          <a:p>
+            <a:endParaRPr lang="en-PK"/>
+          </a:p>
+        </p:txBody>
       </p:sp>
       <p:sp>
         <p:nvSpPr>
@@ -18474,7 +19105,7 @@
           <a:bodyPr wrap="square" lIns="0" tIns="0" rIns="0" bIns="0" rtlCol="0" anchor="ctr"/>
           <a:lstStyle/>
           <a:p>
-            <a:pPr indent="0" marL="0">
+            <a:pPr marL="0" indent="0">
               <a:buNone/>
             </a:pPr>
             <a:r>
@@ -18513,7 +19144,7 @@
           <a:bodyPr wrap="square" lIns="0" tIns="0" rIns="0" bIns="0" rtlCol="0" anchor="ctr"/>
           <a:lstStyle/>
           <a:p>
-            <a:pPr indent="0" marL="0">
+            <a:pPr marL="0" indent="0">
               <a:buNone/>
             </a:pPr>
             <a:r>
@@ -18832,4 +19463,319 @@
     </a:ext>
   </a:extLst>
 </a:theme>
+</file>
+
+<file path=ppt/theme/theme2.xml><?xml version="1.0" encoding="utf-8"?>
+<a:theme xmlns:a="http://schemas.openxmlformats.org/drawingml/2006/main" name="Office Theme">
+  <a:themeElements>
+    <a:clrScheme name="Office">
+      <a:dk1>
+        <a:sysClr val="windowText" lastClr="000000"/>
+      </a:dk1>
+      <a:lt1>
+        <a:sysClr val="window" lastClr="FFFFFF"/>
+      </a:lt1>
+      <a:dk2>
+        <a:srgbClr val="0E2841"/>
+      </a:dk2>
+      <a:lt2>
+        <a:srgbClr val="E8E8E8"/>
+      </a:lt2>
+      <a:accent1>
+        <a:srgbClr val="156082"/>
+      </a:accent1>
+      <a:accent2>
+        <a:srgbClr val="E97132"/>
+      </a:accent2>
+      <a:accent3>
+        <a:srgbClr val="196B24"/>
+      </a:accent3>
+      <a:accent4>
+        <a:srgbClr val="0F9ED5"/>
+      </a:accent4>
+      <a:accent5>
+        <a:srgbClr val="A02B93"/>
+      </a:accent5>
+      <a:accent6>
+        <a:srgbClr val="4EA72E"/>
+      </a:accent6>
+      <a:hlink>
+        <a:srgbClr val="467886"/>
+      </a:hlink>
+      <a:folHlink>
+        <a:srgbClr val="96607D"/>
+      </a:folHlink>
+    </a:clrScheme>
+    <a:fontScheme name="Office">
+      <a:majorFont>
+        <a:latin typeface="Aptos Display" panose="02110004020202020204"/>
+        <a:ea typeface=""/>
+        <a:cs typeface=""/>
+        <a:font script="Jpan" typeface="游ゴシック Light"/>
+        <a:font script="Hang" typeface="맑은 고딕"/>
+        <a:font script="Hans" typeface="等线 Light"/>
+        <a:font script="Hant" typeface="新細明體"/>
+        <a:font script="Arab" typeface="Times New Roman"/>
+        <a:font script="Hebr" typeface="Times New Roman"/>
+        <a:font script="Thai" typeface="Angsana New"/>
+        <a:font script="Ethi" typeface="Nyala"/>
+        <a:font script="Beng" typeface="Vrinda"/>
+        <a:font script="Gujr" typeface="Shruti"/>
+        <a:font script="Khmr" typeface="MoolBoran"/>
+        <a:font script="Knda" typeface="Tunga"/>
+        <a:font script="Guru" typeface="Raavi"/>
+        <a:font script="Cans" typeface="Euphemia"/>
+        <a:font script="Cher" typeface="Plantagenet Cherokee"/>
+        <a:font script="Yiii" typeface="Microsoft Yi Baiti"/>
+        <a:font script="Tibt" typeface="Microsoft Himalaya"/>
+        <a:font script="Thaa" typeface="MV Boli"/>
+        <a:font script="Deva" typeface="Mangal"/>
+        <a:font script="Telu" typeface="Gautami"/>
+        <a:font script="Taml" typeface="Latha"/>
+        <a:font script="Syrc" typeface="Estrangelo Edessa"/>
+        <a:font script="Orya" typeface="Kalinga"/>
+        <a:font script="Mlym" typeface="Kartika"/>
+        <a:font script="Laoo" typeface="DokChampa"/>
+        <a:font script="Sinh" typeface="Iskoola Pota"/>
+        <a:font script="Mong" typeface="Mongolian Baiti"/>
+        <a:font script="Viet" typeface="Times New Roman"/>
+        <a:font script="Uigh" typeface="Microsoft Uighur"/>
+        <a:font script="Geor" typeface="Sylfaen"/>
+        <a:font script="Armn" typeface="Arial"/>
+        <a:font script="Bugi" typeface="Leelawadee UI"/>
+        <a:font script="Bopo" typeface="Microsoft JhengHei"/>
+        <a:font script="Java" typeface="Javanese Text"/>
+        <a:font script="Lisu" typeface="Segoe UI"/>
+        <a:font script="Mymr" typeface="Myanmar Text"/>
+        <a:font script="Nkoo" typeface="Ebrima"/>
+        <a:font script="Olck" typeface="Nirmala UI"/>
+        <a:font script="Osma" typeface="Ebrima"/>
+        <a:font script="Phag" typeface="Phagspa"/>
+        <a:font script="Syrn" typeface="Estrangelo Edessa"/>
+        <a:font script="Syrj" typeface="Estrangelo Edessa"/>
+        <a:font script="Syre" typeface="Estrangelo Edessa"/>
+        <a:font script="Sora" typeface="Nirmala UI"/>
+        <a:font script="Tale" typeface="Microsoft Tai Le"/>
+        <a:font script="Talu" typeface="Microsoft New Tai Lue"/>
+        <a:font script="Tfng" typeface="Ebrima"/>
+      </a:majorFont>
+      <a:minorFont>
+        <a:latin typeface="Aptos" panose="02110004020202020204"/>
+        <a:ea typeface=""/>
+        <a:cs typeface=""/>
+        <a:font script="Jpan" typeface="游ゴシック"/>
+        <a:font script="Hang" typeface="맑은 고딕"/>
+        <a:font script="Hans" typeface="等线"/>
+        <a:font script="Hant" typeface="新細明體"/>
+        <a:font script="Arab" typeface="Arial"/>
+        <a:font script="Hebr" typeface="Arial"/>
+        <a:font script="Thai" typeface="Cordia New"/>
+        <a:font script="Ethi" typeface="Nyala"/>
+        <a:font script="Beng" typeface="Vrinda"/>
+        <a:font script="Gujr" typeface="Shruti"/>
+        <a:font script="Khmr" typeface="DaunPenh"/>
+        <a:font script="Knda" typeface="Tunga"/>
+        <a:font script="Guru" typeface="Raavi"/>
+        <a:font script="Cans" typeface="Euphemia"/>
+        <a:font script="Cher" typeface="Plantagenet Cherokee"/>
+        <a:font script="Yiii" typeface="Microsoft Yi Baiti"/>
+        <a:font script="Tibt" typeface="Microsoft Himalaya"/>
+        <a:font script="Thaa" typeface="MV Boli"/>
+        <a:font script="Deva" typeface="Mangal"/>
+        <a:font script="Telu" typeface="Gautami"/>
+        <a:font script="Taml" typeface="Latha"/>
+        <a:font script="Syrc" typeface="Estrangelo Edessa"/>
+        <a:font script="Orya" typeface="Kalinga"/>
+        <a:font script="Mlym" typeface="Kartika"/>
+        <a:font script="Laoo" typeface="DokChampa"/>
+        <a:font script="Sinh" typeface="Iskoola Pota"/>
+        <a:font script="Mong" typeface="Mongolian Baiti"/>
+        <a:font script="Viet" typeface="Arial"/>
+        <a:font script="Uigh" typeface="Microsoft Uighur"/>
+        <a:font script="Geor" typeface="Sylfaen"/>
+        <a:font script="Armn" typeface="Arial"/>
+        <a:font script="Bugi" typeface="Leelawadee UI"/>
+        <a:font script="Bopo" typeface="Microsoft JhengHei"/>
+        <a:font script="Java" typeface="Javanese Text"/>
+        <a:font script="Lisu" typeface="Segoe UI"/>
+        <a:font script="Mymr" typeface="Myanmar Text"/>
+        <a:font script="Nkoo" typeface="Ebrima"/>
+        <a:font script="Olck" typeface="Nirmala UI"/>
+        <a:font script="Osma" typeface="Ebrima"/>
+        <a:font script="Phag" typeface="Phagspa"/>
+        <a:font script="Syrn" typeface="Estrangelo Edessa"/>
+        <a:font script="Syrj" typeface="Estrangelo Edessa"/>
+        <a:font script="Syre" typeface="Estrangelo Edessa"/>
+        <a:font script="Sora" typeface="Nirmala UI"/>
+        <a:font script="Tale" typeface="Microsoft Tai Le"/>
+        <a:font script="Talu" typeface="Microsoft New Tai Lue"/>
+        <a:font script="Tfng" typeface="Ebrima"/>
+      </a:minorFont>
+    </a:fontScheme>
+    <a:fmtScheme name="Office">
+      <a:fillStyleLst>
+        <a:solidFill>
+          <a:schemeClr val="phClr"/>
+        </a:solidFill>
+        <a:gradFill rotWithShape="1">
+          <a:gsLst>
+            <a:gs pos="0">
+              <a:schemeClr val="phClr">
+                <a:lumMod val="110000"/>
+                <a:satMod val="105000"/>
+                <a:tint val="67000"/>
+              </a:schemeClr>
+            </a:gs>
+            <a:gs pos="50000">
+              <a:schemeClr val="phClr">
+                <a:lumMod val="105000"/>
+                <a:satMod val="103000"/>
+                <a:tint val="73000"/>
+              </a:schemeClr>
+            </a:gs>
+            <a:gs pos="100000">
+              <a:schemeClr val="phClr">
+                <a:lumMod val="105000"/>
+                <a:satMod val="109000"/>
+                <a:tint val="81000"/>
+              </a:schemeClr>
+            </a:gs>
+          </a:gsLst>
+          <a:lin ang="5400000" scaled="0"/>
+        </a:gradFill>
+        <a:gradFill rotWithShape="1">
+          <a:gsLst>
+            <a:gs pos="0">
+              <a:schemeClr val="phClr">
+                <a:satMod val="103000"/>
+                <a:lumMod val="102000"/>
+                <a:tint val="94000"/>
+              </a:schemeClr>
+            </a:gs>
+            <a:gs pos="50000">
+              <a:schemeClr val="phClr">
+                <a:satMod val="110000"/>
+                <a:lumMod val="100000"/>
+                <a:shade val="100000"/>
+              </a:schemeClr>
+            </a:gs>
+            <a:gs pos="100000">
+              <a:schemeClr val="phClr">
+                <a:lumMod val="99000"/>
+                <a:satMod val="120000"/>
+                <a:shade val="78000"/>
+              </a:schemeClr>
+            </a:gs>
+          </a:gsLst>
+          <a:lin ang="5400000" scaled="0"/>
+        </a:gradFill>
+      </a:fillStyleLst>
+      <a:lnStyleLst>
+        <a:ln w="12700" cap="flat" cmpd="sng" algn="ctr">
+          <a:solidFill>
+            <a:schemeClr val="phClr"/>
+          </a:solidFill>
+          <a:prstDash val="solid"/>
+          <a:miter lim="800000"/>
+        </a:ln>
+        <a:ln w="19050" cap="flat" cmpd="sng" algn="ctr">
+          <a:solidFill>
+            <a:schemeClr val="phClr"/>
+          </a:solidFill>
+          <a:prstDash val="solid"/>
+          <a:miter lim="800000"/>
+        </a:ln>
+        <a:ln w="25400" cap="flat" cmpd="sng" algn="ctr">
+          <a:solidFill>
+            <a:schemeClr val="phClr"/>
+          </a:solidFill>
+          <a:prstDash val="solid"/>
+          <a:miter lim="800000"/>
+        </a:ln>
+      </a:lnStyleLst>
+      <a:effectStyleLst>
+        <a:effectStyle>
+          <a:effectLst/>
+        </a:effectStyle>
+        <a:effectStyle>
+          <a:effectLst/>
+        </a:effectStyle>
+        <a:effectStyle>
+          <a:effectLst>
+            <a:outerShdw blurRad="57150" dist="19050" dir="5400000" algn="ctr" rotWithShape="0">
+              <a:srgbClr val="000000">
+                <a:alpha val="63000"/>
+              </a:srgbClr>
+            </a:outerShdw>
+          </a:effectLst>
+        </a:effectStyle>
+      </a:effectStyleLst>
+      <a:bgFillStyleLst>
+        <a:solidFill>
+          <a:schemeClr val="phClr"/>
+        </a:solidFill>
+        <a:solidFill>
+          <a:schemeClr val="phClr">
+            <a:tint val="95000"/>
+            <a:satMod val="170000"/>
+          </a:schemeClr>
+        </a:solidFill>
+        <a:gradFill rotWithShape="1">
+          <a:gsLst>
+            <a:gs pos="0">
+              <a:schemeClr val="phClr">
+                <a:tint val="93000"/>
+                <a:satMod val="150000"/>
+                <a:shade val="98000"/>
+                <a:lumMod val="102000"/>
+              </a:schemeClr>
+            </a:gs>
+            <a:gs pos="50000">
+              <a:schemeClr val="phClr">
+                <a:tint val="98000"/>
+                <a:satMod val="130000"/>
+                <a:shade val="90000"/>
+                <a:lumMod val="103000"/>
+              </a:schemeClr>
+            </a:gs>
+            <a:gs pos="100000">
+              <a:schemeClr val="phClr">
+                <a:shade val="63000"/>
+                <a:satMod val="120000"/>
+              </a:schemeClr>
+            </a:gs>
+          </a:gsLst>
+          <a:lin ang="5400000" scaled="0"/>
+        </a:gradFill>
+      </a:bgFillStyleLst>
+    </a:fmtScheme>
+  </a:themeElements>
+  <a:objectDefaults>
+    <a:lnDef>
+      <a:spPr/>
+      <a:bodyPr/>
+      <a:lstStyle/>
+      <a:style>
+        <a:lnRef idx="2">
+          <a:schemeClr val="accent1"/>
+        </a:lnRef>
+        <a:fillRef idx="0">
+          <a:schemeClr val="accent1"/>
+        </a:fillRef>
+        <a:effectRef idx="1">
+          <a:schemeClr val="accent1"/>
+        </a:effectRef>
+        <a:fontRef idx="minor">
+          <a:schemeClr val="tx1"/>
+        </a:fontRef>
+      </a:style>
+    </a:lnDef>
+  </a:objectDefaults>
+  <a:extraClrSchemeLst/>
+  <a:extLst>
+    <a:ext uri="{05A4C25C-085E-4340-85A3-A5531E510DB2}">
+      <thm15:themeFamily xmlns:thm15="http://schemas.microsoft.com/office/thememl/2012/main" name="Office Theme" id="{2E142A2C-CD16-42D6-873A-C26D2A0506FA}" vid="{1BDDFF52-6CD6-40A5-AB3C-68EB2F1E4D0A}"/>
+    </a:ext>
+  </a:extLst>
+</a:theme>
 </file>